--- a/指導課訪問_みらい青空学園/指導課訪問_５校時指導助言資料_みらい青空学園_プランB.pptx
+++ b/指導課訪問_みらい青空学園/指導課訪問_５校時指導助言資料_みらい青空学園_プランB.pptx
@@ -18,9 +18,11 @@
     <p:sldId id="266" r:id="rId12"/>
     <p:sldId id="267" r:id="rId13"/>
     <p:sldId id="268" r:id="rId14"/>
+    <p:sldId id="269" r:id="rId15"/>
+    <p:sldId id="270" r:id="rId16"/>
   </p:sldIdLst>
   <p:notesMasterIdLst>
-    <p:notesMasterId r:id="rId15"/>
+    <p:notesMasterId r:id="rId17"/>
   </p:notesMasterIdLst>
   <p:sldSz cx="9144000" cy="5143500"/>
   <p:notesSz cx="5143500" cy="9144000"/>
@@ -695,9 +697,10 @@
           <a:p>
             <a:r>
               <a:rPr lang="en-US" dirty="0"/>
-              <a:t>今後に向けてです。本日見えた３つの視点は、学年や教科を越えて使えます。
-学校経営計画に掲げられた「主体的・対話的で深い学びの実現に向けた授業改善」「個に応じたきめ細やかな指導・支援の充実」とも重なります。
-この３つを、９年間の共通の言葉にしていただきたい。小竹小学校との校区別協議会でも、「目指す１５歳の姿」として共有できるはずです。</a:t>
+              <a:t>３つの手だては、子どもに何を育てるのでしょうか。二つあると考えます。
+一つは自己肯定感です。「できる子になる」ことではなく、「成長できる自分を信じること」。自分の段階で挑戦でき、考えが変わってもよいと保障されることで育ちます。
+もう一つが、学習の自己調整です。学習指導要領が示す「学びに向かう力」の中核をなす力です。見通しをもち、振り返り、次につなげる経験の積み重ねで育ちます。
+本日の授業には、この二つが育つ場面がありました。</a:t>
             </a:r>
             <a:endParaRPr lang="en-US" dirty="0"/>
           </a:p>
@@ -785,9 +788,11 @@
           <a:p>
             <a:r>
               <a:rPr lang="en-US" dirty="0"/>
-              <a:t>もう一点。田口先生の指導案の「授業観察の視点」に、こう書かれていました。「指導に当たっての手立ては有効であったか」。
-この問いを、授業のあとに必ず置いていただきたい。手だてを決め、授業で試し、子どもの姿を見て、次の授業に生かす。
-教師が管理する学習から、子どもが管理する学習へ。その転換を支えるのが、この振り返りです。</a:t>
+              <a:t>とくに学習の自己調整について申し上げます。「学びに向かう力」を支える「主体的に学習に取り組む態度」は、粘り強く取り組む側面と、自らの学習を調整しようとする側面の二つで捉えます。
+田口先生は、着替えの前に本時の目標と流れを確認され、学習カードで要点を振り返らせていました。
+塚本先生は、授業のはじめに Today’s Goal と Plan を示し、振り返りをワークシートに記入させていました。
+東海林先生は、議論に入る前に前時のワークシートで自分の考えを確かめさせ、本時の考えを書き残させていました。
+いずれも、目標と振り返りが一対で置かれています。教師が管理する学習から、子どもが管理する学習へ。着実に転換が進んでいます。</a:t>
             </a:r>
             <a:endParaRPr lang="en-US" dirty="0"/>
           </a:p>
@@ -875,9 +880,9 @@
           <a:p>
             <a:r>
               <a:rPr lang="en-US" dirty="0"/>
-              <a:t>まとめます。本日の３つの授業は、いずれも一人一人の差が大きい集団でした。そして３人とも、その差を学びの出発点にされていました。
-見通し、違いに応じること、対話。この３つを９年間で積み上げることが、施設一体型小中一貫教育校としての本校の最大の強みになります。
-「違い」を生かす授業が、９年間の学びをつなぐ。９年間を見通した学びの充実に期待しております。本日は誠にありがとうございました。</a:t>
+              <a:t>今後に向けてです。本日見えた３つの視点は、学年や教科を越えて使えます。
+学校経営計画に掲げられた「主体的・対話的で深い学びの実現に向けた授業改善」「個に応じたきめ細やかな指導・支援の充実」とも重なります。
+この３つを、９年間の共通の言葉にしていただきたい。小竹小学校との校区別協議会でも、「目指す１５歳の姿」として共有できるはずです。</a:t>
             </a:r>
             <a:endParaRPr lang="en-US" dirty="0"/>
           </a:p>
@@ -901,6 +906,186 @@
             <a:fld id="{F7021451-1387-4CA6-816F-3879F97B5CBC}" type="slidenum">
               <a:rPr lang="en-US"/>
               <a:t>13</a:t>
+            </a:fld>
+            <a:endParaRPr lang="en-US"/>
+          </a:p>
+        </p:txBody>
+      </p:sp>
+    </p:spTree>
+    <p:extLst>
+      <p:ext uri="{BB962C8B-B14F-4D97-AF65-F5344CB8AC3E}">
+        <p14:creationId xmlns:p14="http://schemas.microsoft.com/office/powerpoint/2010/main" val="1024086991"/>
+      </p:ext>
+    </p:extLst>
+  </p:cSld>
+  <p:clrMapOvr>
+    <a:masterClrMapping/>
+  </p:clrMapOvr>
+</p:notes>
+</file>
+
+<file path=ppt/notesSlides/notesSlide14.xml><?xml version="1.0" encoding="utf-8"?>
+<p:notes xmlns:a="http://schemas.openxmlformats.org/drawingml/2006/main" xmlns:r="http://schemas.openxmlformats.org/officeDocument/2006/relationships" xmlns:p="http://schemas.openxmlformats.org/presentationml/2006/main">
+  <p:cSld>
+    <p:spTree>
+      <p:nvGrpSpPr>
+        <p:cNvPr id="1" name=""/>
+        <p:cNvGrpSpPr/>
+        <p:nvPr/>
+      </p:nvGrpSpPr>
+      <p:grpSpPr>
+        <a:xfrm>
+          <a:off x="0" y="0"/>
+          <a:ext cx="0" cy="0"/>
+          <a:chOff x="0" y="0"/>
+          <a:chExt cx="0" cy="0"/>
+        </a:xfrm>
+      </p:grpSpPr>
+      <p:sp>
+        <p:nvSpPr>
+          <p:cNvPr id="2" name="Slide Image Placeholder 1"/>
+          <p:cNvSpPr>
+            <a:spLocks noGrp="1" noRot="1" noChangeAspect="1"/>
+          </p:cNvSpPr>
+          <p:nvPr>
+            <p:ph type="sldImg"/>
+          </p:nvPr>
+        </p:nvSpPr>
+        <p:spPr/>
+      </p:sp>
+      <p:sp>
+        <p:nvSpPr>
+          <p:cNvPr id="3" name="Notes Placeholder 2"/>
+          <p:cNvSpPr>
+            <a:spLocks noGrp="1"/>
+          </p:cNvSpPr>
+          <p:nvPr>
+            <p:ph type="body" idx="1"/>
+          </p:nvPr>
+        </p:nvSpPr>
+        <p:spPr/>
+        <p:txBody>
+          <a:bodyPr/>
+          <a:lstStyle/>
+          <a:p>
+            <a:r>
+              <a:rPr lang="en-US" dirty="0"/>
+              <a:t>もう一点。田口先生の指導案の「授業観察の視点」に、こう書かれていました。「指導に当たっての手立ては有効であったか」。
+子どもが学習を調整するように、教師も授業を調整する。手だてを決め、授業で試し、子どもの姿を見て、次の授業に生かす。
+子どもの自己調整と、教師の授業改善。この往還が、９年間の学びを支えていきます。</a:t>
+            </a:r>
+            <a:endParaRPr lang="en-US" dirty="0"/>
+          </a:p>
+        </p:txBody>
+      </p:sp>
+      <p:sp>
+        <p:nvSpPr>
+          <p:cNvPr id="4" name="Slide Number Placeholder 3"/>
+          <p:cNvSpPr>
+            <a:spLocks noGrp="1"/>
+          </p:cNvSpPr>
+          <p:nvPr>
+            <p:ph type="sldNum" sz="quarter" idx="10"/>
+          </p:nvPr>
+        </p:nvSpPr>
+        <p:spPr/>
+        <p:txBody>
+          <a:bodyPr/>
+          <a:lstStyle/>
+          <a:p>
+            <a:fld id="{F7021451-1387-4CA6-816F-3879F97B5CBC}" type="slidenum">
+              <a:rPr lang="en-US"/>
+              <a:t>14</a:t>
+            </a:fld>
+            <a:endParaRPr lang="en-US"/>
+          </a:p>
+        </p:txBody>
+      </p:sp>
+    </p:spTree>
+    <p:extLst>
+      <p:ext uri="{BB962C8B-B14F-4D97-AF65-F5344CB8AC3E}">
+        <p14:creationId xmlns:p14="http://schemas.microsoft.com/office/powerpoint/2010/main" val="1024086991"/>
+      </p:ext>
+    </p:extLst>
+  </p:cSld>
+  <p:clrMapOvr>
+    <a:masterClrMapping/>
+  </p:clrMapOvr>
+</p:notes>
+</file>
+
+<file path=ppt/notesSlides/notesSlide15.xml><?xml version="1.0" encoding="utf-8"?>
+<p:notes xmlns:a="http://schemas.openxmlformats.org/drawingml/2006/main" xmlns:r="http://schemas.openxmlformats.org/officeDocument/2006/relationships" xmlns:p="http://schemas.openxmlformats.org/presentationml/2006/main">
+  <p:cSld>
+    <p:spTree>
+      <p:nvGrpSpPr>
+        <p:cNvPr id="1" name=""/>
+        <p:cNvGrpSpPr/>
+        <p:nvPr/>
+      </p:nvGrpSpPr>
+      <p:grpSpPr>
+        <a:xfrm>
+          <a:off x="0" y="0"/>
+          <a:ext cx="0" cy="0"/>
+          <a:chOff x="0" y="0"/>
+          <a:chExt cx="0" cy="0"/>
+        </a:xfrm>
+      </p:grpSpPr>
+      <p:sp>
+        <p:nvSpPr>
+          <p:cNvPr id="2" name="Slide Image Placeholder 1"/>
+          <p:cNvSpPr>
+            <a:spLocks noGrp="1" noRot="1" noChangeAspect="1"/>
+          </p:cNvSpPr>
+          <p:nvPr>
+            <p:ph type="sldImg"/>
+          </p:nvPr>
+        </p:nvSpPr>
+        <p:spPr/>
+      </p:sp>
+      <p:sp>
+        <p:nvSpPr>
+          <p:cNvPr id="3" name="Notes Placeholder 2"/>
+          <p:cNvSpPr>
+            <a:spLocks noGrp="1"/>
+          </p:cNvSpPr>
+          <p:nvPr>
+            <p:ph type="body" idx="1"/>
+          </p:nvPr>
+        </p:nvSpPr>
+        <p:spPr/>
+        <p:txBody>
+          <a:bodyPr/>
+          <a:lstStyle/>
+          <a:p>
+            <a:r>
+              <a:rPr lang="en-US" dirty="0"/>
+              <a:t>まとめます。３人とも、一人一人の差を学びの出発点にされていました。
+見通し、違いに応じること、対話。その先に育つのが、自己肯定感と、学習の自己調整です。この積み重ねが、９年間を見通した学びの充実につながります。
+「違い」を生かす授業が、９年間の学びをつなぐ。９年間を見通した学びの充実に期待しております。本日は誠にありがとうございました。</a:t>
+            </a:r>
+            <a:endParaRPr lang="en-US" dirty="0"/>
+          </a:p>
+        </p:txBody>
+      </p:sp>
+      <p:sp>
+        <p:nvSpPr>
+          <p:cNvPr id="4" name="Slide Number Placeholder 3"/>
+          <p:cNvSpPr>
+            <a:spLocks noGrp="1"/>
+          </p:cNvSpPr>
+          <p:nvPr>
+            <p:ph type="sldNum" sz="quarter" idx="10"/>
+          </p:nvPr>
+        </p:nvSpPr>
+        <p:spPr/>
+        <p:txBody>
+          <a:bodyPr/>
+          <a:lstStyle/>
+          <a:p>
+            <a:fld id="{F7021451-1387-4CA6-816F-3879F97B5CBC}" type="slidenum">
+              <a:rPr lang="en-US"/>
+              <a:t>15</a:t>
             </a:fld>
             <a:endParaRPr lang="en-US"/>
           </a:p>
@@ -3677,7 +3862,7 @@
                 <a:ea typeface="メイリオ" pitchFamily="34" charset="-122"/>
                 <a:cs typeface="メイリオ" pitchFamily="34" charset="-120"/>
               </a:rPr>
-              <a:t>　③　今後に向けて</a:t>
+              <a:t>　②　３人の授業から</a:t>
             </a:r>
             <a:endParaRPr lang="en-US" sz="3000" dirty="0"/>
           </a:p>
@@ -3697,7 +3882,7 @@
                 <a:ea typeface="メイリオ" pitchFamily="34" charset="-122"/>
                 <a:cs typeface="メイリオ" pitchFamily="34" charset="-120"/>
               </a:rPr>
-              <a:t>　この３つを、９年間の共通の言葉に</a:t>
+              <a:t>　この手だては、子どもに何を育てるか</a:t>
             </a:r>
             <a:endParaRPr lang="en-US" sz="3000" dirty="0"/>
           </a:p>
@@ -3705,60 +3890,18 @@
       </p:sp>
       <p:sp>
         <p:nvSpPr>
-          <p:cNvPr id="3" name="Text 1"/>
-          <p:cNvSpPr txBox="1"/>
-          <p:nvPr/>
-        </p:nvSpPr>
-        <p:spPr>
-          <a:xfrm>
-            <a:off x="475488" y="1417320"/>
-            <a:ext cx="8193024" cy="548640"/>
-          </a:xfrm>
-          <a:prstGeom prst="rect">
-            <a:avLst/>
-          </a:prstGeom>
-          <a:noFill/>
-          <a:ln/>
-        </p:spPr>
-        <p:txBody>
-          <a:bodyPr wrap="square" lIns="0" tIns="0" rIns="0" bIns="0" rtlCol="0" anchor="t"/>
-          <a:lstStyle/>
-          <a:p>
-            <a:pPr algn="l" indent="0" marL="0">
-              <a:lnSpc>
-                <a:spcPct val="120000"/>
-              </a:lnSpc>
-              <a:buNone/>
-            </a:pPr>
-            <a:r>
-              <a:rPr lang="en-US" sz="1800" b="1" dirty="0">
-                <a:solidFill>
-                  <a:srgbClr val="595959"/>
-                </a:solidFill>
-                <a:latin typeface="メイリオ" pitchFamily="34" charset="0"/>
-                <a:ea typeface="メイリオ" pitchFamily="34" charset="-122"/>
-                <a:cs typeface="メイリオ" pitchFamily="34" charset="-120"/>
-              </a:rPr>
-              <a:t>本日見えた３つの視点は、学年や教科を越えて使える。</a:t>
-            </a:r>
-            <a:endParaRPr lang="en-US" sz="1800" dirty="0"/>
-          </a:p>
-        </p:txBody>
-      </p:sp>
-      <p:sp>
-        <p:nvSpPr>
-          <p:cNvPr id="4" name="Shape 2"/>
+          <p:cNvPr id="3" name="Shape 1"/>
           <p:cNvSpPr/>
           <p:nvPr/>
         </p:nvSpPr>
         <p:spPr>
           <a:xfrm>
-            <a:off x="475488" y="2029968"/>
-            <a:ext cx="2468880" cy="566928"/>
+            <a:off x="320040" y="1353312"/>
+            <a:ext cx="2697480" cy="493776"/>
           </a:xfrm>
           <a:prstGeom prst="roundRect">
             <a:avLst>
-              <a:gd name="adj" fmla="val 11290"/>
+              <a:gd name="adj" fmla="val 12963"/>
             </a:avLst>
           </a:prstGeom>
           <a:solidFill>
@@ -3769,14 +3912,14 @@
       </p:sp>
       <p:sp>
         <p:nvSpPr>
-          <p:cNvPr id="5" name="Text 3"/>
-          <p:cNvSpPr txBox="1"/>
-          <p:nvPr/>
-        </p:nvSpPr>
-        <p:spPr>
-          <a:xfrm>
-            <a:off x="475488" y="2029968"/>
-            <a:ext cx="2468880" cy="566928"/>
+          <p:cNvPr id="4" name="Text 2"/>
+          <p:cNvSpPr txBox="1"/>
+          <p:nvPr/>
+        </p:nvSpPr>
+        <p:spPr>
+          <a:xfrm>
+            <a:off x="320040" y="1353312"/>
+            <a:ext cx="2697480" cy="493776"/>
           </a:xfrm>
           <a:prstGeom prst="rect">
             <a:avLst/>
@@ -3811,18 +3954,18 @@
       </p:sp>
       <p:sp>
         <p:nvSpPr>
-          <p:cNvPr id="6" name="Shape 4"/>
+          <p:cNvPr id="5" name="Shape 3"/>
           <p:cNvSpPr/>
           <p:nvPr/>
         </p:nvSpPr>
         <p:spPr>
           <a:xfrm>
-            <a:off x="3218688" y="2029968"/>
-            <a:ext cx="2468880" cy="566928"/>
+            <a:off x="3227832" y="1353312"/>
+            <a:ext cx="2697480" cy="493776"/>
           </a:xfrm>
           <a:prstGeom prst="roundRect">
             <a:avLst>
-              <a:gd name="adj" fmla="val 11290"/>
+              <a:gd name="adj" fmla="val 12963"/>
             </a:avLst>
           </a:prstGeom>
           <a:solidFill>
@@ -3833,14 +3976,14 @@
       </p:sp>
       <p:sp>
         <p:nvSpPr>
-          <p:cNvPr id="7" name="Text 5"/>
-          <p:cNvSpPr txBox="1"/>
-          <p:nvPr/>
-        </p:nvSpPr>
-        <p:spPr>
-          <a:xfrm>
-            <a:off x="3218688" y="2029968"/>
-            <a:ext cx="2468880" cy="566928"/>
+          <p:cNvPr id="6" name="Text 4"/>
+          <p:cNvSpPr txBox="1"/>
+          <p:nvPr/>
+        </p:nvSpPr>
+        <p:spPr>
+          <a:xfrm>
+            <a:off x="3227832" y="1353312"/>
+            <a:ext cx="2697480" cy="493776"/>
           </a:xfrm>
           <a:prstGeom prst="rect">
             <a:avLst/>
@@ -3875,18 +4018,18 @@
       </p:sp>
       <p:sp>
         <p:nvSpPr>
-          <p:cNvPr id="8" name="Shape 6"/>
+          <p:cNvPr id="7" name="Shape 5"/>
           <p:cNvSpPr/>
           <p:nvPr/>
         </p:nvSpPr>
         <p:spPr>
           <a:xfrm>
-            <a:off x="5961888" y="2029968"/>
-            <a:ext cx="2468880" cy="566928"/>
+            <a:off x="6135624" y="1353312"/>
+            <a:ext cx="2697480" cy="493776"/>
           </a:xfrm>
           <a:prstGeom prst="roundRect">
             <a:avLst>
-              <a:gd name="adj" fmla="val 11290"/>
+              <a:gd name="adj" fmla="val 12963"/>
             </a:avLst>
           </a:prstGeom>
           <a:solidFill>
@@ -3897,14 +4040,56 @@
       </p:sp>
       <p:sp>
         <p:nvSpPr>
+          <p:cNvPr id="8" name="Text 6"/>
+          <p:cNvSpPr txBox="1"/>
+          <p:nvPr/>
+        </p:nvSpPr>
+        <p:spPr>
+          <a:xfrm>
+            <a:off x="6135624" y="1353312"/>
+            <a:ext cx="2697480" cy="493776"/>
+          </a:xfrm>
+          <a:prstGeom prst="rect">
+            <a:avLst/>
+          </a:prstGeom>
+          <a:noFill/>
+          <a:ln/>
+        </p:spPr>
+        <p:txBody>
+          <a:bodyPr wrap="square" lIns="0" tIns="0" rIns="0" bIns="0" rtlCol="0" anchor="ctr"/>
+          <a:lstStyle/>
+          <a:p>
+            <a:pPr algn="ctr" indent="0" marL="0">
+              <a:lnSpc>
+                <a:spcPct val="115000"/>
+              </a:lnSpc>
+              <a:buNone/>
+            </a:pPr>
+            <a:r>
+              <a:rPr lang="en-US" sz="1500" b="1" dirty="0">
+                <a:solidFill>
+                  <a:srgbClr val="FFFFFF"/>
+                </a:solidFill>
+                <a:latin typeface="メイリオ" pitchFamily="34" charset="0"/>
+                <a:ea typeface="メイリオ" pitchFamily="34" charset="-122"/>
+                <a:cs typeface="メイリオ" pitchFamily="34" charset="-120"/>
+              </a:rPr>
+              <a:t>Ⅲ　対話</a:t>
+            </a:r>
+            <a:endParaRPr lang="en-US" sz="1500" dirty="0"/>
+          </a:p>
+        </p:txBody>
+      </p:sp>
+      <p:sp>
+        <p:nvSpPr>
           <p:cNvPr id="9" name="Text 7"/>
           <p:cNvSpPr txBox="1"/>
           <p:nvPr/>
         </p:nvSpPr>
         <p:spPr>
           <a:xfrm>
-            <a:off x="5961888" y="2029968"/>
-            <a:ext cx="2468880" cy="566928"/>
+            <a:off x="320040" y="1883664"/>
+            <a:ext cx="8503920" cy="310896"/>
           </a:xfrm>
           <a:prstGeom prst="rect">
             <a:avLst/>
@@ -3917,23 +4102,20 @@
           <a:lstStyle/>
           <a:p>
             <a:pPr algn="ctr" indent="0" marL="0">
-              <a:lnSpc>
-                <a:spcPct val="115000"/>
-              </a:lnSpc>
-              <a:buNone/>
-            </a:pPr>
-            <a:r>
-              <a:rPr lang="en-US" sz="1500" b="1" dirty="0">
-                <a:solidFill>
-                  <a:srgbClr val="FFFFFF"/>
-                </a:solidFill>
-                <a:latin typeface="メイリオ" pitchFamily="34" charset="0"/>
-                <a:ea typeface="メイリオ" pitchFamily="34" charset="-122"/>
-                <a:cs typeface="メイリオ" pitchFamily="34" charset="-120"/>
-              </a:rPr>
-              <a:t>Ⅲ　対話</a:t>
-            </a:r>
-            <a:endParaRPr lang="en-US" sz="1500" dirty="0"/>
+              <a:buNone/>
+            </a:pPr>
+            <a:r>
+              <a:rPr lang="en-US" sz="1800" b="1" dirty="0">
+                <a:solidFill>
+                  <a:srgbClr val="808080"/>
+                </a:solidFill>
+                <a:latin typeface="メイリオ" pitchFamily="34" charset="0"/>
+                <a:ea typeface="メイリオ" pitchFamily="34" charset="-122"/>
+                <a:cs typeface="メイリオ" pitchFamily="34" charset="-120"/>
+              </a:rPr>
+              <a:t>↓</a:t>
+            </a:r>
+            <a:endParaRPr lang="en-US" sz="1800" dirty="0"/>
           </a:p>
         </p:txBody>
       </p:sp>
@@ -3945,12 +4127,12 @@
         </p:nvSpPr>
         <p:spPr>
           <a:xfrm>
-            <a:off x="475488" y="2798064"/>
-            <a:ext cx="8193024" cy="1188720"/>
+            <a:off x="320040" y="2231136"/>
+            <a:ext cx="4160520" cy="1810512"/>
           </a:xfrm>
           <a:prstGeom prst="roundRect">
             <a:avLst>
-              <a:gd name="adj" fmla="val 4615"/>
+              <a:gd name="adj" fmla="val 3030"/>
             </a:avLst>
           </a:prstGeom>
           <a:solidFill>
@@ -3972,8 +4154,47 @@
         </p:nvSpPr>
         <p:spPr>
           <a:xfrm>
-            <a:off x="731520" y="2907792"/>
-            <a:ext cx="7680960" cy="1005840"/>
+            <a:off x="521208" y="2340864"/>
+            <a:ext cx="3758184" cy="329184"/>
+          </a:xfrm>
+          <a:prstGeom prst="rect">
+            <a:avLst/>
+          </a:prstGeom>
+          <a:noFill/>
+          <a:ln/>
+        </p:spPr>
+        <p:txBody>
+          <a:bodyPr wrap="square" lIns="0" tIns="0" rIns="0" bIns="0" rtlCol="0" anchor="ctr"/>
+          <a:lstStyle/>
+          <a:p>
+            <a:pPr algn="l" indent="0" marL="0">
+              <a:buNone/>
+            </a:pPr>
+            <a:r>
+              <a:rPr lang="en-US" sz="1700" b="1" dirty="0">
+                <a:solidFill>
+                  <a:srgbClr val="44C1A3"/>
+                </a:solidFill>
+                <a:latin typeface="メイリオ" pitchFamily="34" charset="0"/>
+                <a:ea typeface="メイリオ" pitchFamily="34" charset="-122"/>
+                <a:cs typeface="メイリオ" pitchFamily="34" charset="-120"/>
+              </a:rPr>
+              <a:t>自己肯定感</a:t>
+            </a:r>
+            <a:endParaRPr lang="en-US" sz="1700" dirty="0"/>
+          </a:p>
+        </p:txBody>
+      </p:sp>
+      <p:sp>
+        <p:nvSpPr>
+          <p:cNvPr id="12" name="Text 10"/>
+          <p:cNvSpPr txBox="1"/>
+          <p:nvPr/>
+        </p:nvSpPr>
+        <p:spPr>
+          <a:xfrm>
+            <a:off x="521208" y="2706624"/>
+            <a:ext cx="3758184" cy="1225296"/>
           </a:xfrm>
           <a:prstGeom prst="rect">
             <a:avLst/>
@@ -3987,12 +4208,158 @@
           <a:p>
             <a:pPr algn="l" indent="0" marL="0">
               <a:lnSpc>
-                <a:spcPct val="130000"/>
-              </a:lnSpc>
-              <a:buNone/>
-            </a:pPr>
-            <a:r>
-              <a:rPr lang="en-US" sz="1400" b="1" dirty="0">
+                <a:spcPct val="125000"/>
+              </a:lnSpc>
+              <a:buNone/>
+            </a:pPr>
+            <a:r>
+              <a:rPr lang="en-US" sz="1300" b="1" dirty="0">
+                <a:solidFill>
+                  <a:srgbClr val="595959"/>
+                </a:solidFill>
+                <a:latin typeface="メイリオ" pitchFamily="34" charset="0"/>
+                <a:ea typeface="メイリオ" pitchFamily="34" charset="-122"/>
+                <a:cs typeface="メイリオ" pitchFamily="34" charset="-120"/>
+              </a:rPr>
+              <a:t>「できる子になる」ことではなく</a:t>
+            </a:r>
+            <a:endParaRPr lang="en-US" sz="1300" dirty="0"/>
+          </a:p>
+          <a:p>
+            <a:pPr algn="l" indent="0" marL="0">
+              <a:lnSpc>
+                <a:spcPct val="125000"/>
+              </a:lnSpc>
+              <a:buNone/>
+            </a:pPr>
+            <a:r>
+              <a:rPr lang="en-US" sz="1300" b="1" dirty="0">
+                <a:solidFill>
+                  <a:srgbClr val="EE7B08"/>
+                </a:solidFill>
+                <a:latin typeface="メイリオ" pitchFamily="34" charset="0"/>
+                <a:ea typeface="メイリオ" pitchFamily="34" charset="-122"/>
+                <a:cs typeface="メイリオ" pitchFamily="34" charset="-120"/>
+              </a:rPr>
+              <a:t>「成長できる自分を信じること」</a:t>
+            </a:r>
+            <a:endParaRPr lang="en-US" sz="1300" dirty="0"/>
+          </a:p>
+          <a:p>
+            <a:pPr algn="l" indent="0" marL="0">
+              <a:lnSpc>
+                <a:spcPct val="125000"/>
+              </a:lnSpc>
+              <a:buNone/>
+            </a:pPr>
+            <a:r>
+              <a:rPr lang="en-US" sz="800" b="1" dirty="0">
+                <a:solidFill>
+                  <a:srgbClr val="595959"/>
+                </a:solidFill>
+                <a:latin typeface="メイリオ" pitchFamily="34" charset="0"/>
+                <a:ea typeface="メイリオ" pitchFamily="34" charset="-122"/>
+                <a:cs typeface="メイリオ" pitchFamily="34" charset="-120"/>
+              </a:rPr>
+              <a:t> </a:t>
+            </a:r>
+            <a:endParaRPr lang="en-US" sz="1300" dirty="0"/>
+          </a:p>
+          <a:p>
+            <a:pPr algn="l" indent="0" marL="0">
+              <a:lnSpc>
+                <a:spcPct val="125000"/>
+              </a:lnSpc>
+              <a:buNone/>
+            </a:pPr>
+            <a:r>
+              <a:rPr lang="en-US" sz="1300" b="1" dirty="0">
+                <a:solidFill>
+                  <a:srgbClr val="595959"/>
+                </a:solidFill>
+                <a:latin typeface="メイリオ" pitchFamily="34" charset="0"/>
+                <a:ea typeface="メイリオ" pitchFamily="34" charset="-122"/>
+                <a:cs typeface="メイリオ" pitchFamily="34" charset="-120"/>
+              </a:rPr>
+              <a:t>自分の段階で挑戦でき、考えが変わってよいと</a:t>
+            </a:r>
+            <a:endParaRPr lang="en-US" sz="1300" dirty="0"/>
+          </a:p>
+          <a:p>
+            <a:pPr algn="l" indent="0" marL="0">
+              <a:lnSpc>
+                <a:spcPct val="125000"/>
+              </a:lnSpc>
+              <a:buNone/>
+            </a:pPr>
+            <a:r>
+              <a:rPr lang="en-US" sz="1300" b="1" dirty="0">
+                <a:solidFill>
+                  <a:srgbClr val="595959"/>
+                </a:solidFill>
+                <a:latin typeface="メイリオ" pitchFamily="34" charset="0"/>
+                <a:ea typeface="メイリオ" pitchFamily="34" charset="-122"/>
+                <a:cs typeface="メイリオ" pitchFamily="34" charset="-120"/>
+              </a:rPr>
+              <a:t>保障されることで育つ。</a:t>
+            </a:r>
+            <a:endParaRPr lang="en-US" sz="1300" dirty="0"/>
+          </a:p>
+        </p:txBody>
+      </p:sp>
+      <p:sp>
+        <p:nvSpPr>
+          <p:cNvPr id="13" name="Shape 11"/>
+          <p:cNvSpPr/>
+          <p:nvPr/>
+        </p:nvSpPr>
+        <p:spPr>
+          <a:xfrm>
+            <a:off x="4663440" y="2231136"/>
+            <a:ext cx="4160520" cy="1810512"/>
+          </a:xfrm>
+          <a:prstGeom prst="roundRect">
+            <a:avLst>
+              <a:gd name="adj" fmla="val 3030"/>
+            </a:avLst>
+          </a:prstGeom>
+          <a:solidFill>
+            <a:srgbClr val="E9F7F3"/>
+          </a:solidFill>
+          <a:ln w="12700">
+            <a:solidFill>
+              <a:srgbClr val="B9E5DA"/>
+            </a:solidFill>
+            <a:prstDash val="solid"/>
+          </a:ln>
+        </p:spPr>
+      </p:sp>
+      <p:sp>
+        <p:nvSpPr>
+          <p:cNvPr id="14" name="Text 12"/>
+          <p:cNvSpPr txBox="1"/>
+          <p:nvPr/>
+        </p:nvSpPr>
+        <p:spPr>
+          <a:xfrm>
+            <a:off x="4864608" y="2340864"/>
+            <a:ext cx="3758184" cy="329184"/>
+          </a:xfrm>
+          <a:prstGeom prst="rect">
+            <a:avLst/>
+          </a:prstGeom>
+          <a:noFill/>
+          <a:ln/>
+        </p:spPr>
+        <p:txBody>
+          <a:bodyPr wrap="square" lIns="0" tIns="0" rIns="0" bIns="0" rtlCol="0" anchor="ctr"/>
+          <a:lstStyle/>
+          <a:p>
+            <a:pPr algn="l" indent="0" marL="0">
+              <a:buNone/>
+            </a:pPr>
+            <a:r>
+              <a:rPr lang="en-US" sz="1700" b="1" dirty="0">
                 <a:solidFill>
                   <a:srgbClr val="44C1A3"/>
                 </a:solidFill>
@@ -4000,19 +4367,41 @@
                 <a:ea typeface="メイリオ" pitchFamily="34" charset="-122"/>
                 <a:cs typeface="メイリオ" pitchFamily="34" charset="-120"/>
               </a:rPr>
-              <a:t>学校経営計画とも重なる</a:t>
-            </a:r>
-            <a:endParaRPr lang="en-US" sz="1400" dirty="0"/>
-          </a:p>
-          <a:p>
-            <a:pPr algn="l" indent="0" marL="0">
-              <a:lnSpc>
-                <a:spcPct val="130000"/>
-              </a:lnSpc>
-              <a:buNone/>
-            </a:pPr>
-            <a:r>
-              <a:rPr lang="en-US" sz="1400" b="1" dirty="0">
+              <a:t>学習の自己調整</a:t>
+            </a:r>
+            <a:endParaRPr lang="en-US" sz="1700" dirty="0"/>
+          </a:p>
+        </p:txBody>
+      </p:sp>
+      <p:sp>
+        <p:nvSpPr>
+          <p:cNvPr id="15" name="Text 13"/>
+          <p:cNvSpPr txBox="1"/>
+          <p:nvPr/>
+        </p:nvSpPr>
+        <p:spPr>
+          <a:xfrm>
+            <a:off x="4864608" y="2706624"/>
+            <a:ext cx="3758184" cy="1225296"/>
+          </a:xfrm>
+          <a:prstGeom prst="rect">
+            <a:avLst/>
+          </a:prstGeom>
+          <a:noFill/>
+          <a:ln/>
+        </p:spPr>
+        <p:txBody>
+          <a:bodyPr wrap="square" lIns="0" tIns="0" rIns="0" bIns="0" rtlCol="0" anchor="t"/>
+          <a:lstStyle/>
+          <a:p>
+            <a:pPr algn="l" indent="0" marL="0">
+              <a:lnSpc>
+                <a:spcPct val="125000"/>
+              </a:lnSpc>
+              <a:buNone/>
+            </a:pPr>
+            <a:r>
+              <a:rPr lang="en-US" sz="1300" b="1" dirty="0">
                 <a:solidFill>
                   <a:srgbClr val="595959"/>
                 </a:solidFill>
@@ -4020,19 +4409,39 @@
                 <a:ea typeface="メイリオ" pitchFamily="34" charset="-122"/>
                 <a:cs typeface="メイリオ" pitchFamily="34" charset="-120"/>
               </a:rPr>
-              <a:t>　・主体的・対話的で深い学びの実現に向けた授業改善</a:t>
-            </a:r>
-            <a:endParaRPr lang="en-US" sz="1400" dirty="0"/>
-          </a:p>
-          <a:p>
-            <a:pPr algn="l" indent="0" marL="0">
-              <a:lnSpc>
-                <a:spcPct val="130000"/>
-              </a:lnSpc>
-              <a:buNone/>
-            </a:pPr>
-            <a:r>
-              <a:rPr lang="en-US" sz="1400" b="1" dirty="0">
+              <a:t>学習指導要領が示す</a:t>
+            </a:r>
+            <a:endParaRPr lang="en-US" sz="1300" dirty="0"/>
+          </a:p>
+          <a:p>
+            <a:pPr algn="l" indent="0" marL="0">
+              <a:lnSpc>
+                <a:spcPct val="125000"/>
+              </a:lnSpc>
+              <a:buNone/>
+            </a:pPr>
+            <a:r>
+              <a:rPr lang="en-US" sz="1300" b="1" dirty="0">
+                <a:solidFill>
+                  <a:srgbClr val="EE7B08"/>
+                </a:solidFill>
+                <a:latin typeface="メイリオ" pitchFamily="34" charset="0"/>
+                <a:ea typeface="メイリオ" pitchFamily="34" charset="-122"/>
+                <a:cs typeface="メイリオ" pitchFamily="34" charset="-120"/>
+              </a:rPr>
+              <a:t>「学びに向かう力」の中核をなす力</a:t>
+            </a:r>
+            <a:endParaRPr lang="en-US" sz="1300" dirty="0"/>
+          </a:p>
+          <a:p>
+            <a:pPr algn="l" indent="0" marL="0">
+              <a:lnSpc>
+                <a:spcPct val="125000"/>
+              </a:lnSpc>
+              <a:buNone/>
+            </a:pPr>
+            <a:r>
+              <a:rPr lang="en-US" sz="800" b="1" dirty="0">
                 <a:solidFill>
                   <a:srgbClr val="595959"/>
                 </a:solidFill>
@@ -4040,22 +4449,62 @@
                 <a:ea typeface="メイリオ" pitchFamily="34" charset="-122"/>
                 <a:cs typeface="メイリオ" pitchFamily="34" charset="-120"/>
               </a:rPr>
-              <a:t>　・個に応じたきめ細やかな指導・支援の充実</a:t>
-            </a:r>
-            <a:endParaRPr lang="en-US" sz="1400" dirty="0"/>
-          </a:p>
-        </p:txBody>
-      </p:sp>
-      <p:sp>
-        <p:nvSpPr>
-          <p:cNvPr id="12" name="Text 10"/>
-          <p:cNvSpPr txBox="1"/>
-          <p:nvPr/>
-        </p:nvSpPr>
-        <p:spPr>
-          <a:xfrm>
-            <a:off x="475488" y="4114800"/>
-            <a:ext cx="8193024" cy="548640"/>
+              <a:t> </a:t>
+            </a:r>
+            <a:endParaRPr lang="en-US" sz="1300" dirty="0"/>
+          </a:p>
+          <a:p>
+            <a:pPr algn="l" indent="0" marL="0">
+              <a:lnSpc>
+                <a:spcPct val="125000"/>
+              </a:lnSpc>
+              <a:buNone/>
+            </a:pPr>
+            <a:r>
+              <a:rPr lang="en-US" sz="1300" b="1" dirty="0">
+                <a:solidFill>
+                  <a:srgbClr val="595959"/>
+                </a:solidFill>
+                <a:latin typeface="メイリオ" pitchFamily="34" charset="0"/>
+                <a:ea typeface="メイリオ" pitchFamily="34" charset="-122"/>
+                <a:cs typeface="メイリオ" pitchFamily="34" charset="-120"/>
+              </a:rPr>
+              <a:t>見通しをもち、振り返り、次につなげる</a:t>
+            </a:r>
+            <a:endParaRPr lang="en-US" sz="1300" dirty="0"/>
+          </a:p>
+          <a:p>
+            <a:pPr algn="l" indent="0" marL="0">
+              <a:lnSpc>
+                <a:spcPct val="125000"/>
+              </a:lnSpc>
+              <a:buNone/>
+            </a:pPr>
+            <a:r>
+              <a:rPr lang="en-US" sz="1300" b="1" dirty="0">
+                <a:solidFill>
+                  <a:srgbClr val="595959"/>
+                </a:solidFill>
+                <a:latin typeface="メイリオ" pitchFamily="34" charset="0"/>
+                <a:ea typeface="メイリオ" pitchFamily="34" charset="-122"/>
+                <a:cs typeface="メイリオ" pitchFamily="34" charset="-120"/>
+              </a:rPr>
+              <a:t>経験の積み重ねで育つ。</a:t>
+            </a:r>
+            <a:endParaRPr lang="en-US" sz="1300" dirty="0"/>
+          </a:p>
+        </p:txBody>
+      </p:sp>
+      <p:sp>
+        <p:nvSpPr>
+          <p:cNvPr id="16" name="Text 14"/>
+          <p:cNvSpPr txBox="1"/>
+          <p:nvPr/>
+        </p:nvSpPr>
+        <p:spPr>
+          <a:xfrm>
+            <a:off x="320040" y="4206240"/>
+            <a:ext cx="8503920" cy="457200"/>
           </a:xfrm>
           <a:prstGeom prst="rect">
             <a:avLst/>
@@ -4082,41 +4531,7 @@
                 <a:ea typeface="メイリオ" pitchFamily="34" charset="-122"/>
                 <a:cs typeface="メイリオ" pitchFamily="34" charset="-120"/>
               </a:rPr>
-              <a:t>小竹小学校との校区別協議会で、</a:t>
-            </a:r>
-            <a:pPr algn="l" indent="0" marL="0">
-              <a:lnSpc>
-                <a:spcPct val="120000"/>
-              </a:lnSpc>
-              <a:buNone/>
-            </a:pPr>
-            <a:r>
-              <a:rPr lang="en-US" sz="1700" b="1" dirty="0">
-                <a:solidFill>
-                  <a:srgbClr val="EE7B08"/>
-                </a:solidFill>
-                <a:latin typeface="メイリオ" pitchFamily="34" charset="0"/>
-                <a:ea typeface="メイリオ" pitchFamily="34" charset="-122"/>
-                <a:cs typeface="メイリオ" pitchFamily="34" charset="-120"/>
-              </a:rPr>
-              <a:t>「目指す１５歳の姿」</a:t>
-            </a:r>
-            <a:pPr algn="l" indent="0" marL="0">
-              <a:lnSpc>
-                <a:spcPct val="120000"/>
-              </a:lnSpc>
-              <a:buNone/>
-            </a:pPr>
-            <a:r>
-              <a:rPr lang="en-US" sz="1700" b="1" dirty="0">
-                <a:solidFill>
-                  <a:srgbClr val="595959"/>
-                </a:solidFill>
-                <a:latin typeface="メイリオ" pitchFamily="34" charset="0"/>
-                <a:ea typeface="メイリオ" pitchFamily="34" charset="-122"/>
-                <a:cs typeface="メイリオ" pitchFamily="34" charset="-120"/>
-              </a:rPr>
-              <a:t>として共有したい。</a:t>
+              <a:t>本日の授業には、この二つが育つ場面があった。</a:t>
             </a:r>
             <a:endParaRPr lang="en-US" sz="1700" dirty="0"/>
           </a:p>
@@ -4185,7 +4600,7 @@
                 <a:ea typeface="メイリオ" pitchFamily="34" charset="-122"/>
                 <a:cs typeface="メイリオ" pitchFamily="34" charset="-120"/>
               </a:rPr>
-              <a:t>　③　今後に向けて</a:t>
+              <a:t>　②　３人の授業から</a:t>
             </a:r>
             <a:endParaRPr lang="en-US" sz="3000" dirty="0"/>
           </a:p>
@@ -4205,7 +4620,7 @@
                 <a:ea typeface="メイリオ" pitchFamily="34" charset="-122"/>
                 <a:cs typeface="メイリオ" pitchFamily="34" charset="-120"/>
               </a:rPr>
-              <a:t>　手だての有効性を、確かめ続ける</a:t>
+              <a:t>　学習の自己調整が育っていた場面</a:t>
             </a:r>
             <a:endParaRPr lang="en-US" sz="3000" dirty="0"/>
           </a:p>
@@ -4213,57 +4628,18 @@
       </p:sp>
       <p:sp>
         <p:nvSpPr>
-          <p:cNvPr id="3" name="Text 1"/>
-          <p:cNvSpPr txBox="1"/>
-          <p:nvPr/>
-        </p:nvSpPr>
-        <p:spPr>
-          <a:xfrm>
-            <a:off x="475488" y="1389888"/>
-            <a:ext cx="8193024" cy="292608"/>
-          </a:xfrm>
-          <a:prstGeom prst="rect">
-            <a:avLst/>
-          </a:prstGeom>
-          <a:noFill/>
-          <a:ln/>
-        </p:spPr>
-        <p:txBody>
-          <a:bodyPr wrap="square" lIns="0" tIns="0" rIns="0" bIns="0" rtlCol="0" anchor="ctr"/>
-          <a:lstStyle/>
-          <a:p>
-            <a:pPr algn="l" indent="0" marL="0">
-              <a:buNone/>
-            </a:pPr>
-            <a:r>
-              <a:rPr lang="en-US" sz="1400" b="1" dirty="0">
-                <a:solidFill>
-                  <a:srgbClr val="808080"/>
-                </a:solidFill>
-                <a:latin typeface="メイリオ" pitchFamily="34" charset="0"/>
-                <a:ea typeface="メイリオ" pitchFamily="34" charset="-122"/>
-                <a:cs typeface="メイリオ" pitchFamily="34" charset="-120"/>
-              </a:rPr>
-              <a:t>田口先生の指導案「授業観察の視点」には、こう書かれていた。</a:t>
-            </a:r>
-            <a:endParaRPr lang="en-US" sz="1400" dirty="0"/>
-          </a:p>
-        </p:txBody>
-      </p:sp>
-      <p:sp>
-        <p:nvSpPr>
-          <p:cNvPr id="4" name="Shape 2"/>
+          <p:cNvPr id="3" name="Shape 1"/>
           <p:cNvSpPr/>
           <p:nvPr/>
         </p:nvSpPr>
         <p:spPr>
           <a:xfrm>
-            <a:off x="475488" y="1755648"/>
-            <a:ext cx="8193024" cy="731520"/>
+            <a:off x="320040" y="1353312"/>
+            <a:ext cx="8503920" cy="786384"/>
           </a:xfrm>
           <a:prstGeom prst="roundRect">
             <a:avLst>
-              <a:gd name="adj" fmla="val 7500"/>
+              <a:gd name="adj" fmla="val 6977"/>
             </a:avLst>
           </a:prstGeom>
           <a:solidFill>
@@ -4279,30 +4655,70 @@
       </p:sp>
       <p:sp>
         <p:nvSpPr>
-          <p:cNvPr id="5" name="Text 3"/>
-          <p:cNvSpPr txBox="1"/>
-          <p:nvPr/>
-        </p:nvSpPr>
-        <p:spPr>
-          <a:xfrm>
-            <a:off x="731520" y="1755648"/>
-            <a:ext cx="7680960" cy="731520"/>
-          </a:xfrm>
-          <a:prstGeom prst="rect">
-            <a:avLst/>
-          </a:prstGeom>
-          <a:noFill/>
-          <a:ln/>
-        </p:spPr>
-        <p:txBody>
-          <a:bodyPr wrap="square" lIns="0" tIns="0" rIns="0" bIns="0" rtlCol="0" anchor="ctr"/>
-          <a:lstStyle/>
-          <a:p>
-            <a:pPr algn="l" indent="0" marL="0">
-              <a:buNone/>
-            </a:pPr>
-            <a:r>
-              <a:rPr lang="en-US" sz="2200" b="1" dirty="0">
+          <p:cNvPr id="4" name="Text 2"/>
+          <p:cNvSpPr txBox="1"/>
+          <p:nvPr/>
+        </p:nvSpPr>
+        <p:spPr>
+          <a:xfrm>
+            <a:off x="576072" y="1353312"/>
+            <a:ext cx="7991856" cy="786384"/>
+          </a:xfrm>
+          <a:prstGeom prst="rect">
+            <a:avLst/>
+          </a:prstGeom>
+          <a:noFill/>
+          <a:ln/>
+        </p:spPr>
+        <p:txBody>
+          <a:bodyPr wrap="square" lIns="0" tIns="0" rIns="0" bIns="0" rtlCol="0" anchor="ctr"/>
+          <a:lstStyle/>
+          <a:p>
+            <a:pPr algn="l" indent="0" marL="0">
+              <a:lnSpc>
+                <a:spcPct val="125000"/>
+              </a:lnSpc>
+              <a:buNone/>
+            </a:pPr>
+            <a:r>
+              <a:rPr lang="en-US" sz="1400" b="1" dirty="0">
+                <a:solidFill>
+                  <a:srgbClr val="595959"/>
+                </a:solidFill>
+                <a:latin typeface="メイリオ" pitchFamily="34" charset="0"/>
+                <a:ea typeface="メイリオ" pitchFamily="34" charset="-122"/>
+                <a:cs typeface="メイリオ" pitchFamily="34" charset="-120"/>
+              </a:rPr>
+              <a:t>「学びに向かう力」を支える「主体的に学習に取り組む態度」は、</a:t>
+            </a:r>
+            <a:endParaRPr lang="en-US" sz="1400" dirty="0"/>
+          </a:p>
+          <a:p>
+            <a:pPr algn="l" indent="0" marL="0">
+              <a:lnSpc>
+                <a:spcPct val="125000"/>
+              </a:lnSpc>
+              <a:buNone/>
+            </a:pPr>
+            <a:r>
+              <a:rPr lang="en-US" sz="1400" b="1" dirty="0">
+                <a:solidFill>
+                  <a:srgbClr val="595959"/>
+                </a:solidFill>
+                <a:latin typeface="メイリオ" pitchFamily="34" charset="0"/>
+                <a:ea typeface="メイリオ" pitchFamily="34" charset="-122"/>
+                <a:cs typeface="メイリオ" pitchFamily="34" charset="-120"/>
+              </a:rPr>
+              <a:t>　粘り強く取り組む側面　と　</a:t>
+            </a:r>
+            <a:pPr algn="l" indent="0" marL="0">
+              <a:lnSpc>
+                <a:spcPct val="125000"/>
+              </a:lnSpc>
+              <a:buNone/>
+            </a:pPr>
+            <a:r>
+              <a:rPr lang="en-US" sz="1400" b="1" dirty="0">
                 <a:solidFill>
                   <a:srgbClr val="EE7B08"/>
                 </a:solidFill>
@@ -4310,11 +4726,50 @@
                 <a:ea typeface="メイリオ" pitchFamily="34" charset="-122"/>
                 <a:cs typeface="メイリオ" pitchFamily="34" charset="-120"/>
               </a:rPr>
-              <a:t>「指導に当たっての手立ては有効であったか」</a:t>
-            </a:r>
-            <a:endParaRPr lang="en-US" sz="2200" dirty="0"/>
-          </a:p>
-        </p:txBody>
+              <a:t>自らの学習を調整しようとする側面</a:t>
+            </a:r>
+            <a:pPr algn="l" indent="0" marL="0">
+              <a:lnSpc>
+                <a:spcPct val="125000"/>
+              </a:lnSpc>
+              <a:buNone/>
+            </a:pPr>
+            <a:r>
+              <a:rPr lang="en-US" sz="1400" b="1" dirty="0">
+                <a:solidFill>
+                  <a:srgbClr val="595959"/>
+                </a:solidFill>
+                <a:latin typeface="メイリオ" pitchFamily="34" charset="0"/>
+                <a:ea typeface="メイリオ" pitchFamily="34" charset="-122"/>
+                <a:cs typeface="メイリオ" pitchFamily="34" charset="-120"/>
+              </a:rPr>
+              <a:t>　で捉える。</a:t>
+            </a:r>
+            <a:endParaRPr lang="en-US" sz="1400" dirty="0"/>
+          </a:p>
+        </p:txBody>
+      </p:sp>
+      <p:sp>
+        <p:nvSpPr>
+          <p:cNvPr id="5" name="Shape 3"/>
+          <p:cNvSpPr/>
+          <p:nvPr/>
+        </p:nvSpPr>
+        <p:spPr>
+          <a:xfrm>
+            <a:off x="320040" y="2304288"/>
+            <a:ext cx="1417320" cy="566928"/>
+          </a:xfrm>
+          <a:prstGeom prst="roundRect">
+            <a:avLst>
+              <a:gd name="adj" fmla="val 8065"/>
+            </a:avLst>
+          </a:prstGeom>
+          <a:solidFill>
+            <a:srgbClr val="44C1A3"/>
+          </a:solidFill>
+          <a:ln/>
+        </p:spPr>
       </p:sp>
       <p:sp>
         <p:nvSpPr>
@@ -4324,37 +4779,34 @@
         </p:nvSpPr>
         <p:spPr>
           <a:xfrm>
-            <a:off x="475488" y="2670048"/>
-            <a:ext cx="8193024" cy="457200"/>
-          </a:xfrm>
-          <a:prstGeom prst="rect">
-            <a:avLst/>
-          </a:prstGeom>
-          <a:noFill/>
-          <a:ln/>
-        </p:spPr>
-        <p:txBody>
-          <a:bodyPr wrap="square" lIns="0" tIns="0" rIns="0" bIns="0" rtlCol="0" anchor="t"/>
-          <a:lstStyle/>
-          <a:p>
-            <a:pPr algn="l" indent="0" marL="0">
-              <a:lnSpc>
-                <a:spcPct val="120000"/>
-              </a:lnSpc>
-              <a:buNone/>
-            </a:pPr>
-            <a:r>
-              <a:rPr lang="en-US" sz="1700" b="1" dirty="0">
-                <a:solidFill>
-                  <a:srgbClr val="595959"/>
-                </a:solidFill>
-                <a:latin typeface="メイリオ" pitchFamily="34" charset="0"/>
-                <a:ea typeface="メイリオ" pitchFamily="34" charset="-122"/>
-                <a:cs typeface="メイリオ" pitchFamily="34" charset="-120"/>
-              </a:rPr>
-              <a:t>この問いを、授業のあとに必ず置く。</a:t>
-            </a:r>
-            <a:endParaRPr lang="en-US" sz="1700" dirty="0"/>
+            <a:off x="320040" y="2304288"/>
+            <a:ext cx="1417320" cy="566928"/>
+          </a:xfrm>
+          <a:prstGeom prst="rect">
+            <a:avLst/>
+          </a:prstGeom>
+          <a:noFill/>
+          <a:ln/>
+        </p:spPr>
+        <p:txBody>
+          <a:bodyPr wrap="square" lIns="0" tIns="0" rIns="0" bIns="0" rtlCol="0" anchor="ctr"/>
+          <a:lstStyle/>
+          <a:p>
+            <a:pPr algn="ctr" indent="0" marL="0">
+              <a:buNone/>
+            </a:pPr>
+            <a:r>
+              <a:rPr lang="en-US" sz="1200" b="1" dirty="0">
+                <a:solidFill>
+                  <a:srgbClr val="FFFFFF"/>
+                </a:solidFill>
+                <a:latin typeface="メイリオ" pitchFamily="34" charset="0"/>
+                <a:ea typeface="メイリオ" pitchFamily="34" charset="-122"/>
+                <a:cs typeface="メイリオ" pitchFamily="34" charset="-120"/>
+              </a:rPr>
+              <a:t>田口　先生</a:t>
+            </a:r>
+            <a:endParaRPr lang="en-US" sz="1200" dirty="0"/>
           </a:p>
         </p:txBody>
       </p:sp>
@@ -4366,12 +4818,12 @@
         </p:nvSpPr>
         <p:spPr>
           <a:xfrm>
-            <a:off x="320040" y="3182112"/>
-            <a:ext cx="2011680" cy="530352"/>
+            <a:off x="1810512" y="2304288"/>
+            <a:ext cx="7013448" cy="566928"/>
           </a:xfrm>
           <a:prstGeom prst="roundRect">
             <a:avLst>
-              <a:gd name="adj" fmla="val 12069"/>
+              <a:gd name="adj" fmla="val 9677"/>
             </a:avLst>
           </a:prstGeom>
           <a:solidFill>
@@ -4393,23 +4845,34 @@
         </p:nvSpPr>
         <p:spPr>
           <a:xfrm>
-            <a:off x="320040" y="3182112"/>
-            <a:ext cx="2011680" cy="530352"/>
-          </a:xfrm>
-          <a:prstGeom prst="rect">
-            <a:avLst/>
-          </a:prstGeom>
-          <a:noFill/>
-          <a:ln/>
-        </p:spPr>
-        <p:txBody>
-          <a:bodyPr wrap="square" lIns="0" tIns="0" rIns="0" bIns="0" rtlCol="0" anchor="ctr"/>
-          <a:lstStyle/>
-          <a:p>
-            <a:pPr algn="ctr" indent="0" marL="0">
-              <a:lnSpc>
-                <a:spcPct val="115000"/>
-              </a:lnSpc>
+            <a:off x="1993392" y="2304288"/>
+            <a:ext cx="6647688" cy="566928"/>
+          </a:xfrm>
+          <a:prstGeom prst="rect">
+            <a:avLst/>
+          </a:prstGeom>
+          <a:noFill/>
+          <a:ln/>
+        </p:spPr>
+        <p:txBody>
+          <a:bodyPr wrap="square" lIns="0" tIns="0" rIns="0" bIns="0" rtlCol="0" anchor="ctr"/>
+          <a:lstStyle/>
+          <a:p>
+            <a:pPr algn="l" indent="0" marL="0">
+              <a:buNone/>
+            </a:pPr>
+            <a:r>
+              <a:rPr lang="en-US" sz="1100" b="1" dirty="0">
+                <a:solidFill>
+                  <a:srgbClr val="808080"/>
+                </a:solidFill>
+                <a:latin typeface="メイリオ" pitchFamily="34" charset="0"/>
+                <a:ea typeface="メイリオ" pitchFamily="34" charset="-122"/>
+                <a:cs typeface="メイリオ" pitchFamily="34" charset="-120"/>
+              </a:rPr>
+              <a:t>着替えの前に　</a:t>
+            </a:r>
+            <a:pPr algn="l" indent="0" marL="0">
               <a:buNone/>
             </a:pPr>
             <a:r>
@@ -4421,38 +4884,13 @@
                 <a:ea typeface="メイリオ" pitchFamily="34" charset="-122"/>
                 <a:cs typeface="メイリオ" pitchFamily="34" charset="-120"/>
               </a:rPr>
-              <a:t>手だてを決める</a:t>
-            </a:r>
-            <a:endParaRPr lang="en-US" sz="1300" dirty="0"/>
-          </a:p>
-        </p:txBody>
-      </p:sp>
-      <p:sp>
-        <p:nvSpPr>
-          <p:cNvPr id="9" name="Text 7"/>
-          <p:cNvSpPr txBox="1"/>
-          <p:nvPr/>
-        </p:nvSpPr>
-        <p:spPr>
-          <a:xfrm>
-            <a:off x="2331720" y="3182112"/>
-            <a:ext cx="182880" cy="530352"/>
-          </a:xfrm>
-          <a:prstGeom prst="rect">
-            <a:avLst/>
-          </a:prstGeom>
-          <a:noFill/>
-          <a:ln/>
-        </p:spPr>
-        <p:txBody>
-          <a:bodyPr wrap="square" lIns="0" tIns="0" rIns="0" bIns="0" rtlCol="0" anchor="ctr"/>
-          <a:lstStyle/>
-          <a:p>
-            <a:pPr algn="ctr" indent="0" marL="0">
-              <a:buNone/>
-            </a:pPr>
-            <a:r>
-              <a:rPr lang="en-US" sz="1400" b="1" dirty="0">
+              <a:t>本時の目標と流れを確認</a:t>
+            </a:r>
+            <a:pPr algn="l" indent="0" marL="0">
+              <a:buNone/>
+            </a:pPr>
+            <a:r>
+              <a:rPr lang="en-US" sz="1200" b="1" dirty="0">
                 <a:solidFill>
                   <a:srgbClr val="808080"/>
                 </a:solidFill>
@@ -4460,26 +4898,101 @@
                 <a:ea typeface="メイリオ" pitchFamily="34" charset="-122"/>
                 <a:cs typeface="メイリオ" pitchFamily="34" charset="-120"/>
               </a:rPr>
-              <a:t>→</a:t>
-            </a:r>
-            <a:endParaRPr lang="en-US" sz="1400" dirty="0"/>
-          </a:p>
-        </p:txBody>
-      </p:sp>
-      <p:sp>
-        <p:nvSpPr>
-          <p:cNvPr id="10" name="Shape 8"/>
+              <a:t>　→　</a:t>
+            </a:r>
+            <a:pPr algn="l" indent="0" marL="0">
+              <a:buNone/>
+            </a:pPr>
+            <a:r>
+              <a:rPr lang="en-US" sz="1300" b="1" dirty="0">
+                <a:solidFill>
+                  <a:srgbClr val="EE7B08"/>
+                </a:solidFill>
+                <a:latin typeface="メイリオ" pitchFamily="34" charset="0"/>
+                <a:ea typeface="メイリオ" pitchFamily="34" charset="-122"/>
+                <a:cs typeface="メイリオ" pitchFamily="34" charset="-120"/>
+              </a:rPr>
+              <a:t>学習カードで要点を振り返る</a:t>
+            </a:r>
+            <a:endParaRPr lang="en-US" sz="1100" dirty="0"/>
+          </a:p>
+        </p:txBody>
+      </p:sp>
+      <p:sp>
+        <p:nvSpPr>
+          <p:cNvPr id="9" name="Shape 7"/>
           <p:cNvSpPr/>
           <p:nvPr/>
         </p:nvSpPr>
         <p:spPr>
           <a:xfrm>
-            <a:off x="2514600" y="3182112"/>
-            <a:ext cx="2011680" cy="530352"/>
+            <a:off x="320040" y="2962656"/>
+            <a:ext cx="1417320" cy="566928"/>
           </a:xfrm>
           <a:prstGeom prst="roundRect">
             <a:avLst>
-              <a:gd name="adj" fmla="val 12069"/>
+              <a:gd name="adj" fmla="val 8065"/>
+            </a:avLst>
+          </a:prstGeom>
+          <a:solidFill>
+            <a:srgbClr val="44C1A3"/>
+          </a:solidFill>
+          <a:ln/>
+        </p:spPr>
+      </p:sp>
+      <p:sp>
+        <p:nvSpPr>
+          <p:cNvPr id="10" name="Text 8"/>
+          <p:cNvSpPr txBox="1"/>
+          <p:nvPr/>
+        </p:nvSpPr>
+        <p:spPr>
+          <a:xfrm>
+            <a:off x="320040" y="2962656"/>
+            <a:ext cx="1417320" cy="566928"/>
+          </a:xfrm>
+          <a:prstGeom prst="rect">
+            <a:avLst/>
+          </a:prstGeom>
+          <a:noFill/>
+          <a:ln/>
+        </p:spPr>
+        <p:txBody>
+          <a:bodyPr wrap="square" lIns="0" tIns="0" rIns="0" bIns="0" rtlCol="0" anchor="ctr"/>
+          <a:lstStyle/>
+          <a:p>
+            <a:pPr algn="ctr" indent="0" marL="0">
+              <a:buNone/>
+            </a:pPr>
+            <a:r>
+              <a:rPr lang="en-US" sz="1200" b="1" dirty="0">
+                <a:solidFill>
+                  <a:srgbClr val="FFFFFF"/>
+                </a:solidFill>
+                <a:latin typeface="メイリオ" pitchFamily="34" charset="0"/>
+                <a:ea typeface="メイリオ" pitchFamily="34" charset="-122"/>
+                <a:cs typeface="メイリオ" pitchFamily="34" charset="-120"/>
+              </a:rPr>
+              <a:t>塚本　先生</a:t>
+            </a:r>
+            <a:endParaRPr lang="en-US" sz="1200" dirty="0"/>
+          </a:p>
+        </p:txBody>
+      </p:sp>
+      <p:sp>
+        <p:nvSpPr>
+          <p:cNvPr id="11" name="Shape 9"/>
+          <p:cNvSpPr/>
+          <p:nvPr/>
+        </p:nvSpPr>
+        <p:spPr>
+          <a:xfrm>
+            <a:off x="1810512" y="2962656"/>
+            <a:ext cx="7013448" cy="566928"/>
+          </a:xfrm>
+          <a:prstGeom prst="roundRect">
+            <a:avLst>
+              <a:gd name="adj" fmla="val 9677"/>
             </a:avLst>
           </a:prstGeom>
           <a:solidFill>
@@ -4495,29 +5008,40 @@
       </p:sp>
       <p:sp>
         <p:nvSpPr>
-          <p:cNvPr id="11" name="Text 9"/>
-          <p:cNvSpPr txBox="1"/>
-          <p:nvPr/>
-        </p:nvSpPr>
-        <p:spPr>
-          <a:xfrm>
-            <a:off x="2514600" y="3182112"/>
-            <a:ext cx="2011680" cy="530352"/>
-          </a:xfrm>
-          <a:prstGeom prst="rect">
-            <a:avLst/>
-          </a:prstGeom>
-          <a:noFill/>
-          <a:ln/>
-        </p:spPr>
-        <p:txBody>
-          <a:bodyPr wrap="square" lIns="0" tIns="0" rIns="0" bIns="0" rtlCol="0" anchor="ctr"/>
-          <a:lstStyle/>
-          <a:p>
-            <a:pPr algn="ctr" indent="0" marL="0">
-              <a:lnSpc>
-                <a:spcPct val="115000"/>
-              </a:lnSpc>
+          <p:cNvPr id="12" name="Text 10"/>
+          <p:cNvSpPr txBox="1"/>
+          <p:nvPr/>
+        </p:nvSpPr>
+        <p:spPr>
+          <a:xfrm>
+            <a:off x="1993392" y="2962656"/>
+            <a:ext cx="6647688" cy="566928"/>
+          </a:xfrm>
+          <a:prstGeom prst="rect">
+            <a:avLst/>
+          </a:prstGeom>
+          <a:noFill/>
+          <a:ln/>
+        </p:spPr>
+        <p:txBody>
+          <a:bodyPr wrap="square" lIns="0" tIns="0" rIns="0" bIns="0" rtlCol="0" anchor="ctr"/>
+          <a:lstStyle/>
+          <a:p>
+            <a:pPr algn="l" indent="0" marL="0">
+              <a:buNone/>
+            </a:pPr>
+            <a:r>
+              <a:rPr lang="en-US" sz="1100" b="1" dirty="0">
+                <a:solidFill>
+                  <a:srgbClr val="808080"/>
+                </a:solidFill>
+                <a:latin typeface="メイリオ" pitchFamily="34" charset="0"/>
+                <a:ea typeface="メイリオ" pitchFamily="34" charset="-122"/>
+                <a:cs typeface="メイリオ" pitchFamily="34" charset="-120"/>
+              </a:rPr>
+              <a:t>授業のはじめに　</a:t>
+            </a:r>
+            <a:pPr algn="l" indent="0" marL="0">
               <a:buNone/>
             </a:pPr>
             <a:r>
@@ -4529,38 +5053,13 @@
                 <a:ea typeface="メイリオ" pitchFamily="34" charset="-122"/>
                 <a:cs typeface="メイリオ" pitchFamily="34" charset="-120"/>
               </a:rPr>
-              <a:t>授業で試す</a:t>
-            </a:r>
-            <a:endParaRPr lang="en-US" sz="1300" dirty="0"/>
-          </a:p>
-        </p:txBody>
-      </p:sp>
-      <p:sp>
-        <p:nvSpPr>
-          <p:cNvPr id="12" name="Text 10"/>
-          <p:cNvSpPr txBox="1"/>
-          <p:nvPr/>
-        </p:nvSpPr>
-        <p:spPr>
-          <a:xfrm>
-            <a:off x="4526280" y="3182112"/>
-            <a:ext cx="182880" cy="530352"/>
-          </a:xfrm>
-          <a:prstGeom prst="rect">
-            <a:avLst/>
-          </a:prstGeom>
-          <a:noFill/>
-          <a:ln/>
-        </p:spPr>
-        <p:txBody>
-          <a:bodyPr wrap="square" lIns="0" tIns="0" rIns="0" bIns="0" rtlCol="0" anchor="ctr"/>
-          <a:lstStyle/>
-          <a:p>
-            <a:pPr algn="ctr" indent="0" marL="0">
-              <a:buNone/>
-            </a:pPr>
-            <a:r>
-              <a:rPr lang="en-US" sz="1400" b="1" dirty="0">
+              <a:t>Today’s Goal と Plan を提示</a:t>
+            </a:r>
+            <a:pPr algn="l" indent="0" marL="0">
+              <a:buNone/>
+            </a:pPr>
+            <a:r>
+              <a:rPr lang="en-US" sz="1200" b="1" dirty="0">
                 <a:solidFill>
                   <a:srgbClr val="808080"/>
                 </a:solidFill>
@@ -4568,9 +5067,23 @@
                 <a:ea typeface="メイリオ" pitchFamily="34" charset="-122"/>
                 <a:cs typeface="メイリオ" pitchFamily="34" charset="-120"/>
               </a:rPr>
-              <a:t>→</a:t>
-            </a:r>
-            <a:endParaRPr lang="en-US" sz="1400" dirty="0"/>
+              <a:t>　→　</a:t>
+            </a:r>
+            <a:pPr algn="l" indent="0" marL="0">
+              <a:buNone/>
+            </a:pPr>
+            <a:r>
+              <a:rPr lang="en-US" sz="1300" b="1" dirty="0">
+                <a:solidFill>
+                  <a:srgbClr val="EE7B08"/>
+                </a:solidFill>
+                <a:latin typeface="メイリオ" pitchFamily="34" charset="0"/>
+                <a:ea typeface="メイリオ" pitchFamily="34" charset="-122"/>
+                <a:cs typeface="メイリオ" pitchFamily="34" charset="-120"/>
+              </a:rPr>
+              <a:t>振り返りをワークシートに記入</a:t>
+            </a:r>
+            <a:endParaRPr lang="en-US" sz="1100" dirty="0"/>
           </a:p>
         </p:txBody>
       </p:sp>
@@ -4582,12 +5095,73 @@
         </p:nvSpPr>
         <p:spPr>
           <a:xfrm>
-            <a:off x="4709160" y="3182112"/>
-            <a:ext cx="2011680" cy="530352"/>
+            <a:off x="320040" y="3621024"/>
+            <a:ext cx="1417320" cy="566928"/>
           </a:xfrm>
           <a:prstGeom prst="roundRect">
             <a:avLst>
-              <a:gd name="adj" fmla="val 12069"/>
+              <a:gd name="adj" fmla="val 8065"/>
+            </a:avLst>
+          </a:prstGeom>
+          <a:solidFill>
+            <a:srgbClr val="44C1A3"/>
+          </a:solidFill>
+          <a:ln/>
+        </p:spPr>
+      </p:sp>
+      <p:sp>
+        <p:nvSpPr>
+          <p:cNvPr id="14" name="Text 12"/>
+          <p:cNvSpPr txBox="1"/>
+          <p:nvPr/>
+        </p:nvSpPr>
+        <p:spPr>
+          <a:xfrm>
+            <a:off x="320040" y="3621024"/>
+            <a:ext cx="1417320" cy="566928"/>
+          </a:xfrm>
+          <a:prstGeom prst="rect">
+            <a:avLst/>
+          </a:prstGeom>
+          <a:noFill/>
+          <a:ln/>
+        </p:spPr>
+        <p:txBody>
+          <a:bodyPr wrap="square" lIns="0" tIns="0" rIns="0" bIns="0" rtlCol="0" anchor="ctr"/>
+          <a:lstStyle/>
+          <a:p>
+            <a:pPr algn="ctr" indent="0" marL="0">
+              <a:buNone/>
+            </a:pPr>
+            <a:r>
+              <a:rPr lang="en-US" sz="1200" b="1" dirty="0">
+                <a:solidFill>
+                  <a:srgbClr val="FFFFFF"/>
+                </a:solidFill>
+                <a:latin typeface="メイリオ" pitchFamily="34" charset="0"/>
+                <a:ea typeface="メイリオ" pitchFamily="34" charset="-122"/>
+                <a:cs typeface="メイリオ" pitchFamily="34" charset="-120"/>
+              </a:rPr>
+              <a:t>東海林　先生</a:t>
+            </a:r>
+            <a:endParaRPr lang="en-US" sz="1200" dirty="0"/>
+          </a:p>
+        </p:txBody>
+      </p:sp>
+      <p:sp>
+        <p:nvSpPr>
+          <p:cNvPr id="15" name="Shape 13"/>
+          <p:cNvSpPr/>
+          <p:nvPr/>
+        </p:nvSpPr>
+        <p:spPr>
+          <a:xfrm>
+            <a:off x="1810512" y="3621024"/>
+            <a:ext cx="7013448" cy="566928"/>
+          </a:xfrm>
+          <a:prstGeom prst="roundRect">
+            <a:avLst>
+              <a:gd name="adj" fmla="val 9677"/>
             </a:avLst>
           </a:prstGeom>
           <a:solidFill>
@@ -4603,29 +5177,40 @@
       </p:sp>
       <p:sp>
         <p:nvSpPr>
-          <p:cNvPr id="14" name="Text 12"/>
-          <p:cNvSpPr txBox="1"/>
-          <p:nvPr/>
-        </p:nvSpPr>
-        <p:spPr>
-          <a:xfrm>
-            <a:off x="4709160" y="3182112"/>
-            <a:ext cx="2011680" cy="530352"/>
-          </a:xfrm>
-          <a:prstGeom prst="rect">
-            <a:avLst/>
-          </a:prstGeom>
-          <a:noFill/>
-          <a:ln/>
-        </p:spPr>
-        <p:txBody>
-          <a:bodyPr wrap="square" lIns="0" tIns="0" rIns="0" bIns="0" rtlCol="0" anchor="ctr"/>
-          <a:lstStyle/>
-          <a:p>
-            <a:pPr algn="ctr" indent="0" marL="0">
-              <a:lnSpc>
-                <a:spcPct val="115000"/>
-              </a:lnSpc>
+          <p:cNvPr id="16" name="Text 14"/>
+          <p:cNvSpPr txBox="1"/>
+          <p:nvPr/>
+        </p:nvSpPr>
+        <p:spPr>
+          <a:xfrm>
+            <a:off x="1993392" y="3621024"/>
+            <a:ext cx="6647688" cy="566928"/>
+          </a:xfrm>
+          <a:prstGeom prst="rect">
+            <a:avLst/>
+          </a:prstGeom>
+          <a:noFill/>
+          <a:ln/>
+        </p:spPr>
+        <p:txBody>
+          <a:bodyPr wrap="square" lIns="0" tIns="0" rIns="0" bIns="0" rtlCol="0" anchor="ctr"/>
+          <a:lstStyle/>
+          <a:p>
+            <a:pPr algn="l" indent="0" marL="0">
+              <a:buNone/>
+            </a:pPr>
+            <a:r>
+              <a:rPr lang="en-US" sz="1100" b="1" dirty="0">
+                <a:solidFill>
+                  <a:srgbClr val="808080"/>
+                </a:solidFill>
+                <a:latin typeface="メイリオ" pitchFamily="34" charset="0"/>
+                <a:ea typeface="メイリオ" pitchFamily="34" charset="-122"/>
+                <a:cs typeface="メイリオ" pitchFamily="34" charset="-120"/>
+              </a:rPr>
+              <a:t>議論に入る前に　</a:t>
+            </a:r>
+            <a:pPr algn="l" indent="0" marL="0">
               <a:buNone/>
             </a:pPr>
             <a:r>
@@ -4637,38 +5222,13 @@
                 <a:ea typeface="メイリオ" pitchFamily="34" charset="-122"/>
                 <a:cs typeface="メイリオ" pitchFamily="34" charset="-120"/>
               </a:rPr>
-              <a:t>子どもの姿を見る</a:t>
-            </a:r>
-            <a:endParaRPr lang="en-US" sz="1300" dirty="0"/>
-          </a:p>
-        </p:txBody>
-      </p:sp>
-      <p:sp>
-        <p:nvSpPr>
-          <p:cNvPr id="15" name="Text 13"/>
-          <p:cNvSpPr txBox="1"/>
-          <p:nvPr/>
-        </p:nvSpPr>
-        <p:spPr>
-          <a:xfrm>
-            <a:off x="6720840" y="3182112"/>
-            <a:ext cx="182880" cy="530352"/>
-          </a:xfrm>
-          <a:prstGeom prst="rect">
-            <a:avLst/>
-          </a:prstGeom>
-          <a:noFill/>
-          <a:ln/>
-        </p:spPr>
-        <p:txBody>
-          <a:bodyPr wrap="square" lIns="0" tIns="0" rIns="0" bIns="0" rtlCol="0" anchor="ctr"/>
-          <a:lstStyle/>
-          <a:p>
-            <a:pPr algn="ctr" indent="0" marL="0">
-              <a:buNone/>
-            </a:pPr>
-            <a:r>
-              <a:rPr lang="en-US" sz="1400" b="1" dirty="0">
+              <a:t>前時のワークシートで自分の考えを確認</a:t>
+            </a:r>
+            <a:pPr algn="l" indent="0" marL="0">
+              <a:buNone/>
+            </a:pPr>
+            <a:r>
+              <a:rPr lang="en-US" sz="1200" b="1" dirty="0">
                 <a:solidFill>
                   <a:srgbClr val="808080"/>
                 </a:solidFill>
@@ -4676,38 +5236,25 @@
                 <a:ea typeface="メイリオ" pitchFamily="34" charset="-122"/>
                 <a:cs typeface="メイリオ" pitchFamily="34" charset="-120"/>
               </a:rPr>
-              <a:t>→</a:t>
-            </a:r>
-            <a:endParaRPr lang="en-US" sz="1400" dirty="0"/>
-          </a:p>
-        </p:txBody>
-      </p:sp>
-      <p:sp>
-        <p:nvSpPr>
-          <p:cNvPr id="16" name="Shape 14"/>
-          <p:cNvSpPr/>
-          <p:nvPr/>
-        </p:nvSpPr>
-        <p:spPr>
-          <a:xfrm>
-            <a:off x="6903720" y="3182112"/>
-            <a:ext cx="2011680" cy="530352"/>
-          </a:xfrm>
-          <a:prstGeom prst="roundRect">
-            <a:avLst>
-              <a:gd name="adj" fmla="val 12069"/>
-            </a:avLst>
-          </a:prstGeom>
-          <a:solidFill>
-            <a:srgbClr val="E9F7F3"/>
-          </a:solidFill>
-          <a:ln w="12700">
-            <a:solidFill>
-              <a:srgbClr val="B9E5DA"/>
-            </a:solidFill>
-            <a:prstDash val="solid"/>
-          </a:ln>
-        </p:spPr>
+              <a:t>　→　</a:t>
+            </a:r>
+            <a:pPr algn="l" indent="0" marL="0">
+              <a:buNone/>
+            </a:pPr>
+            <a:r>
+              <a:rPr lang="en-US" sz="1300" b="1" dirty="0">
+                <a:solidFill>
+                  <a:srgbClr val="EE7B08"/>
+                </a:solidFill>
+                <a:latin typeface="メイリオ" pitchFamily="34" charset="0"/>
+                <a:ea typeface="メイリオ" pitchFamily="34" charset="-122"/>
+                <a:cs typeface="メイリオ" pitchFamily="34" charset="-120"/>
+              </a:rPr>
+              <a:t>本時の考えを書き残す</a:t>
+            </a:r>
+            <a:endParaRPr lang="en-US" sz="1100" dirty="0"/>
+          </a:p>
+        </p:txBody>
       </p:sp>
       <p:sp>
         <p:nvSpPr>
@@ -4717,27 +5264,27 @@
         </p:nvSpPr>
         <p:spPr>
           <a:xfrm>
-            <a:off x="6903720" y="3182112"/>
-            <a:ext cx="2011680" cy="530352"/>
-          </a:xfrm>
-          <a:prstGeom prst="rect">
-            <a:avLst/>
-          </a:prstGeom>
-          <a:noFill/>
-          <a:ln/>
-        </p:spPr>
-        <p:txBody>
-          <a:bodyPr wrap="square" lIns="0" tIns="0" rIns="0" bIns="0" rtlCol="0" anchor="ctr"/>
-          <a:lstStyle/>
-          <a:p>
-            <a:pPr algn="ctr" indent="0" marL="0">
-              <a:lnSpc>
-                <a:spcPct val="115000"/>
-              </a:lnSpc>
-              <a:buNone/>
-            </a:pPr>
-            <a:r>
-              <a:rPr lang="en-US" sz="1300" b="1" dirty="0">
+            <a:off x="320040" y="4352544"/>
+            <a:ext cx="8503920" cy="457200"/>
+          </a:xfrm>
+          <a:prstGeom prst="rect">
+            <a:avLst/>
+          </a:prstGeom>
+          <a:noFill/>
+          <a:ln/>
+        </p:spPr>
+        <p:txBody>
+          <a:bodyPr wrap="square" lIns="0" tIns="0" rIns="0" bIns="0" rtlCol="0" anchor="t"/>
+          <a:lstStyle/>
+          <a:p>
+            <a:pPr algn="l" indent="0" marL="0">
+              <a:lnSpc>
+                <a:spcPct val="120000"/>
+              </a:lnSpc>
+              <a:buNone/>
+            </a:pPr>
+            <a:r>
+              <a:rPr lang="en-US" sz="1700" b="1" dirty="0">
                 <a:solidFill>
                   <a:srgbClr val="595959"/>
                 </a:solidFill>
@@ -4745,33 +5292,8 @@
                 <a:ea typeface="メイリオ" pitchFamily="34" charset="-122"/>
                 <a:cs typeface="メイリオ" pitchFamily="34" charset="-120"/>
               </a:rPr>
-              <a:t>次の授業に生かす</a:t>
-            </a:r>
-            <a:endParaRPr lang="en-US" sz="1300" dirty="0"/>
-          </a:p>
-        </p:txBody>
-      </p:sp>
-      <p:sp>
-        <p:nvSpPr>
-          <p:cNvPr id="18" name="Text 16"/>
-          <p:cNvSpPr txBox="1"/>
-          <p:nvPr/>
-        </p:nvSpPr>
-        <p:spPr>
-          <a:xfrm>
-            <a:off x="475488" y="3950208"/>
-            <a:ext cx="8193024" cy="822960"/>
-          </a:xfrm>
-          <a:prstGeom prst="rect">
-            <a:avLst/>
-          </a:prstGeom>
-          <a:noFill/>
-          <a:ln/>
-        </p:spPr>
-        <p:txBody>
-          <a:bodyPr wrap="square" lIns="0" tIns="0" rIns="0" bIns="0" rtlCol="0" anchor="t"/>
-          <a:lstStyle/>
-          <a:p>
+              <a:t>教師が管理する学習から、</a:t>
+            </a:r>
             <a:pPr algn="l" indent="0" marL="0">
               <a:lnSpc>
                 <a:spcPct val="120000"/>
@@ -4781,67 +5303,30 @@
             <a:r>
               <a:rPr lang="en-US" sz="1700" b="1" dirty="0">
                 <a:solidFill>
+                  <a:srgbClr val="EE7B08"/>
+                </a:solidFill>
+                <a:latin typeface="メイリオ" pitchFamily="34" charset="0"/>
+                <a:ea typeface="メイリオ" pitchFamily="34" charset="-122"/>
+                <a:cs typeface="メイリオ" pitchFamily="34" charset="-120"/>
+              </a:rPr>
+              <a:t>子どもが管理する学習</a:t>
+            </a:r>
+            <a:pPr algn="l" indent="0" marL="0">
+              <a:lnSpc>
+                <a:spcPct val="120000"/>
+              </a:lnSpc>
+              <a:buNone/>
+            </a:pPr>
+            <a:r>
+              <a:rPr lang="en-US" sz="1700" b="1" dirty="0">
+                <a:solidFill>
                   <a:srgbClr val="595959"/>
                 </a:solidFill>
                 <a:latin typeface="メイリオ" pitchFamily="34" charset="0"/>
                 <a:ea typeface="メイリオ" pitchFamily="34" charset="-122"/>
                 <a:cs typeface="メイリオ" pitchFamily="34" charset="-120"/>
               </a:rPr>
-              <a:t>教師が管理する学習から、</a:t>
-            </a:r>
-            <a:pPr algn="l" indent="0" marL="0">
-              <a:lnSpc>
-                <a:spcPct val="120000"/>
-              </a:lnSpc>
-              <a:buNone/>
-            </a:pPr>
-            <a:r>
-              <a:rPr lang="en-US" sz="1700" b="1" dirty="0">
-                <a:solidFill>
-                  <a:srgbClr val="EE7B08"/>
-                </a:solidFill>
-                <a:latin typeface="メイリオ" pitchFamily="34" charset="0"/>
-                <a:ea typeface="メイリオ" pitchFamily="34" charset="-122"/>
-                <a:cs typeface="メイリオ" pitchFamily="34" charset="-120"/>
-              </a:rPr>
-              <a:t>子どもが管理する学習</a:t>
-            </a:r>
-            <a:pPr algn="l" indent="0" marL="0">
-              <a:lnSpc>
-                <a:spcPct val="120000"/>
-              </a:lnSpc>
-              <a:buNone/>
-            </a:pPr>
-            <a:r>
-              <a:rPr lang="en-US" sz="1700" b="1" dirty="0">
-                <a:solidFill>
-                  <a:srgbClr val="595959"/>
-                </a:solidFill>
-                <a:latin typeface="メイリオ" pitchFamily="34" charset="0"/>
-                <a:ea typeface="メイリオ" pitchFamily="34" charset="-122"/>
-                <a:cs typeface="メイリオ" pitchFamily="34" charset="-120"/>
-              </a:rPr>
-              <a:t>へ。</a:t>
-            </a:r>
-            <a:endParaRPr lang="en-US" sz="1700" dirty="0"/>
-          </a:p>
-          <a:p>
-            <a:pPr algn="l" indent="0" marL="0">
-              <a:lnSpc>
-                <a:spcPct val="120000"/>
-              </a:lnSpc>
-              <a:buNone/>
-            </a:pPr>
-            <a:r>
-              <a:rPr lang="en-US" sz="1700" b="1" dirty="0">
-                <a:solidFill>
-                  <a:srgbClr val="595959"/>
-                </a:solidFill>
-                <a:latin typeface="メイリオ" pitchFamily="34" charset="0"/>
-                <a:ea typeface="メイリオ" pitchFamily="34" charset="-122"/>
-                <a:cs typeface="メイリオ" pitchFamily="34" charset="-120"/>
-              </a:rPr>
-              <a:t>その転換を支えるのが、この振り返りである。</a:t>
+              <a:t>へ。着実に転換が進んでいる。</a:t>
             </a:r>
             <a:endParaRPr lang="en-US" sz="1700" dirty="0"/>
           </a:p>
@@ -4881,7 +5366,7 @@
         <p:spPr>
           <a:xfrm>
             <a:off x="0" y="-9144"/>
-            <a:ext cx="9144000" cy="612648"/>
+            <a:ext cx="9144000" cy="1161288"/>
           </a:xfrm>
           <a:prstGeom prst="rect">
             <a:avLst/>
@@ -4910,26 +5395,280 @@
                 <a:ea typeface="メイリオ" pitchFamily="34" charset="-122"/>
                 <a:cs typeface="メイリオ" pitchFamily="34" charset="-120"/>
               </a:rPr>
-              <a:t>　まとめ</a:t>
+              <a:t>　③　今後に向けて</a:t>
             </a:r>
             <a:endParaRPr lang="en-US" sz="3000" dirty="0"/>
           </a:p>
-        </p:txBody>
-      </p:sp>
-      <p:sp>
-        <p:nvSpPr>
-          <p:cNvPr id="3" name="Shape 1"/>
+          <a:p>
+            <a:pPr algn="l" indent="0" marL="0">
+              <a:lnSpc>
+                <a:spcPct val="120000"/>
+              </a:lnSpc>
+              <a:buNone/>
+            </a:pPr>
+            <a:r>
+              <a:rPr lang="en-US" sz="2800" b="1" dirty="0">
+                <a:solidFill>
+                  <a:srgbClr val="FFFFFF"/>
+                </a:solidFill>
+                <a:latin typeface="メイリオ" pitchFamily="34" charset="0"/>
+                <a:ea typeface="メイリオ" pitchFamily="34" charset="-122"/>
+                <a:cs typeface="メイリオ" pitchFamily="34" charset="-120"/>
+              </a:rPr>
+              <a:t>　この３つを、９年間の共通の言葉に</a:t>
+            </a:r>
+            <a:endParaRPr lang="en-US" sz="3000" dirty="0"/>
+          </a:p>
+        </p:txBody>
+      </p:sp>
+      <p:sp>
+        <p:nvSpPr>
+          <p:cNvPr id="3" name="Text 1"/>
+          <p:cNvSpPr txBox="1"/>
+          <p:nvPr/>
+        </p:nvSpPr>
+        <p:spPr>
+          <a:xfrm>
+            <a:off x="475488" y="1417320"/>
+            <a:ext cx="8193024" cy="548640"/>
+          </a:xfrm>
+          <a:prstGeom prst="rect">
+            <a:avLst/>
+          </a:prstGeom>
+          <a:noFill/>
+          <a:ln/>
+        </p:spPr>
+        <p:txBody>
+          <a:bodyPr wrap="square" lIns="0" tIns="0" rIns="0" bIns="0" rtlCol="0" anchor="t"/>
+          <a:lstStyle/>
+          <a:p>
+            <a:pPr algn="l" indent="0" marL="0">
+              <a:lnSpc>
+                <a:spcPct val="120000"/>
+              </a:lnSpc>
+              <a:buNone/>
+            </a:pPr>
+            <a:r>
+              <a:rPr lang="en-US" sz="1800" b="1" dirty="0">
+                <a:solidFill>
+                  <a:srgbClr val="595959"/>
+                </a:solidFill>
+                <a:latin typeface="メイリオ" pitchFamily="34" charset="0"/>
+                <a:ea typeface="メイリオ" pitchFamily="34" charset="-122"/>
+                <a:cs typeface="メイリオ" pitchFamily="34" charset="-120"/>
+              </a:rPr>
+              <a:t>本日見えた３つの視点は、学年や教科を越えて使える。</a:t>
+            </a:r>
+            <a:endParaRPr lang="en-US" sz="1800" dirty="0"/>
+          </a:p>
+        </p:txBody>
+      </p:sp>
+      <p:sp>
+        <p:nvSpPr>
+          <p:cNvPr id="4" name="Shape 2"/>
           <p:cNvSpPr/>
           <p:nvPr/>
         </p:nvSpPr>
         <p:spPr>
           <a:xfrm>
-            <a:off x="475488" y="960120"/>
-            <a:ext cx="8193024" cy="1051560"/>
+            <a:off x="475488" y="2029968"/>
+            <a:ext cx="2468880" cy="566928"/>
           </a:xfrm>
           <a:prstGeom prst="roundRect">
             <a:avLst>
-              <a:gd name="adj" fmla="val 5217"/>
+              <a:gd name="adj" fmla="val 11290"/>
+            </a:avLst>
+          </a:prstGeom>
+          <a:solidFill>
+            <a:srgbClr val="44C1A3"/>
+          </a:solidFill>
+          <a:ln/>
+        </p:spPr>
+      </p:sp>
+      <p:sp>
+        <p:nvSpPr>
+          <p:cNvPr id="5" name="Text 3"/>
+          <p:cNvSpPr txBox="1"/>
+          <p:nvPr/>
+        </p:nvSpPr>
+        <p:spPr>
+          <a:xfrm>
+            <a:off x="475488" y="2029968"/>
+            <a:ext cx="2468880" cy="566928"/>
+          </a:xfrm>
+          <a:prstGeom prst="rect">
+            <a:avLst/>
+          </a:prstGeom>
+          <a:noFill/>
+          <a:ln/>
+        </p:spPr>
+        <p:txBody>
+          <a:bodyPr wrap="square" lIns="0" tIns="0" rIns="0" bIns="0" rtlCol="0" anchor="ctr"/>
+          <a:lstStyle/>
+          <a:p>
+            <a:pPr algn="ctr" indent="0" marL="0">
+              <a:lnSpc>
+                <a:spcPct val="115000"/>
+              </a:lnSpc>
+              <a:buNone/>
+            </a:pPr>
+            <a:r>
+              <a:rPr lang="en-US" sz="1500" b="1" dirty="0">
+                <a:solidFill>
+                  <a:srgbClr val="FFFFFF"/>
+                </a:solidFill>
+                <a:latin typeface="メイリオ" pitchFamily="34" charset="0"/>
+                <a:ea typeface="メイリオ" pitchFamily="34" charset="-122"/>
+                <a:cs typeface="メイリオ" pitchFamily="34" charset="-120"/>
+              </a:rPr>
+              <a:t>Ⅰ　見通し</a:t>
+            </a:r>
+            <a:endParaRPr lang="en-US" sz="1500" dirty="0"/>
+          </a:p>
+        </p:txBody>
+      </p:sp>
+      <p:sp>
+        <p:nvSpPr>
+          <p:cNvPr id="6" name="Shape 4"/>
+          <p:cNvSpPr/>
+          <p:nvPr/>
+        </p:nvSpPr>
+        <p:spPr>
+          <a:xfrm>
+            <a:off x="3218688" y="2029968"/>
+            <a:ext cx="2468880" cy="566928"/>
+          </a:xfrm>
+          <a:prstGeom prst="roundRect">
+            <a:avLst>
+              <a:gd name="adj" fmla="val 11290"/>
+            </a:avLst>
+          </a:prstGeom>
+          <a:solidFill>
+            <a:srgbClr val="44C1A3"/>
+          </a:solidFill>
+          <a:ln/>
+        </p:spPr>
+      </p:sp>
+      <p:sp>
+        <p:nvSpPr>
+          <p:cNvPr id="7" name="Text 5"/>
+          <p:cNvSpPr txBox="1"/>
+          <p:nvPr/>
+        </p:nvSpPr>
+        <p:spPr>
+          <a:xfrm>
+            <a:off x="3218688" y="2029968"/>
+            <a:ext cx="2468880" cy="566928"/>
+          </a:xfrm>
+          <a:prstGeom prst="rect">
+            <a:avLst/>
+          </a:prstGeom>
+          <a:noFill/>
+          <a:ln/>
+        </p:spPr>
+        <p:txBody>
+          <a:bodyPr wrap="square" lIns="0" tIns="0" rIns="0" bIns="0" rtlCol="0" anchor="ctr"/>
+          <a:lstStyle/>
+          <a:p>
+            <a:pPr algn="ctr" indent="0" marL="0">
+              <a:lnSpc>
+                <a:spcPct val="115000"/>
+              </a:lnSpc>
+              <a:buNone/>
+            </a:pPr>
+            <a:r>
+              <a:rPr lang="en-US" sz="1500" b="1" dirty="0">
+                <a:solidFill>
+                  <a:srgbClr val="FFFFFF"/>
+                </a:solidFill>
+                <a:latin typeface="メイリオ" pitchFamily="34" charset="0"/>
+                <a:ea typeface="メイリオ" pitchFamily="34" charset="-122"/>
+                <a:cs typeface="メイリオ" pitchFamily="34" charset="-120"/>
+              </a:rPr>
+              <a:t>Ⅱ　違いに応じる</a:t>
+            </a:r>
+            <a:endParaRPr lang="en-US" sz="1500" dirty="0"/>
+          </a:p>
+        </p:txBody>
+      </p:sp>
+      <p:sp>
+        <p:nvSpPr>
+          <p:cNvPr id="8" name="Shape 6"/>
+          <p:cNvSpPr/>
+          <p:nvPr/>
+        </p:nvSpPr>
+        <p:spPr>
+          <a:xfrm>
+            <a:off x="5961888" y="2029968"/>
+            <a:ext cx="2468880" cy="566928"/>
+          </a:xfrm>
+          <a:prstGeom prst="roundRect">
+            <a:avLst>
+              <a:gd name="adj" fmla="val 11290"/>
+            </a:avLst>
+          </a:prstGeom>
+          <a:solidFill>
+            <a:srgbClr val="44C1A3"/>
+          </a:solidFill>
+          <a:ln/>
+        </p:spPr>
+      </p:sp>
+      <p:sp>
+        <p:nvSpPr>
+          <p:cNvPr id="9" name="Text 7"/>
+          <p:cNvSpPr txBox="1"/>
+          <p:nvPr/>
+        </p:nvSpPr>
+        <p:spPr>
+          <a:xfrm>
+            <a:off x="5961888" y="2029968"/>
+            <a:ext cx="2468880" cy="566928"/>
+          </a:xfrm>
+          <a:prstGeom prst="rect">
+            <a:avLst/>
+          </a:prstGeom>
+          <a:noFill/>
+          <a:ln/>
+        </p:spPr>
+        <p:txBody>
+          <a:bodyPr wrap="square" lIns="0" tIns="0" rIns="0" bIns="0" rtlCol="0" anchor="ctr"/>
+          <a:lstStyle/>
+          <a:p>
+            <a:pPr algn="ctr" indent="0" marL="0">
+              <a:lnSpc>
+                <a:spcPct val="115000"/>
+              </a:lnSpc>
+              <a:buNone/>
+            </a:pPr>
+            <a:r>
+              <a:rPr lang="en-US" sz="1500" b="1" dirty="0">
+                <a:solidFill>
+                  <a:srgbClr val="FFFFFF"/>
+                </a:solidFill>
+                <a:latin typeface="メイリオ" pitchFamily="34" charset="0"/>
+                <a:ea typeface="メイリオ" pitchFamily="34" charset="-122"/>
+                <a:cs typeface="メイリオ" pitchFamily="34" charset="-120"/>
+              </a:rPr>
+              <a:t>Ⅲ　対話</a:t>
+            </a:r>
+            <a:endParaRPr lang="en-US" sz="1500" dirty="0"/>
+          </a:p>
+        </p:txBody>
+      </p:sp>
+      <p:sp>
+        <p:nvSpPr>
+          <p:cNvPr id="10" name="Shape 8"/>
+          <p:cNvSpPr/>
+          <p:nvPr/>
+        </p:nvSpPr>
+        <p:spPr>
+          <a:xfrm>
+            <a:off x="475488" y="2798064"/>
+            <a:ext cx="8193024" cy="1188720"/>
+          </a:xfrm>
+          <a:prstGeom prst="roundRect">
+            <a:avLst>
+              <a:gd name="adj" fmla="val 4615"/>
             </a:avLst>
           </a:prstGeom>
           <a:solidFill>
@@ -4945,30 +5684,132 @@
       </p:sp>
       <p:sp>
         <p:nvSpPr>
-          <p:cNvPr id="4" name="Text 2"/>
-          <p:cNvSpPr txBox="1"/>
-          <p:nvPr/>
-        </p:nvSpPr>
-        <p:spPr>
-          <a:xfrm>
-            <a:off x="731520" y="960120"/>
-            <a:ext cx="7680960" cy="1051560"/>
-          </a:xfrm>
-          <a:prstGeom prst="rect">
-            <a:avLst/>
-          </a:prstGeom>
-          <a:noFill/>
-          <a:ln/>
-        </p:spPr>
-        <p:txBody>
-          <a:bodyPr wrap="square" lIns="0" tIns="0" rIns="0" bIns="0" rtlCol="0" anchor="ctr"/>
-          <a:lstStyle/>
-          <a:p>
-            <a:pPr algn="l" indent="0" marL="0">
-              <a:buNone/>
-            </a:pPr>
-            <a:r>
-              <a:rPr lang="en-US" sz="2600" b="1" dirty="0">
+          <p:cNvPr id="11" name="Text 9"/>
+          <p:cNvSpPr txBox="1"/>
+          <p:nvPr/>
+        </p:nvSpPr>
+        <p:spPr>
+          <a:xfrm>
+            <a:off x="731520" y="2907792"/>
+            <a:ext cx="7680960" cy="1005840"/>
+          </a:xfrm>
+          <a:prstGeom prst="rect">
+            <a:avLst/>
+          </a:prstGeom>
+          <a:noFill/>
+          <a:ln/>
+        </p:spPr>
+        <p:txBody>
+          <a:bodyPr wrap="square" lIns="0" tIns="0" rIns="0" bIns="0" rtlCol="0" anchor="t"/>
+          <a:lstStyle/>
+          <a:p>
+            <a:pPr algn="l" indent="0" marL="0">
+              <a:lnSpc>
+                <a:spcPct val="130000"/>
+              </a:lnSpc>
+              <a:buNone/>
+            </a:pPr>
+            <a:r>
+              <a:rPr lang="en-US" sz="1400" b="1" dirty="0">
+                <a:solidFill>
+                  <a:srgbClr val="44C1A3"/>
+                </a:solidFill>
+                <a:latin typeface="メイリオ" pitchFamily="34" charset="0"/>
+                <a:ea typeface="メイリオ" pitchFamily="34" charset="-122"/>
+                <a:cs typeface="メイリオ" pitchFamily="34" charset="-120"/>
+              </a:rPr>
+              <a:t>学校経営計画とも重なる</a:t>
+            </a:r>
+            <a:endParaRPr lang="en-US" sz="1400" dirty="0"/>
+          </a:p>
+          <a:p>
+            <a:pPr algn="l" indent="0" marL="0">
+              <a:lnSpc>
+                <a:spcPct val="130000"/>
+              </a:lnSpc>
+              <a:buNone/>
+            </a:pPr>
+            <a:r>
+              <a:rPr lang="en-US" sz="1400" b="1" dirty="0">
+                <a:solidFill>
+                  <a:srgbClr val="595959"/>
+                </a:solidFill>
+                <a:latin typeface="メイリオ" pitchFamily="34" charset="0"/>
+                <a:ea typeface="メイリオ" pitchFamily="34" charset="-122"/>
+                <a:cs typeface="メイリオ" pitchFamily="34" charset="-120"/>
+              </a:rPr>
+              <a:t>　・主体的・対話的で深い学びの実現に向けた授業改善</a:t>
+            </a:r>
+            <a:endParaRPr lang="en-US" sz="1400" dirty="0"/>
+          </a:p>
+          <a:p>
+            <a:pPr algn="l" indent="0" marL="0">
+              <a:lnSpc>
+                <a:spcPct val="130000"/>
+              </a:lnSpc>
+              <a:buNone/>
+            </a:pPr>
+            <a:r>
+              <a:rPr lang="en-US" sz="1400" b="1" dirty="0">
+                <a:solidFill>
+                  <a:srgbClr val="595959"/>
+                </a:solidFill>
+                <a:latin typeface="メイリオ" pitchFamily="34" charset="0"/>
+                <a:ea typeface="メイリオ" pitchFamily="34" charset="-122"/>
+                <a:cs typeface="メイリオ" pitchFamily="34" charset="-120"/>
+              </a:rPr>
+              <a:t>　・個に応じたきめ細やかな指導・支援の充実</a:t>
+            </a:r>
+            <a:endParaRPr lang="en-US" sz="1400" dirty="0"/>
+          </a:p>
+        </p:txBody>
+      </p:sp>
+      <p:sp>
+        <p:nvSpPr>
+          <p:cNvPr id="12" name="Text 10"/>
+          <p:cNvSpPr txBox="1"/>
+          <p:nvPr/>
+        </p:nvSpPr>
+        <p:spPr>
+          <a:xfrm>
+            <a:off x="475488" y="4114800"/>
+            <a:ext cx="8193024" cy="548640"/>
+          </a:xfrm>
+          <a:prstGeom prst="rect">
+            <a:avLst/>
+          </a:prstGeom>
+          <a:noFill/>
+          <a:ln/>
+        </p:spPr>
+        <p:txBody>
+          <a:bodyPr wrap="square" lIns="0" tIns="0" rIns="0" bIns="0" rtlCol="0" anchor="t"/>
+          <a:lstStyle/>
+          <a:p>
+            <a:pPr algn="l" indent="0" marL="0">
+              <a:lnSpc>
+                <a:spcPct val="120000"/>
+              </a:lnSpc>
+              <a:buNone/>
+            </a:pPr>
+            <a:r>
+              <a:rPr lang="en-US" sz="1700" b="1" dirty="0">
+                <a:solidFill>
+                  <a:srgbClr val="595959"/>
+                </a:solidFill>
+                <a:latin typeface="メイリオ" pitchFamily="34" charset="0"/>
+                <a:ea typeface="メイリオ" pitchFamily="34" charset="-122"/>
+                <a:cs typeface="メイリオ" pitchFamily="34" charset="-120"/>
+              </a:rPr>
+              <a:t>小竹小学校との校区別協議会で、</a:t>
+            </a:r>
+            <a:pPr algn="l" indent="0" marL="0">
+              <a:lnSpc>
+                <a:spcPct val="120000"/>
+              </a:lnSpc>
+              <a:buNone/>
+            </a:pPr>
+            <a:r>
+              <a:rPr lang="en-US" sz="1700" b="1" dirty="0">
                 <a:solidFill>
                   <a:srgbClr val="EE7B08"/>
                 </a:solidFill>
@@ -4976,13 +5817,16 @@
                 <a:ea typeface="メイリオ" pitchFamily="34" charset="-122"/>
                 <a:cs typeface="メイリオ" pitchFamily="34" charset="-120"/>
               </a:rPr>
-              <a:t>「違い」を生かす授業</a:t>
-            </a:r>
-            <a:pPr algn="l" indent="0" marL="0">
-              <a:buNone/>
-            </a:pPr>
-            <a:r>
-              <a:rPr lang="en-US" sz="2600" b="1" dirty="0">
+              <a:t>「目指す１５歳の姿」</a:t>
+            </a:r>
+            <a:pPr algn="l" indent="0" marL="0">
+              <a:lnSpc>
+                <a:spcPct val="120000"/>
+              </a:lnSpc>
+              <a:buNone/>
+            </a:pPr>
+            <a:r>
+              <a:rPr lang="en-US" sz="1700" b="1" dirty="0">
                 <a:solidFill>
                   <a:srgbClr val="595959"/>
                 </a:solidFill>
@@ -4990,159 +5834,68 @@
                 <a:ea typeface="メイリオ" pitchFamily="34" charset="-122"/>
                 <a:cs typeface="メイリオ" pitchFamily="34" charset="-120"/>
               </a:rPr>
-              <a:t>が、９年間の学びをつなぐ。</a:t>
-            </a:r>
-            <a:endParaRPr lang="en-US" sz="2600" dirty="0"/>
-          </a:p>
-        </p:txBody>
-      </p:sp>
-      <p:sp>
-        <p:nvSpPr>
-          <p:cNvPr id="5" name="Text 3"/>
-          <p:cNvSpPr txBox="1"/>
-          <p:nvPr/>
-        </p:nvSpPr>
-        <p:spPr>
-          <a:xfrm>
-            <a:off x="475488" y="2240280"/>
-            <a:ext cx="8193024" cy="822960"/>
-          </a:xfrm>
-          <a:prstGeom prst="rect">
-            <a:avLst/>
-          </a:prstGeom>
-          <a:noFill/>
-          <a:ln/>
-        </p:spPr>
-        <p:txBody>
-          <a:bodyPr wrap="square" lIns="0" tIns="0" rIns="0" bIns="0" rtlCol="0" anchor="t"/>
-          <a:lstStyle/>
-          <a:p>
-            <a:pPr algn="l" indent="0" marL="0">
-              <a:lnSpc>
-                <a:spcPct val="120000"/>
-              </a:lnSpc>
-              <a:buNone/>
-            </a:pPr>
-            <a:r>
-              <a:rPr lang="en-US" sz="1700" b="1" dirty="0">
-                <a:solidFill>
-                  <a:srgbClr val="595959"/>
-                </a:solidFill>
-                <a:latin typeface="メイリオ" pitchFamily="34" charset="0"/>
-                <a:ea typeface="メイリオ" pitchFamily="34" charset="-122"/>
-                <a:cs typeface="メイリオ" pitchFamily="34" charset="-120"/>
-              </a:rPr>
-              <a:t>本日の３つの授業は、いずれも一人一人の差が大きい集団だった。</a:t>
+              <a:t>として共有したい。</a:t>
             </a:r>
             <a:endParaRPr lang="en-US" sz="1700" dirty="0"/>
           </a:p>
-          <a:p>
-            <a:pPr algn="l" indent="0" marL="0">
-              <a:lnSpc>
-                <a:spcPct val="120000"/>
-              </a:lnSpc>
-              <a:buNone/>
-            </a:pPr>
-            <a:r>
-              <a:rPr lang="en-US" sz="1700" b="1" dirty="0">
-                <a:solidFill>
-                  <a:srgbClr val="595959"/>
-                </a:solidFill>
-                <a:latin typeface="メイリオ" pitchFamily="34" charset="0"/>
-                <a:ea typeface="メイリオ" pitchFamily="34" charset="-122"/>
-                <a:cs typeface="メイリオ" pitchFamily="34" charset="-120"/>
-              </a:rPr>
-              <a:t>３人とも、その差を</a:t>
-            </a:r>
-            <a:pPr algn="l" indent="0" marL="0">
-              <a:lnSpc>
-                <a:spcPct val="120000"/>
-              </a:lnSpc>
-              <a:buNone/>
-            </a:pPr>
-            <a:r>
-              <a:rPr lang="en-US" sz="1700" b="1" dirty="0">
-                <a:solidFill>
-                  <a:srgbClr val="EE7B08"/>
-                </a:solidFill>
-                <a:latin typeface="メイリオ" pitchFamily="34" charset="0"/>
-                <a:ea typeface="メイリオ" pitchFamily="34" charset="-122"/>
-                <a:cs typeface="メイリオ" pitchFamily="34" charset="-120"/>
-              </a:rPr>
-              <a:t>学びの出発点</a:t>
-            </a:r>
-            <a:pPr algn="l" indent="0" marL="0">
-              <a:lnSpc>
-                <a:spcPct val="120000"/>
-              </a:lnSpc>
-              <a:buNone/>
-            </a:pPr>
-            <a:r>
-              <a:rPr lang="en-US" sz="1700" b="1" dirty="0">
-                <a:solidFill>
-                  <a:srgbClr val="595959"/>
-                </a:solidFill>
-                <a:latin typeface="メイリオ" pitchFamily="34" charset="0"/>
-                <a:ea typeface="メイリオ" pitchFamily="34" charset="-122"/>
-                <a:cs typeface="メイリオ" pitchFamily="34" charset="-120"/>
-              </a:rPr>
-              <a:t>にしていた。</a:t>
-            </a:r>
-            <a:endParaRPr lang="en-US" sz="1700" dirty="0"/>
-          </a:p>
-        </p:txBody>
-      </p:sp>
-      <p:sp>
-        <p:nvSpPr>
-          <p:cNvPr id="6" name="Shape 4"/>
-          <p:cNvSpPr/>
-          <p:nvPr/>
-        </p:nvSpPr>
-        <p:spPr>
-          <a:xfrm>
-            <a:off x="475488" y="3218688"/>
-            <a:ext cx="2468880" cy="566928"/>
-          </a:xfrm>
-          <a:prstGeom prst="roundRect">
-            <a:avLst>
-              <a:gd name="adj" fmla="val 11290"/>
-            </a:avLst>
+        </p:txBody>
+      </p:sp>
+    </p:spTree>
+  </p:cSld>
+  <p:clrMapOvr>
+    <a:masterClrMapping/>
+  </p:clrMapOvr>
+</p:sld>
+</file>
+
+<file path=ppt/slides/slide14.xml><?xml version="1.0" encoding="utf-8"?>
+<p:sld xmlns:a="http://schemas.openxmlformats.org/drawingml/2006/main" xmlns:r="http://schemas.openxmlformats.org/officeDocument/2006/relationships" xmlns:p="http://schemas.openxmlformats.org/presentationml/2006/main">
+  <p:cSld name="Slide 14">
+    <p:spTree>
+      <p:nvGrpSpPr>
+        <p:cNvPr id="1" name=""/>
+        <p:cNvGrpSpPr/>
+        <p:nvPr/>
+      </p:nvGrpSpPr>
+      <p:grpSpPr>
+        <a:xfrm>
+          <a:off x="0" y="0"/>
+          <a:ext cx="0" cy="0"/>
+          <a:chOff x="0" y="0"/>
+          <a:chExt cx="0" cy="0"/>
+        </a:xfrm>
+      </p:grpSpPr>
+      <p:sp>
+        <p:nvSpPr>
+          <p:cNvPr id="2" name="Text 0"/>
+          <p:cNvSpPr txBox="1"/>
+          <p:nvPr/>
+        </p:nvSpPr>
+        <p:spPr>
+          <a:xfrm>
+            <a:off x="0" y="-9144"/>
+            <a:ext cx="9144000" cy="1161288"/>
+          </a:xfrm>
+          <a:prstGeom prst="rect">
+            <a:avLst/>
           </a:prstGeom>
           <a:solidFill>
             <a:srgbClr val="44C1A3"/>
           </a:solidFill>
           <a:ln/>
         </p:spPr>
-      </p:sp>
-      <p:sp>
-        <p:nvSpPr>
-          <p:cNvPr id="7" name="Text 5"/>
-          <p:cNvSpPr txBox="1"/>
-          <p:nvPr/>
-        </p:nvSpPr>
-        <p:spPr>
-          <a:xfrm>
-            <a:off x="475488" y="3218688"/>
-            <a:ext cx="2468880" cy="566928"/>
-          </a:xfrm>
-          <a:prstGeom prst="rect">
-            <a:avLst/>
-          </a:prstGeom>
-          <a:noFill/>
-          <a:ln/>
-        </p:spPr>
-        <p:txBody>
-          <a:bodyPr wrap="square" lIns="0" tIns="0" rIns="0" bIns="0" rtlCol="0" anchor="ctr"/>
-          <a:lstStyle/>
-          <a:p>
-            <a:pPr algn="ctr" indent="0" marL="0">
-              <a:lnSpc>
-                <a:spcPct val="115000"/>
-              </a:lnSpc>
-              <a:buNone/>
-            </a:pPr>
-            <a:r>
-              <a:rPr lang="en-US" sz="1500" b="1" dirty="0">
+        <p:txBody>
+          <a:bodyPr wrap="square" lIns="0" tIns="0" rIns="0" bIns="0" rtlCol="0" anchor="ctr"/>
+          <a:lstStyle/>
+          <a:p>
+            <a:pPr algn="l" indent="0" marL="0">
+              <a:lnSpc>
+                <a:spcPct val="120000"/>
+              </a:lnSpc>
+              <a:buNone/>
+            </a:pPr>
+            <a:r>
+              <a:rPr lang="en-US" sz="3000" b="1" dirty="0">
                 <a:solidFill>
                   <a:srgbClr val="FFFFFF"/>
                 </a:solidFill>
@@ -5150,63 +5903,724 @@
                 <a:ea typeface="メイリオ" pitchFamily="34" charset="-122"/>
                 <a:cs typeface="メイリオ" pitchFamily="34" charset="-120"/>
               </a:rPr>
-              <a:t>Ⅰ　見通し</a:t>
-            </a:r>
-            <a:endParaRPr lang="en-US" sz="1500" dirty="0"/>
-          </a:p>
-        </p:txBody>
-      </p:sp>
-      <p:sp>
-        <p:nvSpPr>
-          <p:cNvPr id="8" name="Shape 6"/>
+              <a:t>　③　今後に向けて</a:t>
+            </a:r>
+            <a:endParaRPr lang="en-US" sz="3000" dirty="0"/>
+          </a:p>
+          <a:p>
+            <a:pPr algn="l" indent="0" marL="0">
+              <a:lnSpc>
+                <a:spcPct val="120000"/>
+              </a:lnSpc>
+              <a:buNone/>
+            </a:pPr>
+            <a:r>
+              <a:rPr lang="en-US" sz="2800" b="1" dirty="0">
+                <a:solidFill>
+                  <a:srgbClr val="FFFFFF"/>
+                </a:solidFill>
+                <a:latin typeface="メイリオ" pitchFamily="34" charset="0"/>
+                <a:ea typeface="メイリオ" pitchFamily="34" charset="-122"/>
+                <a:cs typeface="メイリオ" pitchFamily="34" charset="-120"/>
+              </a:rPr>
+              <a:t>　教師も、自らの授業を調整する</a:t>
+            </a:r>
+            <a:endParaRPr lang="en-US" sz="3000" dirty="0"/>
+          </a:p>
+        </p:txBody>
+      </p:sp>
+      <p:sp>
+        <p:nvSpPr>
+          <p:cNvPr id="3" name="Text 1"/>
+          <p:cNvSpPr txBox="1"/>
+          <p:nvPr/>
+        </p:nvSpPr>
+        <p:spPr>
+          <a:xfrm>
+            <a:off x="475488" y="1389888"/>
+            <a:ext cx="8193024" cy="292608"/>
+          </a:xfrm>
+          <a:prstGeom prst="rect">
+            <a:avLst/>
+          </a:prstGeom>
+          <a:noFill/>
+          <a:ln/>
+        </p:spPr>
+        <p:txBody>
+          <a:bodyPr wrap="square" lIns="0" tIns="0" rIns="0" bIns="0" rtlCol="0" anchor="ctr"/>
+          <a:lstStyle/>
+          <a:p>
+            <a:pPr algn="l" indent="0" marL="0">
+              <a:buNone/>
+            </a:pPr>
+            <a:r>
+              <a:rPr lang="en-US" sz="1400" b="1" dirty="0">
+                <a:solidFill>
+                  <a:srgbClr val="808080"/>
+                </a:solidFill>
+                <a:latin typeface="メイリオ" pitchFamily="34" charset="0"/>
+                <a:ea typeface="メイリオ" pitchFamily="34" charset="-122"/>
+                <a:cs typeface="メイリオ" pitchFamily="34" charset="-120"/>
+              </a:rPr>
+              <a:t>田口先生の指導案「授業観察の視点」には、こう書かれていた。</a:t>
+            </a:r>
+            <a:endParaRPr lang="en-US" sz="1400" dirty="0"/>
+          </a:p>
+        </p:txBody>
+      </p:sp>
+      <p:sp>
+        <p:nvSpPr>
+          <p:cNvPr id="4" name="Shape 2"/>
           <p:cNvSpPr/>
           <p:nvPr/>
         </p:nvSpPr>
         <p:spPr>
           <a:xfrm>
-            <a:off x="3218688" y="3218688"/>
-            <a:ext cx="2468880" cy="566928"/>
+            <a:off x="475488" y="1755648"/>
+            <a:ext cx="8193024" cy="731520"/>
           </a:xfrm>
           <a:prstGeom prst="roundRect">
             <a:avLst>
-              <a:gd name="adj" fmla="val 11290"/>
+              <a:gd name="adj" fmla="val 7500"/>
             </a:avLst>
+          </a:prstGeom>
+          <a:solidFill>
+            <a:srgbClr val="E9F7F3"/>
+          </a:solidFill>
+          <a:ln w="12700">
+            <a:solidFill>
+              <a:srgbClr val="B9E5DA"/>
+            </a:solidFill>
+            <a:prstDash val="solid"/>
+          </a:ln>
+        </p:spPr>
+      </p:sp>
+      <p:sp>
+        <p:nvSpPr>
+          <p:cNvPr id="5" name="Text 3"/>
+          <p:cNvSpPr txBox="1"/>
+          <p:nvPr/>
+        </p:nvSpPr>
+        <p:spPr>
+          <a:xfrm>
+            <a:off x="731520" y="1755648"/>
+            <a:ext cx="7680960" cy="731520"/>
+          </a:xfrm>
+          <a:prstGeom prst="rect">
+            <a:avLst/>
+          </a:prstGeom>
+          <a:noFill/>
+          <a:ln/>
+        </p:spPr>
+        <p:txBody>
+          <a:bodyPr wrap="square" lIns="0" tIns="0" rIns="0" bIns="0" rtlCol="0" anchor="ctr"/>
+          <a:lstStyle/>
+          <a:p>
+            <a:pPr algn="l" indent="0" marL="0">
+              <a:buNone/>
+            </a:pPr>
+            <a:r>
+              <a:rPr lang="en-US" sz="2200" b="1" dirty="0">
+                <a:solidFill>
+                  <a:srgbClr val="EE7B08"/>
+                </a:solidFill>
+                <a:latin typeface="メイリオ" pitchFamily="34" charset="0"/>
+                <a:ea typeface="メイリオ" pitchFamily="34" charset="-122"/>
+                <a:cs typeface="メイリオ" pitchFamily="34" charset="-120"/>
+              </a:rPr>
+              <a:t>「指導に当たっての手立ては有効であったか」</a:t>
+            </a:r>
+            <a:endParaRPr lang="en-US" sz="2200" dirty="0"/>
+          </a:p>
+        </p:txBody>
+      </p:sp>
+      <p:sp>
+        <p:nvSpPr>
+          <p:cNvPr id="6" name="Text 4"/>
+          <p:cNvSpPr txBox="1"/>
+          <p:nvPr/>
+        </p:nvSpPr>
+        <p:spPr>
+          <a:xfrm>
+            <a:off x="475488" y="2670048"/>
+            <a:ext cx="8193024" cy="457200"/>
+          </a:xfrm>
+          <a:prstGeom prst="rect">
+            <a:avLst/>
+          </a:prstGeom>
+          <a:noFill/>
+          <a:ln/>
+        </p:spPr>
+        <p:txBody>
+          <a:bodyPr wrap="square" lIns="0" tIns="0" rIns="0" bIns="0" rtlCol="0" anchor="t"/>
+          <a:lstStyle/>
+          <a:p>
+            <a:pPr algn="l" indent="0" marL="0">
+              <a:lnSpc>
+                <a:spcPct val="120000"/>
+              </a:lnSpc>
+              <a:buNone/>
+            </a:pPr>
+            <a:r>
+              <a:rPr lang="en-US" sz="1700" b="1" dirty="0">
+                <a:solidFill>
+                  <a:srgbClr val="595959"/>
+                </a:solidFill>
+                <a:latin typeface="メイリオ" pitchFamily="34" charset="0"/>
+                <a:ea typeface="メイリオ" pitchFamily="34" charset="-122"/>
+                <a:cs typeface="メイリオ" pitchFamily="34" charset="-120"/>
+              </a:rPr>
+              <a:t>子どもが学習を調整するように、教師も授業を調整する。</a:t>
+            </a:r>
+            <a:endParaRPr lang="en-US" sz="1700" dirty="0"/>
+          </a:p>
+        </p:txBody>
+      </p:sp>
+      <p:sp>
+        <p:nvSpPr>
+          <p:cNvPr id="7" name="Shape 5"/>
+          <p:cNvSpPr/>
+          <p:nvPr/>
+        </p:nvSpPr>
+        <p:spPr>
+          <a:xfrm>
+            <a:off x="320040" y="3182112"/>
+            <a:ext cx="2011680" cy="530352"/>
+          </a:xfrm>
+          <a:prstGeom prst="roundRect">
+            <a:avLst>
+              <a:gd name="adj" fmla="val 12069"/>
+            </a:avLst>
+          </a:prstGeom>
+          <a:solidFill>
+            <a:srgbClr val="E9F7F3"/>
+          </a:solidFill>
+          <a:ln w="12700">
+            <a:solidFill>
+              <a:srgbClr val="B9E5DA"/>
+            </a:solidFill>
+            <a:prstDash val="solid"/>
+          </a:ln>
+        </p:spPr>
+      </p:sp>
+      <p:sp>
+        <p:nvSpPr>
+          <p:cNvPr id="8" name="Text 6"/>
+          <p:cNvSpPr txBox="1"/>
+          <p:nvPr/>
+        </p:nvSpPr>
+        <p:spPr>
+          <a:xfrm>
+            <a:off x="320040" y="3182112"/>
+            <a:ext cx="2011680" cy="530352"/>
+          </a:xfrm>
+          <a:prstGeom prst="rect">
+            <a:avLst/>
+          </a:prstGeom>
+          <a:noFill/>
+          <a:ln/>
+        </p:spPr>
+        <p:txBody>
+          <a:bodyPr wrap="square" lIns="0" tIns="0" rIns="0" bIns="0" rtlCol="0" anchor="ctr"/>
+          <a:lstStyle/>
+          <a:p>
+            <a:pPr algn="ctr" indent="0" marL="0">
+              <a:lnSpc>
+                <a:spcPct val="115000"/>
+              </a:lnSpc>
+              <a:buNone/>
+            </a:pPr>
+            <a:r>
+              <a:rPr lang="en-US" sz="1300" b="1" dirty="0">
+                <a:solidFill>
+                  <a:srgbClr val="595959"/>
+                </a:solidFill>
+                <a:latin typeface="メイリオ" pitchFamily="34" charset="0"/>
+                <a:ea typeface="メイリオ" pitchFamily="34" charset="-122"/>
+                <a:cs typeface="メイリオ" pitchFamily="34" charset="-120"/>
+              </a:rPr>
+              <a:t>手だてを決める</a:t>
+            </a:r>
+            <a:endParaRPr lang="en-US" sz="1300" dirty="0"/>
+          </a:p>
+        </p:txBody>
+      </p:sp>
+      <p:sp>
+        <p:nvSpPr>
+          <p:cNvPr id="9" name="Text 7"/>
+          <p:cNvSpPr txBox="1"/>
+          <p:nvPr/>
+        </p:nvSpPr>
+        <p:spPr>
+          <a:xfrm>
+            <a:off x="2331720" y="3182112"/>
+            <a:ext cx="182880" cy="530352"/>
+          </a:xfrm>
+          <a:prstGeom prst="rect">
+            <a:avLst/>
+          </a:prstGeom>
+          <a:noFill/>
+          <a:ln/>
+        </p:spPr>
+        <p:txBody>
+          <a:bodyPr wrap="square" lIns="0" tIns="0" rIns="0" bIns="0" rtlCol="0" anchor="ctr"/>
+          <a:lstStyle/>
+          <a:p>
+            <a:pPr algn="ctr" indent="0" marL="0">
+              <a:buNone/>
+            </a:pPr>
+            <a:r>
+              <a:rPr lang="en-US" sz="1400" b="1" dirty="0">
+                <a:solidFill>
+                  <a:srgbClr val="808080"/>
+                </a:solidFill>
+                <a:latin typeface="メイリオ" pitchFamily="34" charset="0"/>
+                <a:ea typeface="メイリオ" pitchFamily="34" charset="-122"/>
+                <a:cs typeface="メイリオ" pitchFamily="34" charset="-120"/>
+              </a:rPr>
+              <a:t>→</a:t>
+            </a:r>
+            <a:endParaRPr lang="en-US" sz="1400" dirty="0"/>
+          </a:p>
+        </p:txBody>
+      </p:sp>
+      <p:sp>
+        <p:nvSpPr>
+          <p:cNvPr id="10" name="Shape 8"/>
+          <p:cNvSpPr/>
+          <p:nvPr/>
+        </p:nvSpPr>
+        <p:spPr>
+          <a:xfrm>
+            <a:off x="2514600" y="3182112"/>
+            <a:ext cx="2011680" cy="530352"/>
+          </a:xfrm>
+          <a:prstGeom prst="roundRect">
+            <a:avLst>
+              <a:gd name="adj" fmla="val 12069"/>
+            </a:avLst>
+          </a:prstGeom>
+          <a:solidFill>
+            <a:srgbClr val="E9F7F3"/>
+          </a:solidFill>
+          <a:ln w="12700">
+            <a:solidFill>
+              <a:srgbClr val="B9E5DA"/>
+            </a:solidFill>
+            <a:prstDash val="solid"/>
+          </a:ln>
+        </p:spPr>
+      </p:sp>
+      <p:sp>
+        <p:nvSpPr>
+          <p:cNvPr id="11" name="Text 9"/>
+          <p:cNvSpPr txBox="1"/>
+          <p:nvPr/>
+        </p:nvSpPr>
+        <p:spPr>
+          <a:xfrm>
+            <a:off x="2514600" y="3182112"/>
+            <a:ext cx="2011680" cy="530352"/>
+          </a:xfrm>
+          <a:prstGeom prst="rect">
+            <a:avLst/>
+          </a:prstGeom>
+          <a:noFill/>
+          <a:ln/>
+        </p:spPr>
+        <p:txBody>
+          <a:bodyPr wrap="square" lIns="0" tIns="0" rIns="0" bIns="0" rtlCol="0" anchor="ctr"/>
+          <a:lstStyle/>
+          <a:p>
+            <a:pPr algn="ctr" indent="0" marL="0">
+              <a:lnSpc>
+                <a:spcPct val="115000"/>
+              </a:lnSpc>
+              <a:buNone/>
+            </a:pPr>
+            <a:r>
+              <a:rPr lang="en-US" sz="1300" b="1" dirty="0">
+                <a:solidFill>
+                  <a:srgbClr val="595959"/>
+                </a:solidFill>
+                <a:latin typeface="メイリオ" pitchFamily="34" charset="0"/>
+                <a:ea typeface="メイリオ" pitchFamily="34" charset="-122"/>
+                <a:cs typeface="メイリオ" pitchFamily="34" charset="-120"/>
+              </a:rPr>
+              <a:t>授業で試す</a:t>
+            </a:r>
+            <a:endParaRPr lang="en-US" sz="1300" dirty="0"/>
+          </a:p>
+        </p:txBody>
+      </p:sp>
+      <p:sp>
+        <p:nvSpPr>
+          <p:cNvPr id="12" name="Text 10"/>
+          <p:cNvSpPr txBox="1"/>
+          <p:nvPr/>
+        </p:nvSpPr>
+        <p:spPr>
+          <a:xfrm>
+            <a:off x="4526280" y="3182112"/>
+            <a:ext cx="182880" cy="530352"/>
+          </a:xfrm>
+          <a:prstGeom prst="rect">
+            <a:avLst/>
+          </a:prstGeom>
+          <a:noFill/>
+          <a:ln/>
+        </p:spPr>
+        <p:txBody>
+          <a:bodyPr wrap="square" lIns="0" tIns="0" rIns="0" bIns="0" rtlCol="0" anchor="ctr"/>
+          <a:lstStyle/>
+          <a:p>
+            <a:pPr algn="ctr" indent="0" marL="0">
+              <a:buNone/>
+            </a:pPr>
+            <a:r>
+              <a:rPr lang="en-US" sz="1400" b="1" dirty="0">
+                <a:solidFill>
+                  <a:srgbClr val="808080"/>
+                </a:solidFill>
+                <a:latin typeface="メイリオ" pitchFamily="34" charset="0"/>
+                <a:ea typeface="メイリオ" pitchFamily="34" charset="-122"/>
+                <a:cs typeface="メイリオ" pitchFamily="34" charset="-120"/>
+              </a:rPr>
+              <a:t>→</a:t>
+            </a:r>
+            <a:endParaRPr lang="en-US" sz="1400" dirty="0"/>
+          </a:p>
+        </p:txBody>
+      </p:sp>
+      <p:sp>
+        <p:nvSpPr>
+          <p:cNvPr id="13" name="Shape 11"/>
+          <p:cNvSpPr/>
+          <p:nvPr/>
+        </p:nvSpPr>
+        <p:spPr>
+          <a:xfrm>
+            <a:off x="4709160" y="3182112"/>
+            <a:ext cx="2011680" cy="530352"/>
+          </a:xfrm>
+          <a:prstGeom prst="roundRect">
+            <a:avLst>
+              <a:gd name="adj" fmla="val 12069"/>
+            </a:avLst>
+          </a:prstGeom>
+          <a:solidFill>
+            <a:srgbClr val="E9F7F3"/>
+          </a:solidFill>
+          <a:ln w="12700">
+            <a:solidFill>
+              <a:srgbClr val="B9E5DA"/>
+            </a:solidFill>
+            <a:prstDash val="solid"/>
+          </a:ln>
+        </p:spPr>
+      </p:sp>
+      <p:sp>
+        <p:nvSpPr>
+          <p:cNvPr id="14" name="Text 12"/>
+          <p:cNvSpPr txBox="1"/>
+          <p:nvPr/>
+        </p:nvSpPr>
+        <p:spPr>
+          <a:xfrm>
+            <a:off x="4709160" y="3182112"/>
+            <a:ext cx="2011680" cy="530352"/>
+          </a:xfrm>
+          <a:prstGeom prst="rect">
+            <a:avLst/>
+          </a:prstGeom>
+          <a:noFill/>
+          <a:ln/>
+        </p:spPr>
+        <p:txBody>
+          <a:bodyPr wrap="square" lIns="0" tIns="0" rIns="0" bIns="0" rtlCol="0" anchor="ctr"/>
+          <a:lstStyle/>
+          <a:p>
+            <a:pPr algn="ctr" indent="0" marL="0">
+              <a:lnSpc>
+                <a:spcPct val="115000"/>
+              </a:lnSpc>
+              <a:buNone/>
+            </a:pPr>
+            <a:r>
+              <a:rPr lang="en-US" sz="1300" b="1" dirty="0">
+                <a:solidFill>
+                  <a:srgbClr val="595959"/>
+                </a:solidFill>
+                <a:latin typeface="メイリオ" pitchFamily="34" charset="0"/>
+                <a:ea typeface="メイリオ" pitchFamily="34" charset="-122"/>
+                <a:cs typeface="メイリオ" pitchFamily="34" charset="-120"/>
+              </a:rPr>
+              <a:t>子どもの姿を見る</a:t>
+            </a:r>
+            <a:endParaRPr lang="en-US" sz="1300" dirty="0"/>
+          </a:p>
+        </p:txBody>
+      </p:sp>
+      <p:sp>
+        <p:nvSpPr>
+          <p:cNvPr id="15" name="Text 13"/>
+          <p:cNvSpPr txBox="1"/>
+          <p:nvPr/>
+        </p:nvSpPr>
+        <p:spPr>
+          <a:xfrm>
+            <a:off x="6720840" y="3182112"/>
+            <a:ext cx="182880" cy="530352"/>
+          </a:xfrm>
+          <a:prstGeom prst="rect">
+            <a:avLst/>
+          </a:prstGeom>
+          <a:noFill/>
+          <a:ln/>
+        </p:spPr>
+        <p:txBody>
+          <a:bodyPr wrap="square" lIns="0" tIns="0" rIns="0" bIns="0" rtlCol="0" anchor="ctr"/>
+          <a:lstStyle/>
+          <a:p>
+            <a:pPr algn="ctr" indent="0" marL="0">
+              <a:buNone/>
+            </a:pPr>
+            <a:r>
+              <a:rPr lang="en-US" sz="1400" b="1" dirty="0">
+                <a:solidFill>
+                  <a:srgbClr val="808080"/>
+                </a:solidFill>
+                <a:latin typeface="メイリオ" pitchFamily="34" charset="0"/>
+                <a:ea typeface="メイリオ" pitchFamily="34" charset="-122"/>
+                <a:cs typeface="メイリオ" pitchFamily="34" charset="-120"/>
+              </a:rPr>
+              <a:t>→</a:t>
+            </a:r>
+            <a:endParaRPr lang="en-US" sz="1400" dirty="0"/>
+          </a:p>
+        </p:txBody>
+      </p:sp>
+      <p:sp>
+        <p:nvSpPr>
+          <p:cNvPr id="16" name="Shape 14"/>
+          <p:cNvSpPr/>
+          <p:nvPr/>
+        </p:nvSpPr>
+        <p:spPr>
+          <a:xfrm>
+            <a:off x="6903720" y="3182112"/>
+            <a:ext cx="2011680" cy="530352"/>
+          </a:xfrm>
+          <a:prstGeom prst="roundRect">
+            <a:avLst>
+              <a:gd name="adj" fmla="val 12069"/>
+            </a:avLst>
+          </a:prstGeom>
+          <a:solidFill>
+            <a:srgbClr val="E9F7F3"/>
+          </a:solidFill>
+          <a:ln w="12700">
+            <a:solidFill>
+              <a:srgbClr val="B9E5DA"/>
+            </a:solidFill>
+            <a:prstDash val="solid"/>
+          </a:ln>
+        </p:spPr>
+      </p:sp>
+      <p:sp>
+        <p:nvSpPr>
+          <p:cNvPr id="17" name="Text 15"/>
+          <p:cNvSpPr txBox="1"/>
+          <p:nvPr/>
+        </p:nvSpPr>
+        <p:spPr>
+          <a:xfrm>
+            <a:off x="6903720" y="3182112"/>
+            <a:ext cx="2011680" cy="530352"/>
+          </a:xfrm>
+          <a:prstGeom prst="rect">
+            <a:avLst/>
+          </a:prstGeom>
+          <a:noFill/>
+          <a:ln/>
+        </p:spPr>
+        <p:txBody>
+          <a:bodyPr wrap="square" lIns="0" tIns="0" rIns="0" bIns="0" rtlCol="0" anchor="ctr"/>
+          <a:lstStyle/>
+          <a:p>
+            <a:pPr algn="ctr" indent="0" marL="0">
+              <a:lnSpc>
+                <a:spcPct val="115000"/>
+              </a:lnSpc>
+              <a:buNone/>
+            </a:pPr>
+            <a:r>
+              <a:rPr lang="en-US" sz="1300" b="1" dirty="0">
+                <a:solidFill>
+                  <a:srgbClr val="595959"/>
+                </a:solidFill>
+                <a:latin typeface="メイリオ" pitchFamily="34" charset="0"/>
+                <a:ea typeface="メイリオ" pitchFamily="34" charset="-122"/>
+                <a:cs typeface="メイリオ" pitchFamily="34" charset="-120"/>
+              </a:rPr>
+              <a:t>次の授業に生かす</a:t>
+            </a:r>
+            <a:endParaRPr lang="en-US" sz="1300" dirty="0"/>
+          </a:p>
+        </p:txBody>
+      </p:sp>
+      <p:sp>
+        <p:nvSpPr>
+          <p:cNvPr id="18" name="Text 16"/>
+          <p:cNvSpPr txBox="1"/>
+          <p:nvPr/>
+        </p:nvSpPr>
+        <p:spPr>
+          <a:xfrm>
+            <a:off x="475488" y="3950208"/>
+            <a:ext cx="8193024" cy="822960"/>
+          </a:xfrm>
+          <a:prstGeom prst="rect">
+            <a:avLst/>
+          </a:prstGeom>
+          <a:noFill/>
+          <a:ln/>
+        </p:spPr>
+        <p:txBody>
+          <a:bodyPr wrap="square" lIns="0" tIns="0" rIns="0" bIns="0" rtlCol="0" anchor="t"/>
+          <a:lstStyle/>
+          <a:p>
+            <a:pPr algn="l" indent="0" marL="0">
+              <a:lnSpc>
+                <a:spcPct val="120000"/>
+              </a:lnSpc>
+              <a:buNone/>
+            </a:pPr>
+            <a:r>
+              <a:rPr lang="en-US" sz="1700" b="1" dirty="0">
+                <a:solidFill>
+                  <a:srgbClr val="595959"/>
+                </a:solidFill>
+                <a:latin typeface="メイリオ" pitchFamily="34" charset="0"/>
+                <a:ea typeface="メイリオ" pitchFamily="34" charset="-122"/>
+                <a:cs typeface="メイリオ" pitchFamily="34" charset="-120"/>
+              </a:rPr>
+              <a:t>子どもの自己調整と、教師の授業改善。</a:t>
+            </a:r>
+            <a:endParaRPr lang="en-US" sz="1700" dirty="0"/>
+          </a:p>
+          <a:p>
+            <a:pPr algn="l" indent="0" marL="0">
+              <a:lnSpc>
+                <a:spcPct val="120000"/>
+              </a:lnSpc>
+              <a:buNone/>
+            </a:pPr>
+            <a:r>
+              <a:rPr lang="en-US" sz="1700" b="1" dirty="0">
+                <a:solidFill>
+                  <a:srgbClr val="595959"/>
+                </a:solidFill>
+                <a:latin typeface="メイリオ" pitchFamily="34" charset="0"/>
+                <a:ea typeface="メイリオ" pitchFamily="34" charset="-122"/>
+                <a:cs typeface="メイリオ" pitchFamily="34" charset="-120"/>
+              </a:rPr>
+              <a:t>この</a:t>
+            </a:r>
+            <a:pPr algn="l" indent="0" marL="0">
+              <a:lnSpc>
+                <a:spcPct val="120000"/>
+              </a:lnSpc>
+              <a:buNone/>
+            </a:pPr>
+            <a:r>
+              <a:rPr lang="en-US" sz="1700" b="1" dirty="0">
+                <a:solidFill>
+                  <a:srgbClr val="EE7B08"/>
+                </a:solidFill>
+                <a:latin typeface="メイリオ" pitchFamily="34" charset="0"/>
+                <a:ea typeface="メイリオ" pitchFamily="34" charset="-122"/>
+                <a:cs typeface="メイリオ" pitchFamily="34" charset="-120"/>
+              </a:rPr>
+              <a:t>往還</a:t>
+            </a:r>
+            <a:pPr algn="l" indent="0" marL="0">
+              <a:lnSpc>
+                <a:spcPct val="120000"/>
+              </a:lnSpc>
+              <a:buNone/>
+            </a:pPr>
+            <a:r>
+              <a:rPr lang="en-US" sz="1700" b="1" dirty="0">
+                <a:solidFill>
+                  <a:srgbClr val="595959"/>
+                </a:solidFill>
+                <a:latin typeface="メイリオ" pitchFamily="34" charset="0"/>
+                <a:ea typeface="メイリオ" pitchFamily="34" charset="-122"/>
+                <a:cs typeface="メイリオ" pitchFamily="34" charset="-120"/>
+              </a:rPr>
+              <a:t>が、９年間の学びを支えていく。</a:t>
+            </a:r>
+            <a:endParaRPr lang="en-US" sz="1700" dirty="0"/>
+          </a:p>
+        </p:txBody>
+      </p:sp>
+    </p:spTree>
+  </p:cSld>
+  <p:clrMapOvr>
+    <a:masterClrMapping/>
+  </p:clrMapOvr>
+</p:sld>
+</file>
+
+<file path=ppt/slides/slide15.xml><?xml version="1.0" encoding="utf-8"?>
+<p:sld xmlns:a="http://schemas.openxmlformats.org/drawingml/2006/main" xmlns:r="http://schemas.openxmlformats.org/officeDocument/2006/relationships" xmlns:p="http://schemas.openxmlformats.org/presentationml/2006/main">
+  <p:cSld name="Slide 15">
+    <p:spTree>
+      <p:nvGrpSpPr>
+        <p:cNvPr id="1" name=""/>
+        <p:cNvGrpSpPr/>
+        <p:nvPr/>
+      </p:nvGrpSpPr>
+      <p:grpSpPr>
+        <a:xfrm>
+          <a:off x="0" y="0"/>
+          <a:ext cx="0" cy="0"/>
+          <a:chOff x="0" y="0"/>
+          <a:chExt cx="0" cy="0"/>
+        </a:xfrm>
+      </p:grpSpPr>
+      <p:sp>
+        <p:nvSpPr>
+          <p:cNvPr id="2" name="Text 0"/>
+          <p:cNvSpPr txBox="1"/>
+          <p:nvPr/>
+        </p:nvSpPr>
+        <p:spPr>
+          <a:xfrm>
+            <a:off x="0" y="-9144"/>
+            <a:ext cx="9144000" cy="612648"/>
+          </a:xfrm>
+          <a:prstGeom prst="rect">
+            <a:avLst/>
           </a:prstGeom>
           <a:solidFill>
             <a:srgbClr val="44C1A3"/>
           </a:solidFill>
           <a:ln/>
         </p:spPr>
-      </p:sp>
-      <p:sp>
-        <p:nvSpPr>
-          <p:cNvPr id="9" name="Text 7"/>
-          <p:cNvSpPr txBox="1"/>
-          <p:nvPr/>
-        </p:nvSpPr>
-        <p:spPr>
-          <a:xfrm>
-            <a:off x="3218688" y="3218688"/>
-            <a:ext cx="2468880" cy="566928"/>
-          </a:xfrm>
-          <a:prstGeom prst="rect">
-            <a:avLst/>
-          </a:prstGeom>
-          <a:noFill/>
-          <a:ln/>
-        </p:spPr>
-        <p:txBody>
-          <a:bodyPr wrap="square" lIns="0" tIns="0" rIns="0" bIns="0" rtlCol="0" anchor="ctr"/>
-          <a:lstStyle/>
-          <a:p>
-            <a:pPr algn="ctr" indent="0" marL="0">
-              <a:lnSpc>
-                <a:spcPct val="115000"/>
-              </a:lnSpc>
-              <a:buNone/>
-            </a:pPr>
-            <a:r>
-              <a:rPr lang="en-US" sz="1500" b="1" dirty="0">
+        <p:txBody>
+          <a:bodyPr wrap="square" lIns="0" tIns="0" rIns="0" bIns="0" rtlCol="0" anchor="ctr"/>
+          <a:lstStyle/>
+          <a:p>
+            <a:pPr algn="l" indent="0" marL="0">
+              <a:lnSpc>
+                <a:spcPct val="120000"/>
+              </a:lnSpc>
+              <a:buNone/>
+            </a:pPr>
+            <a:r>
+              <a:rPr lang="en-US" sz="3000" b="1" dirty="0">
                 <a:solidFill>
                   <a:srgbClr val="FFFFFF"/>
                 </a:solidFill>
@@ -5214,26 +6628,182 @@
                 <a:ea typeface="メイリオ" pitchFamily="34" charset="-122"/>
                 <a:cs typeface="メイリオ" pitchFamily="34" charset="-120"/>
               </a:rPr>
-              <a:t>Ⅱ　違いに応じる</a:t>
-            </a:r>
-            <a:endParaRPr lang="en-US" sz="1500" dirty="0"/>
-          </a:p>
-        </p:txBody>
-      </p:sp>
-      <p:sp>
-        <p:nvSpPr>
-          <p:cNvPr id="10" name="Shape 8"/>
+              <a:t>　まとめ</a:t>
+            </a:r>
+            <a:endParaRPr lang="en-US" sz="3000" dirty="0"/>
+          </a:p>
+        </p:txBody>
+      </p:sp>
+      <p:sp>
+        <p:nvSpPr>
+          <p:cNvPr id="3" name="Shape 1"/>
           <p:cNvSpPr/>
           <p:nvPr/>
         </p:nvSpPr>
         <p:spPr>
           <a:xfrm>
-            <a:off x="5961888" y="3218688"/>
-            <a:ext cx="2468880" cy="566928"/>
+            <a:off x="475488" y="960120"/>
+            <a:ext cx="8193024" cy="1051560"/>
           </a:xfrm>
           <a:prstGeom prst="roundRect">
             <a:avLst>
-              <a:gd name="adj" fmla="val 11290"/>
+              <a:gd name="adj" fmla="val 5217"/>
+            </a:avLst>
+          </a:prstGeom>
+          <a:solidFill>
+            <a:srgbClr val="E9F7F3"/>
+          </a:solidFill>
+          <a:ln w="12700">
+            <a:solidFill>
+              <a:srgbClr val="B9E5DA"/>
+            </a:solidFill>
+            <a:prstDash val="solid"/>
+          </a:ln>
+        </p:spPr>
+      </p:sp>
+      <p:sp>
+        <p:nvSpPr>
+          <p:cNvPr id="4" name="Text 2"/>
+          <p:cNvSpPr txBox="1"/>
+          <p:nvPr/>
+        </p:nvSpPr>
+        <p:spPr>
+          <a:xfrm>
+            <a:off x="731520" y="960120"/>
+            <a:ext cx="7680960" cy="1051560"/>
+          </a:xfrm>
+          <a:prstGeom prst="rect">
+            <a:avLst/>
+          </a:prstGeom>
+          <a:noFill/>
+          <a:ln/>
+        </p:spPr>
+        <p:txBody>
+          <a:bodyPr wrap="square" lIns="0" tIns="0" rIns="0" bIns="0" rtlCol="0" anchor="ctr"/>
+          <a:lstStyle/>
+          <a:p>
+            <a:pPr algn="l" indent="0" marL="0">
+              <a:buNone/>
+            </a:pPr>
+            <a:r>
+              <a:rPr lang="en-US" sz="2600" b="1" dirty="0">
+                <a:solidFill>
+                  <a:srgbClr val="EE7B08"/>
+                </a:solidFill>
+                <a:latin typeface="メイリオ" pitchFamily="34" charset="0"/>
+                <a:ea typeface="メイリオ" pitchFamily="34" charset="-122"/>
+                <a:cs typeface="メイリオ" pitchFamily="34" charset="-120"/>
+              </a:rPr>
+              <a:t>「違い」を生かす授業</a:t>
+            </a:r>
+            <a:pPr algn="l" indent="0" marL="0">
+              <a:buNone/>
+            </a:pPr>
+            <a:r>
+              <a:rPr lang="en-US" sz="2600" b="1" dirty="0">
+                <a:solidFill>
+                  <a:srgbClr val="595959"/>
+                </a:solidFill>
+                <a:latin typeface="メイリオ" pitchFamily="34" charset="0"/>
+                <a:ea typeface="メイリオ" pitchFamily="34" charset="-122"/>
+                <a:cs typeface="メイリオ" pitchFamily="34" charset="-120"/>
+              </a:rPr>
+              <a:t>が、９年間の学びをつなぐ。</a:t>
+            </a:r>
+            <a:endParaRPr lang="en-US" sz="2600" dirty="0"/>
+          </a:p>
+        </p:txBody>
+      </p:sp>
+      <p:sp>
+        <p:nvSpPr>
+          <p:cNvPr id="5" name="Text 3"/>
+          <p:cNvSpPr txBox="1"/>
+          <p:nvPr/>
+        </p:nvSpPr>
+        <p:spPr>
+          <a:xfrm>
+            <a:off x="475488" y="2194560"/>
+            <a:ext cx="8193024" cy="457200"/>
+          </a:xfrm>
+          <a:prstGeom prst="rect">
+            <a:avLst/>
+          </a:prstGeom>
+          <a:noFill/>
+          <a:ln/>
+        </p:spPr>
+        <p:txBody>
+          <a:bodyPr wrap="square" lIns="0" tIns="0" rIns="0" bIns="0" rtlCol="0" anchor="t"/>
+          <a:lstStyle/>
+          <a:p>
+            <a:pPr algn="l" indent="0" marL="0">
+              <a:lnSpc>
+                <a:spcPct val="120000"/>
+              </a:lnSpc>
+              <a:buNone/>
+            </a:pPr>
+            <a:r>
+              <a:rPr lang="en-US" sz="1700" b="1" dirty="0">
+                <a:solidFill>
+                  <a:srgbClr val="595959"/>
+                </a:solidFill>
+                <a:latin typeface="メイリオ" pitchFamily="34" charset="0"/>
+                <a:ea typeface="メイリオ" pitchFamily="34" charset="-122"/>
+                <a:cs typeface="メイリオ" pitchFamily="34" charset="-120"/>
+              </a:rPr>
+              <a:t>３人とも、一人一人の差を</a:t>
+            </a:r>
+            <a:pPr algn="l" indent="0" marL="0">
+              <a:lnSpc>
+                <a:spcPct val="120000"/>
+              </a:lnSpc>
+              <a:buNone/>
+            </a:pPr>
+            <a:r>
+              <a:rPr lang="en-US" sz="1700" b="1" dirty="0">
+                <a:solidFill>
+                  <a:srgbClr val="EE7B08"/>
+                </a:solidFill>
+                <a:latin typeface="メイリオ" pitchFamily="34" charset="0"/>
+                <a:ea typeface="メイリオ" pitchFamily="34" charset="-122"/>
+                <a:cs typeface="メイリオ" pitchFamily="34" charset="-120"/>
+              </a:rPr>
+              <a:t>学びの出発点</a:t>
+            </a:r>
+            <a:pPr algn="l" indent="0" marL="0">
+              <a:lnSpc>
+                <a:spcPct val="120000"/>
+              </a:lnSpc>
+              <a:buNone/>
+            </a:pPr>
+            <a:r>
+              <a:rPr lang="en-US" sz="1700" b="1" dirty="0">
+                <a:solidFill>
+                  <a:srgbClr val="595959"/>
+                </a:solidFill>
+                <a:latin typeface="メイリオ" pitchFamily="34" charset="0"/>
+                <a:ea typeface="メイリオ" pitchFamily="34" charset="-122"/>
+                <a:cs typeface="メイリオ" pitchFamily="34" charset="-120"/>
+              </a:rPr>
+              <a:t>にしていた。</a:t>
+            </a:r>
+            <a:endParaRPr lang="en-US" sz="1700" dirty="0"/>
+          </a:p>
+        </p:txBody>
+      </p:sp>
+      <p:sp>
+        <p:nvSpPr>
+          <p:cNvPr id="6" name="Shape 4"/>
+          <p:cNvSpPr/>
+          <p:nvPr/>
+        </p:nvSpPr>
+        <p:spPr>
+          <a:xfrm>
+            <a:off x="475488" y="2706624"/>
+            <a:ext cx="2468880" cy="512064"/>
+          </a:xfrm>
+          <a:prstGeom prst="roundRect">
+            <a:avLst>
+              <a:gd name="adj" fmla="val 12500"/>
             </a:avLst>
           </a:prstGeom>
           <a:solidFill>
@@ -5244,14 +6814,142 @@
       </p:sp>
       <p:sp>
         <p:nvSpPr>
+          <p:cNvPr id="7" name="Text 5"/>
+          <p:cNvSpPr txBox="1"/>
+          <p:nvPr/>
+        </p:nvSpPr>
+        <p:spPr>
+          <a:xfrm>
+            <a:off x="475488" y="2706624"/>
+            <a:ext cx="2468880" cy="512064"/>
+          </a:xfrm>
+          <a:prstGeom prst="rect">
+            <a:avLst/>
+          </a:prstGeom>
+          <a:noFill/>
+          <a:ln/>
+        </p:spPr>
+        <p:txBody>
+          <a:bodyPr wrap="square" lIns="0" tIns="0" rIns="0" bIns="0" rtlCol="0" anchor="ctr"/>
+          <a:lstStyle/>
+          <a:p>
+            <a:pPr algn="ctr" indent="0" marL="0">
+              <a:lnSpc>
+                <a:spcPct val="115000"/>
+              </a:lnSpc>
+              <a:buNone/>
+            </a:pPr>
+            <a:r>
+              <a:rPr lang="en-US" sz="1400" b="1" dirty="0">
+                <a:solidFill>
+                  <a:srgbClr val="FFFFFF"/>
+                </a:solidFill>
+                <a:latin typeface="メイリオ" pitchFamily="34" charset="0"/>
+                <a:ea typeface="メイリオ" pitchFamily="34" charset="-122"/>
+                <a:cs typeface="メイリオ" pitchFamily="34" charset="-120"/>
+              </a:rPr>
+              <a:t>Ⅰ　見通し</a:t>
+            </a:r>
+            <a:endParaRPr lang="en-US" sz="1400" dirty="0"/>
+          </a:p>
+        </p:txBody>
+      </p:sp>
+      <p:sp>
+        <p:nvSpPr>
+          <p:cNvPr id="8" name="Shape 6"/>
+          <p:cNvSpPr/>
+          <p:nvPr/>
+        </p:nvSpPr>
+        <p:spPr>
+          <a:xfrm>
+            <a:off x="3218688" y="2706624"/>
+            <a:ext cx="2468880" cy="512064"/>
+          </a:xfrm>
+          <a:prstGeom prst="roundRect">
+            <a:avLst>
+              <a:gd name="adj" fmla="val 12500"/>
+            </a:avLst>
+          </a:prstGeom>
+          <a:solidFill>
+            <a:srgbClr val="44C1A3"/>
+          </a:solidFill>
+          <a:ln/>
+        </p:spPr>
+      </p:sp>
+      <p:sp>
+        <p:nvSpPr>
+          <p:cNvPr id="9" name="Text 7"/>
+          <p:cNvSpPr txBox="1"/>
+          <p:nvPr/>
+        </p:nvSpPr>
+        <p:spPr>
+          <a:xfrm>
+            <a:off x="3218688" y="2706624"/>
+            <a:ext cx="2468880" cy="512064"/>
+          </a:xfrm>
+          <a:prstGeom prst="rect">
+            <a:avLst/>
+          </a:prstGeom>
+          <a:noFill/>
+          <a:ln/>
+        </p:spPr>
+        <p:txBody>
+          <a:bodyPr wrap="square" lIns="0" tIns="0" rIns="0" bIns="0" rtlCol="0" anchor="ctr"/>
+          <a:lstStyle/>
+          <a:p>
+            <a:pPr algn="ctr" indent="0" marL="0">
+              <a:lnSpc>
+                <a:spcPct val="115000"/>
+              </a:lnSpc>
+              <a:buNone/>
+            </a:pPr>
+            <a:r>
+              <a:rPr lang="en-US" sz="1400" b="1" dirty="0">
+                <a:solidFill>
+                  <a:srgbClr val="FFFFFF"/>
+                </a:solidFill>
+                <a:latin typeface="メイリオ" pitchFamily="34" charset="0"/>
+                <a:ea typeface="メイリオ" pitchFamily="34" charset="-122"/>
+                <a:cs typeface="メイリオ" pitchFamily="34" charset="-120"/>
+              </a:rPr>
+              <a:t>Ⅱ　違いに応じる</a:t>
+            </a:r>
+            <a:endParaRPr lang="en-US" sz="1400" dirty="0"/>
+          </a:p>
+        </p:txBody>
+      </p:sp>
+      <p:sp>
+        <p:nvSpPr>
+          <p:cNvPr id="10" name="Shape 8"/>
+          <p:cNvSpPr/>
+          <p:nvPr/>
+        </p:nvSpPr>
+        <p:spPr>
+          <a:xfrm>
+            <a:off x="5961888" y="2706624"/>
+            <a:ext cx="2468880" cy="512064"/>
+          </a:xfrm>
+          <a:prstGeom prst="roundRect">
+            <a:avLst>
+              <a:gd name="adj" fmla="val 12500"/>
+            </a:avLst>
+          </a:prstGeom>
+          <a:solidFill>
+            <a:srgbClr val="44C1A3"/>
+          </a:solidFill>
+          <a:ln/>
+        </p:spPr>
+      </p:sp>
+      <p:sp>
+        <p:nvSpPr>
           <p:cNvPr id="11" name="Text 9"/>
           <p:cNvSpPr txBox="1"/>
           <p:nvPr/>
         </p:nvSpPr>
         <p:spPr>
           <a:xfrm>
-            <a:off x="5961888" y="3218688"/>
-            <a:ext cx="2468880" cy="566928"/>
+            <a:off x="5961888" y="2706624"/>
+            <a:ext cx="2468880" cy="512064"/>
           </a:xfrm>
           <a:prstGeom prst="rect">
             <a:avLst/>
@@ -5270,15 +6968,123 @@
               <a:buNone/>
             </a:pPr>
             <a:r>
+              <a:rPr lang="en-US" sz="1400" b="1" dirty="0">
+                <a:solidFill>
+                  <a:srgbClr val="FFFFFF"/>
+                </a:solidFill>
+                <a:latin typeface="メイリオ" pitchFamily="34" charset="0"/>
+                <a:ea typeface="メイリオ" pitchFamily="34" charset="-122"/>
+                <a:cs typeface="メイリオ" pitchFamily="34" charset="-120"/>
+              </a:rPr>
+              <a:t>Ⅲ　対話</a:t>
+            </a:r>
+            <a:endParaRPr lang="en-US" sz="1400" dirty="0"/>
+          </a:p>
+        </p:txBody>
+      </p:sp>
+      <p:sp>
+        <p:nvSpPr>
+          <p:cNvPr id="12" name="Text 10"/>
+          <p:cNvSpPr txBox="1"/>
+          <p:nvPr/>
+        </p:nvSpPr>
+        <p:spPr>
+          <a:xfrm>
+            <a:off x="475488" y="3273552"/>
+            <a:ext cx="8193024" cy="274320"/>
+          </a:xfrm>
+          <a:prstGeom prst="rect">
+            <a:avLst/>
+          </a:prstGeom>
+          <a:noFill/>
+          <a:ln/>
+        </p:spPr>
+        <p:txBody>
+          <a:bodyPr wrap="square" lIns="0" tIns="0" rIns="0" bIns="0" rtlCol="0" anchor="ctr"/>
+          <a:lstStyle/>
+          <a:p>
+            <a:pPr algn="ctr" indent="0" marL="0">
+              <a:buNone/>
+            </a:pPr>
+            <a:r>
+              <a:rPr lang="en-US" sz="1200" b="1" dirty="0">
+                <a:solidFill>
+                  <a:srgbClr val="808080"/>
+                </a:solidFill>
+                <a:latin typeface="メイリオ" pitchFamily="34" charset="0"/>
+                <a:ea typeface="メイリオ" pitchFamily="34" charset="-122"/>
+                <a:cs typeface="メイリオ" pitchFamily="34" charset="-120"/>
+              </a:rPr>
+              <a:t>↓　その先に育つのが</a:t>
+            </a:r>
+            <a:endParaRPr lang="en-US" sz="1200" dirty="0"/>
+          </a:p>
+        </p:txBody>
+      </p:sp>
+      <p:sp>
+        <p:nvSpPr>
+          <p:cNvPr id="13" name="Shape 11"/>
+          <p:cNvSpPr/>
+          <p:nvPr/>
+        </p:nvSpPr>
+        <p:spPr>
+          <a:xfrm>
+            <a:off x="1298448" y="3602736"/>
+            <a:ext cx="3108960" cy="512064"/>
+          </a:xfrm>
+          <a:prstGeom prst="roundRect">
+            <a:avLst>
+              <a:gd name="adj" fmla="val 12500"/>
+            </a:avLst>
+          </a:prstGeom>
+          <a:solidFill>
+            <a:srgbClr val="E9F7F3"/>
+          </a:solidFill>
+          <a:ln w="12700">
+            <a:solidFill>
+              <a:srgbClr val="B9E5DA"/>
+            </a:solidFill>
+            <a:prstDash val="solid"/>
+          </a:ln>
+        </p:spPr>
+      </p:sp>
+      <p:sp>
+        <p:nvSpPr>
+          <p:cNvPr id="14" name="Text 12"/>
+          <p:cNvSpPr txBox="1"/>
+          <p:nvPr/>
+        </p:nvSpPr>
+        <p:spPr>
+          <a:xfrm>
+            <a:off x="1298448" y="3602736"/>
+            <a:ext cx="3108960" cy="512064"/>
+          </a:xfrm>
+          <a:prstGeom prst="rect">
+            <a:avLst/>
+          </a:prstGeom>
+          <a:noFill/>
+          <a:ln/>
+        </p:spPr>
+        <p:txBody>
+          <a:bodyPr wrap="square" lIns="0" tIns="0" rIns="0" bIns="0" rtlCol="0" anchor="ctr"/>
+          <a:lstStyle/>
+          <a:p>
+            <a:pPr algn="ctr" indent="0" marL="0">
+              <a:lnSpc>
+                <a:spcPct val="115000"/>
+              </a:lnSpc>
+              <a:buNone/>
+            </a:pPr>
+            <a:r>
               <a:rPr lang="en-US" sz="1500" b="1" dirty="0">
                 <a:solidFill>
-                  <a:srgbClr val="FFFFFF"/>
-                </a:solidFill>
-                <a:latin typeface="メイリオ" pitchFamily="34" charset="0"/>
-                <a:ea typeface="メイリオ" pitchFamily="34" charset="-122"/>
-                <a:cs typeface="メイリオ" pitchFamily="34" charset="-120"/>
-              </a:rPr>
-              <a:t>Ⅲ　対話</a:t>
+                  <a:srgbClr val="595959"/>
+                </a:solidFill>
+                <a:latin typeface="メイリオ" pitchFamily="34" charset="0"/>
+                <a:ea typeface="メイリオ" pitchFamily="34" charset="-122"/>
+                <a:cs typeface="メイリオ" pitchFamily="34" charset="-120"/>
+              </a:rPr>
+              <a:t>自己肯定感</a:t>
             </a:r>
             <a:endParaRPr lang="en-US" sz="1500" dirty="0"/>
           </a:p>
@@ -5286,14 +7092,83 @@
       </p:sp>
       <p:sp>
         <p:nvSpPr>
-          <p:cNvPr id="12" name="Text 10"/>
-          <p:cNvSpPr txBox="1"/>
-          <p:nvPr/>
-        </p:nvSpPr>
-        <p:spPr>
-          <a:xfrm>
-            <a:off x="475488" y="4023360"/>
-            <a:ext cx="8193024" cy="822960"/>
+          <p:cNvPr id="15" name="Shape 13"/>
+          <p:cNvSpPr/>
+          <p:nvPr/>
+        </p:nvSpPr>
+        <p:spPr>
+          <a:xfrm>
+            <a:off x="4681728" y="3602736"/>
+            <a:ext cx="3108960" cy="512064"/>
+          </a:xfrm>
+          <a:prstGeom prst="roundRect">
+            <a:avLst>
+              <a:gd name="adj" fmla="val 12500"/>
+            </a:avLst>
+          </a:prstGeom>
+          <a:solidFill>
+            <a:srgbClr val="E9F7F3"/>
+          </a:solidFill>
+          <a:ln w="12700">
+            <a:solidFill>
+              <a:srgbClr val="B9E5DA"/>
+            </a:solidFill>
+            <a:prstDash val="solid"/>
+          </a:ln>
+        </p:spPr>
+      </p:sp>
+      <p:sp>
+        <p:nvSpPr>
+          <p:cNvPr id="16" name="Text 14"/>
+          <p:cNvSpPr txBox="1"/>
+          <p:nvPr/>
+        </p:nvSpPr>
+        <p:spPr>
+          <a:xfrm>
+            <a:off x="4681728" y="3602736"/>
+            <a:ext cx="3108960" cy="512064"/>
+          </a:xfrm>
+          <a:prstGeom prst="rect">
+            <a:avLst/>
+          </a:prstGeom>
+          <a:noFill/>
+          <a:ln/>
+        </p:spPr>
+        <p:txBody>
+          <a:bodyPr wrap="square" lIns="0" tIns="0" rIns="0" bIns="0" rtlCol="0" anchor="ctr"/>
+          <a:lstStyle/>
+          <a:p>
+            <a:pPr algn="ctr" indent="0" marL="0">
+              <a:lnSpc>
+                <a:spcPct val="115000"/>
+              </a:lnSpc>
+              <a:buNone/>
+            </a:pPr>
+            <a:r>
+              <a:rPr lang="en-US" sz="1500" b="1" dirty="0">
+                <a:solidFill>
+                  <a:srgbClr val="595959"/>
+                </a:solidFill>
+                <a:latin typeface="メイリオ" pitchFamily="34" charset="0"/>
+                <a:ea typeface="メイリオ" pitchFamily="34" charset="-122"/>
+                <a:cs typeface="メイリオ" pitchFamily="34" charset="-120"/>
+              </a:rPr>
+              <a:t>学習の自己調整</a:t>
+            </a:r>
+            <a:endParaRPr lang="en-US" sz="1500" dirty="0"/>
+          </a:p>
+        </p:txBody>
+      </p:sp>
+      <p:sp>
+        <p:nvSpPr>
+          <p:cNvPr id="17" name="Text 15"/>
+          <p:cNvSpPr txBox="1"/>
+          <p:nvPr/>
+        </p:nvSpPr>
+        <p:spPr>
+          <a:xfrm>
+            <a:off x="475488" y="4279392"/>
+            <a:ext cx="8193024" cy="457200"/>
           </a:xfrm>
           <a:prstGeom prst="rect">
             <a:avLst/>
@@ -5320,27 +7195,7 @@
                 <a:ea typeface="メイリオ" pitchFamily="34" charset="-122"/>
                 <a:cs typeface="メイリオ" pitchFamily="34" charset="-120"/>
               </a:rPr>
-              <a:t>この３つを９年間で積み上げることが、本校の最大の強みになる。</a:t>
-            </a:r>
-            <a:endParaRPr lang="en-US" sz="1700" dirty="0"/>
-          </a:p>
-          <a:p>
-            <a:pPr algn="l" indent="0" marL="0">
-              <a:lnSpc>
-                <a:spcPct val="120000"/>
-              </a:lnSpc>
-              <a:buNone/>
-            </a:pPr>
-            <a:r>
-              <a:rPr lang="en-US" sz="1700" b="1" dirty="0">
-                <a:solidFill>
-                  <a:srgbClr val="595959"/>
-                </a:solidFill>
-                <a:latin typeface="メイリオ" pitchFamily="34" charset="0"/>
-                <a:ea typeface="メイリオ" pitchFamily="34" charset="-122"/>
-                <a:cs typeface="メイリオ" pitchFamily="34" charset="-120"/>
-              </a:rPr>
-              <a:t>９年間を見通した学びの充実に期待している。</a:t>
+              <a:t>この積み重ねが、９年間を見通した学びの充実につながる。</a:t>
             </a:r>
             <a:endParaRPr lang="en-US" sz="1700" dirty="0"/>
           </a:p>

--- a/指導課訪問_みらい青空学園/指導課訪問_５校時指導助言資料_みらい青空学園_プランB.pptx
+++ b/指導課訪問_みらい青空学園/指導課訪問_５校時指導助言資料_みらい青空学園_プランB.pptx
@@ -792,7 +792,8 @@
 田口先生は、着替えの前に本時の目標と流れを確認され、学習カードで要点を振り返らせていました。
 塚本先生は、授業のはじめに Today’s Goal と Plan を示し、振り返りをワークシートに記入させていました。
 東海林先生は、議論に入る前に前時のワークシートで自分の考えを確かめさせ、本時の考えを書き残させていました。
-いずれも、目標と振り返りが一対で置かれています。教師が管理する学習から、子どもが管理する学習へ。着実に転換が進んでいます。</a:t>
+いずれも、目標と振り返りが一対で置かれています。
+教師が管理する学習から、子どもが管理する学習へ。（間をおく）本日の授業から見えた、いちばん大きな変化です。</a:t>
             </a:r>
             <a:endParaRPr lang="en-US" dirty="0"/>
           </a:p>
@@ -4757,7 +4758,7 @@
         </p:nvSpPr>
         <p:spPr>
           <a:xfrm>
-            <a:off x="320040" y="2304288"/>
+            <a:off x="320040" y="2249424"/>
             <a:ext cx="1417320" cy="566928"/>
           </a:xfrm>
           <a:prstGeom prst="roundRect">
@@ -4779,7 +4780,7 @@
         </p:nvSpPr>
         <p:spPr>
           <a:xfrm>
-            <a:off x="320040" y="2304288"/>
+            <a:off x="320040" y="2249424"/>
             <a:ext cx="1417320" cy="566928"/>
           </a:xfrm>
           <a:prstGeom prst="rect">
@@ -4818,7 +4819,7 @@
         </p:nvSpPr>
         <p:spPr>
           <a:xfrm>
-            <a:off x="1810512" y="2304288"/>
+            <a:off x="1810512" y="2249424"/>
             <a:ext cx="7013448" cy="566928"/>
           </a:xfrm>
           <a:prstGeom prst="roundRect">
@@ -4845,7 +4846,7 @@
         </p:nvSpPr>
         <p:spPr>
           <a:xfrm>
-            <a:off x="1993392" y="2304288"/>
+            <a:off x="1993392" y="2249424"/>
             <a:ext cx="6647688" cy="566928"/>
           </a:xfrm>
           <a:prstGeom prst="rect">
@@ -4926,7 +4927,7 @@
         </p:nvSpPr>
         <p:spPr>
           <a:xfrm>
-            <a:off x="320040" y="2962656"/>
+            <a:off x="320040" y="2889504"/>
             <a:ext cx="1417320" cy="566928"/>
           </a:xfrm>
           <a:prstGeom prst="roundRect">
@@ -4948,7 +4949,7 @@
         </p:nvSpPr>
         <p:spPr>
           <a:xfrm>
-            <a:off x="320040" y="2962656"/>
+            <a:off x="320040" y="2889504"/>
             <a:ext cx="1417320" cy="566928"/>
           </a:xfrm>
           <a:prstGeom prst="rect">
@@ -4987,7 +4988,7 @@
         </p:nvSpPr>
         <p:spPr>
           <a:xfrm>
-            <a:off x="1810512" y="2962656"/>
+            <a:off x="1810512" y="2889504"/>
             <a:ext cx="7013448" cy="566928"/>
           </a:xfrm>
           <a:prstGeom prst="roundRect">
@@ -5014,7 +5015,7 @@
         </p:nvSpPr>
         <p:spPr>
           <a:xfrm>
-            <a:off x="1993392" y="2962656"/>
+            <a:off x="1993392" y="2889504"/>
             <a:ext cx="6647688" cy="566928"/>
           </a:xfrm>
           <a:prstGeom prst="rect">
@@ -5095,7 +5096,7 @@
         </p:nvSpPr>
         <p:spPr>
           <a:xfrm>
-            <a:off x="320040" y="3621024"/>
+            <a:off x="320040" y="3529584"/>
             <a:ext cx="1417320" cy="566928"/>
           </a:xfrm>
           <a:prstGeom prst="roundRect">
@@ -5117,7 +5118,7 @@
         </p:nvSpPr>
         <p:spPr>
           <a:xfrm>
-            <a:off x="320040" y="3621024"/>
+            <a:off x="320040" y="3529584"/>
             <a:ext cx="1417320" cy="566928"/>
           </a:xfrm>
           <a:prstGeom prst="rect">
@@ -5156,7 +5157,7 @@
         </p:nvSpPr>
         <p:spPr>
           <a:xfrm>
-            <a:off x="1810512" y="3621024"/>
+            <a:off x="1810512" y="3529584"/>
             <a:ext cx="7013448" cy="566928"/>
           </a:xfrm>
           <a:prstGeom prst="roundRect">
@@ -5183,7 +5184,7 @@
         </p:nvSpPr>
         <p:spPr>
           <a:xfrm>
-            <a:off x="1993392" y="3621024"/>
+            <a:off x="1993392" y="3529584"/>
             <a:ext cx="6647688" cy="566928"/>
           </a:xfrm>
           <a:prstGeom prst="rect">
@@ -5258,33 +5259,57 @@
       </p:sp>
       <p:sp>
         <p:nvSpPr>
-          <p:cNvPr id="17" name="Text 15"/>
-          <p:cNvSpPr txBox="1"/>
-          <p:nvPr/>
-        </p:nvSpPr>
-        <p:spPr>
-          <a:xfrm>
-            <a:off x="320040" y="4352544"/>
-            <a:ext cx="8503920" cy="457200"/>
-          </a:xfrm>
-          <a:prstGeom prst="rect">
-            <a:avLst/>
-          </a:prstGeom>
-          <a:noFill/>
-          <a:ln/>
-        </p:spPr>
-        <p:txBody>
-          <a:bodyPr wrap="square" lIns="0" tIns="0" rIns="0" bIns="0" rtlCol="0" anchor="t"/>
-          <a:lstStyle/>
-          <a:p>
-            <a:pPr algn="l" indent="0" marL="0">
-              <a:lnSpc>
-                <a:spcPct val="120000"/>
-              </a:lnSpc>
-              <a:buNone/>
-            </a:pPr>
-            <a:r>
-              <a:rPr lang="en-US" sz="1700" b="1" dirty="0">
+          <p:cNvPr id="17" name="Shape 15"/>
+          <p:cNvSpPr/>
+          <p:nvPr/>
+        </p:nvSpPr>
+        <p:spPr>
+          <a:xfrm>
+            <a:off x="320040" y="4224528"/>
+            <a:ext cx="8503920" cy="713232"/>
+          </a:xfrm>
+          <a:prstGeom prst="roundRect">
+            <a:avLst>
+              <a:gd name="adj" fmla="val 8974"/>
+            </a:avLst>
+          </a:prstGeom>
+          <a:solidFill>
+            <a:srgbClr val="FDF0E3"/>
+          </a:solidFill>
+          <a:ln w="19050">
+            <a:solidFill>
+              <a:srgbClr val="F6CFA4"/>
+            </a:solidFill>
+            <a:prstDash val="solid"/>
+          </a:ln>
+        </p:spPr>
+      </p:sp>
+      <p:sp>
+        <p:nvSpPr>
+          <p:cNvPr id="18" name="Text 16"/>
+          <p:cNvSpPr txBox="1"/>
+          <p:nvPr/>
+        </p:nvSpPr>
+        <p:spPr>
+          <a:xfrm>
+            <a:off x="320040" y="4224528"/>
+            <a:ext cx="8503920" cy="713232"/>
+          </a:xfrm>
+          <a:prstGeom prst="rect">
+            <a:avLst/>
+          </a:prstGeom>
+          <a:noFill/>
+          <a:ln/>
+        </p:spPr>
+        <p:txBody>
+          <a:bodyPr wrap="square" lIns="0" tIns="0" rIns="0" bIns="0" rtlCol="0" anchor="ctr"/>
+          <a:lstStyle/>
+          <a:p>
+            <a:pPr algn="ctr" indent="0" marL="0">
+              <a:buNone/>
+            </a:pPr>
+            <a:r>
+              <a:rPr lang="en-US" sz="2200" b="1" dirty="0">
                 <a:solidFill>
                   <a:srgbClr val="595959"/>
                 </a:solidFill>
@@ -5294,14 +5319,11 @@
               </a:rPr>
               <a:t>教師が管理する学習から、</a:t>
             </a:r>
-            <a:pPr algn="l" indent="0" marL="0">
-              <a:lnSpc>
-                <a:spcPct val="120000"/>
-              </a:lnSpc>
-              <a:buNone/>
-            </a:pPr>
-            <a:r>
-              <a:rPr lang="en-US" sz="1700" b="1" dirty="0">
+            <a:pPr algn="ctr" indent="0" marL="0">
+              <a:buNone/>
+            </a:pPr>
+            <a:r>
+              <a:rPr lang="en-US" sz="2200" b="1" dirty="0">
                 <a:solidFill>
                   <a:srgbClr val="EE7B08"/>
                 </a:solidFill>
@@ -5309,26 +5331,9 @@
                 <a:ea typeface="メイリオ" pitchFamily="34" charset="-122"/>
                 <a:cs typeface="メイリオ" pitchFamily="34" charset="-120"/>
               </a:rPr>
-              <a:t>子どもが管理する学習</a:t>
-            </a:r>
-            <a:pPr algn="l" indent="0" marL="0">
-              <a:lnSpc>
-                <a:spcPct val="120000"/>
-              </a:lnSpc>
-              <a:buNone/>
-            </a:pPr>
-            <a:r>
-              <a:rPr lang="en-US" sz="1700" b="1" dirty="0">
-                <a:solidFill>
-                  <a:srgbClr val="595959"/>
-                </a:solidFill>
-                <a:latin typeface="メイリオ" pitchFamily="34" charset="0"/>
-                <a:ea typeface="メイリオ" pitchFamily="34" charset="-122"/>
-                <a:cs typeface="メイリオ" pitchFamily="34" charset="-120"/>
-              </a:rPr>
-              <a:t>へ。着実に転換が進んでいる。</a:t>
-            </a:r>
-            <a:endParaRPr lang="en-US" sz="1700" dirty="0"/>
+              <a:t>子どもが管理する学習へ。</a:t>
+            </a:r>
+            <a:endParaRPr lang="en-US" sz="2200" dirty="0"/>
           </a:p>
         </p:txBody>
       </p:sp>

--- a/指導課訪問_みらい青空学園/指導課訪問_５校時指導助言資料_みらい青空学園_プランB.pptx
+++ b/指導課訪問_みらい青空学園/指導課訪問_５校時指導助言資料_みらい青空学園_プランB.pptx
@@ -971,9 +971,12 @@
           <a:p>
             <a:r>
               <a:rPr lang="en-US" dirty="0"/>
-              <a:t>もう一点。田口先生の指導案の「授業観察の視点」に、こう書かれていました。「指導に当たっての手立ては有効であったか」。
-子どもが学習を調整するように、教師も授業を調整する。手だてを決め、授業で試し、子どもの姿を見て、次の授業に生かす。
-子どもの自己調整と、教師の授業改善。この往還が、９年間の学びを支えていきます。</a:t>
+              <a:t>もう一点、今後に向けてです。
+本日の３つの授業は、保健体育の９年、道徳のＤ組、外国語の７年。教科も学年も違います。それでも、同じ３つの視点で語ることができました。
+だから、教科を越えて見合えます。ここが施設一体型のいちばんの強みだと考えます。
+小学部の教員が中学部を、中学部の教員が小学部を見る。９年後の子どもの姿と、９年前の子どもの姿を、同じ校舎で見られる学校です。見る観点は、見通し、違いに応じる、対話。この３つで足ります。
+学校経営計画に掲げられた「乗り入れ授業」「相互の実践に生かす」を、この３つの観点で動かしていただきたいと思います。
+子どもが学習を調整するように、教師も授業を調整する。その具体が、互いに見合うことだと考えます。</a:t>
             </a:r>
             <a:endParaRPr lang="en-US" dirty="0"/>
           </a:p>
@@ -5928,7 +5931,7 @@
                 <a:ea typeface="メイリオ" pitchFamily="34" charset="-122"/>
                 <a:cs typeface="メイリオ" pitchFamily="34" charset="-120"/>
               </a:rPr>
-              <a:t>　教師も、自らの授業を調整する</a:t>
+              <a:t>　その言葉で、互いの授業を見合う</a:t>
             </a:r>
             <a:endParaRPr lang="en-US" sz="3000" dirty="0"/>
           </a:p>
@@ -5943,33 +5946,90 @@
         <p:spPr>
           <a:xfrm>
             <a:off x="475488" y="1389888"/>
-            <a:ext cx="8193024" cy="292608"/>
-          </a:xfrm>
-          <a:prstGeom prst="rect">
-            <a:avLst/>
-          </a:prstGeom>
-          <a:noFill/>
-          <a:ln/>
-        </p:spPr>
-        <p:txBody>
-          <a:bodyPr wrap="square" lIns="0" tIns="0" rIns="0" bIns="0" rtlCol="0" anchor="ctr"/>
-          <a:lstStyle/>
-          <a:p>
-            <a:pPr algn="l" indent="0" marL="0">
-              <a:buNone/>
-            </a:pPr>
-            <a:r>
-              <a:rPr lang="en-US" sz="1400" b="1" dirty="0">
-                <a:solidFill>
-                  <a:srgbClr val="808080"/>
-                </a:solidFill>
-                <a:latin typeface="メイリオ" pitchFamily="34" charset="0"/>
-                <a:ea typeface="メイリオ" pitchFamily="34" charset="-122"/>
-                <a:cs typeface="メイリオ" pitchFamily="34" charset="-120"/>
-              </a:rPr>
-              <a:t>田口先生の指導案「授業観察の視点」には、こう書かれていた。</a:t>
-            </a:r>
-            <a:endParaRPr lang="en-US" sz="1400" dirty="0"/>
+            <a:ext cx="8193024" cy="731520"/>
+          </a:xfrm>
+          <a:prstGeom prst="rect">
+            <a:avLst/>
+          </a:prstGeom>
+          <a:noFill/>
+          <a:ln/>
+        </p:spPr>
+        <p:txBody>
+          <a:bodyPr wrap="square" lIns="0" tIns="0" rIns="0" bIns="0" rtlCol="0" anchor="t"/>
+          <a:lstStyle/>
+          <a:p>
+            <a:pPr algn="l" indent="0" marL="0">
+              <a:lnSpc>
+                <a:spcPct val="120000"/>
+              </a:lnSpc>
+              <a:buNone/>
+            </a:pPr>
+            <a:r>
+              <a:rPr lang="en-US" sz="1700" b="1" dirty="0">
+                <a:solidFill>
+                  <a:srgbClr val="595959"/>
+                </a:solidFill>
+                <a:latin typeface="メイリオ" pitchFamily="34" charset="0"/>
+                <a:ea typeface="メイリオ" pitchFamily="34" charset="-122"/>
+                <a:cs typeface="メイリオ" pitchFamily="34" charset="-120"/>
+              </a:rPr>
+              <a:t>本日の３つの授業は、保健体育の９年、道徳のＤ組、外国語の７年。</a:t>
+            </a:r>
+            <a:endParaRPr lang="en-US" sz="1700" dirty="0"/>
+          </a:p>
+          <a:p>
+            <a:pPr algn="l" indent="0" marL="0">
+              <a:lnSpc>
+                <a:spcPct val="120000"/>
+              </a:lnSpc>
+              <a:buNone/>
+            </a:pPr>
+            <a:r>
+              <a:rPr lang="en-US" sz="1700" b="1" dirty="0">
+                <a:solidFill>
+                  <a:srgbClr val="595959"/>
+                </a:solidFill>
+                <a:latin typeface="メイリオ" pitchFamily="34" charset="0"/>
+                <a:ea typeface="メイリオ" pitchFamily="34" charset="-122"/>
+                <a:cs typeface="メイリオ" pitchFamily="34" charset="-120"/>
+              </a:rPr>
+              <a:t>教科も学年も違うのに、</a:t>
+            </a:r>
+            <a:pPr algn="l" indent="0" marL="0">
+              <a:lnSpc>
+                <a:spcPct val="120000"/>
+              </a:lnSpc>
+              <a:buNone/>
+            </a:pPr>
+            <a:r>
+              <a:rPr lang="en-US" sz="1700" b="1" dirty="0">
+                <a:solidFill>
+                  <a:srgbClr val="EE7B08"/>
+                </a:solidFill>
+                <a:latin typeface="メイリオ" pitchFamily="34" charset="0"/>
+                <a:ea typeface="メイリオ" pitchFamily="34" charset="-122"/>
+                <a:cs typeface="メイリオ" pitchFamily="34" charset="-120"/>
+              </a:rPr>
+              <a:t>同じ３つの視点</a:t>
+            </a:r>
+            <a:pPr algn="l" indent="0" marL="0">
+              <a:lnSpc>
+                <a:spcPct val="120000"/>
+              </a:lnSpc>
+              <a:buNone/>
+            </a:pPr>
+            <a:r>
+              <a:rPr lang="en-US" sz="1700" b="1" dirty="0">
+                <a:solidFill>
+                  <a:srgbClr val="595959"/>
+                </a:solidFill>
+                <a:latin typeface="メイリオ" pitchFamily="34" charset="0"/>
+                <a:ea typeface="メイリオ" pitchFamily="34" charset="-122"/>
+                <a:cs typeface="メイリオ" pitchFamily="34" charset="-120"/>
+              </a:rPr>
+              <a:t>で語ることができた。</a:t>
+            </a:r>
+            <a:endParaRPr lang="en-US" sz="1700" dirty="0"/>
           </a:p>
         </p:txBody>
       </p:sp>
@@ -5981,12 +6041,78 @@
         </p:nvSpPr>
         <p:spPr>
           <a:xfrm>
-            <a:off x="475488" y="1755648"/>
-            <a:ext cx="8193024" cy="731520"/>
+            <a:off x="475488" y="2157984"/>
+            <a:ext cx="8193024" cy="713232"/>
           </a:xfrm>
           <a:prstGeom prst="roundRect">
             <a:avLst>
-              <a:gd name="adj" fmla="val 7500"/>
+              <a:gd name="adj" fmla="val 8974"/>
+            </a:avLst>
+          </a:prstGeom>
+          <a:solidFill>
+            <a:srgbClr val="FDF0E3"/>
+          </a:solidFill>
+          <a:ln w="19050">
+            <a:solidFill>
+              <a:srgbClr val="F6CFA4"/>
+            </a:solidFill>
+            <a:prstDash val="solid"/>
+          </a:ln>
+        </p:spPr>
+      </p:sp>
+      <p:sp>
+        <p:nvSpPr>
+          <p:cNvPr id="5" name="Text 3"/>
+          <p:cNvSpPr txBox="1"/>
+          <p:nvPr/>
+        </p:nvSpPr>
+        <p:spPr>
+          <a:xfrm>
+            <a:off x="475488" y="2157984"/>
+            <a:ext cx="8193024" cy="713232"/>
+          </a:xfrm>
+          <a:prstGeom prst="rect">
+            <a:avLst/>
+          </a:prstGeom>
+          <a:noFill/>
+          <a:ln/>
+        </p:spPr>
+        <p:txBody>
+          <a:bodyPr wrap="square" lIns="0" tIns="0" rIns="0" bIns="0" rtlCol="0" anchor="ctr"/>
+          <a:lstStyle/>
+          <a:p>
+            <a:pPr algn="ctr" indent="0" marL="0">
+              <a:buNone/>
+            </a:pPr>
+            <a:r>
+              <a:rPr lang="en-US" sz="2200" b="1" dirty="0">
+                <a:solidFill>
+                  <a:srgbClr val="EE7B08"/>
+                </a:solidFill>
+                <a:latin typeface="メイリオ" pitchFamily="34" charset="0"/>
+                <a:ea typeface="メイリオ" pitchFamily="34" charset="-122"/>
+                <a:cs typeface="メイリオ" pitchFamily="34" charset="-120"/>
+              </a:rPr>
+              <a:t>だから、教科を越えて見合える。</a:t>
+            </a:r>
+            <a:endParaRPr lang="en-US" sz="2200" dirty="0"/>
+          </a:p>
+        </p:txBody>
+      </p:sp>
+      <p:sp>
+        <p:nvSpPr>
+          <p:cNvPr id="6" name="Shape 4"/>
+          <p:cNvSpPr/>
+          <p:nvPr/>
+        </p:nvSpPr>
+        <p:spPr>
+          <a:xfrm>
+            <a:off x="475488" y="2999232"/>
+            <a:ext cx="8193024" cy="1207008"/>
+          </a:xfrm>
+          <a:prstGeom prst="roundRect">
+            <a:avLst>
+              <a:gd name="adj" fmla="val 4545"/>
             </a:avLst>
           </a:prstGeom>
           <a:solidFill>
@@ -6002,30 +6128,152 @@
       </p:sp>
       <p:sp>
         <p:nvSpPr>
-          <p:cNvPr id="5" name="Text 3"/>
-          <p:cNvSpPr txBox="1"/>
-          <p:nvPr/>
-        </p:nvSpPr>
-        <p:spPr>
-          <a:xfrm>
-            <a:off x="731520" y="1755648"/>
-            <a:ext cx="7680960" cy="731520"/>
-          </a:xfrm>
-          <a:prstGeom prst="rect">
-            <a:avLst/>
-          </a:prstGeom>
-          <a:noFill/>
-          <a:ln/>
-        </p:spPr>
-        <p:txBody>
-          <a:bodyPr wrap="square" lIns="0" tIns="0" rIns="0" bIns="0" rtlCol="0" anchor="ctr"/>
-          <a:lstStyle/>
-          <a:p>
-            <a:pPr algn="l" indent="0" marL="0">
-              <a:buNone/>
-            </a:pPr>
-            <a:r>
-              <a:rPr lang="en-US" sz="2200" b="1" dirty="0">
+          <p:cNvPr id="7" name="Text 5"/>
+          <p:cNvSpPr txBox="1"/>
+          <p:nvPr/>
+        </p:nvSpPr>
+        <p:spPr>
+          <a:xfrm>
+            <a:off x="731520" y="3108960"/>
+            <a:ext cx="7680960" cy="1024128"/>
+          </a:xfrm>
+          <a:prstGeom prst="rect">
+            <a:avLst/>
+          </a:prstGeom>
+          <a:noFill/>
+          <a:ln/>
+        </p:spPr>
+        <p:txBody>
+          <a:bodyPr wrap="square" lIns="0" tIns="0" rIns="0" bIns="0" rtlCol="0" anchor="t"/>
+          <a:lstStyle/>
+          <a:p>
+            <a:pPr algn="l" indent="0" marL="0">
+              <a:lnSpc>
+                <a:spcPct val="130000"/>
+              </a:lnSpc>
+              <a:buNone/>
+            </a:pPr>
+            <a:r>
+              <a:rPr lang="en-US" sz="1400" b="1" dirty="0">
+                <a:solidFill>
+                  <a:srgbClr val="44C1A3"/>
+                </a:solidFill>
+                <a:latin typeface="メイリオ" pitchFamily="34" charset="0"/>
+                <a:ea typeface="メイリオ" pitchFamily="34" charset="-122"/>
+                <a:cs typeface="メイリオ" pitchFamily="34" charset="-120"/>
+              </a:rPr>
+              <a:t>施設一体型だからこそできること</a:t>
+            </a:r>
+            <a:endParaRPr lang="en-US" sz="1400" dirty="0"/>
+          </a:p>
+          <a:p>
+            <a:pPr algn="l" indent="0" marL="0">
+              <a:lnSpc>
+                <a:spcPct val="130000"/>
+              </a:lnSpc>
+              <a:buNone/>
+            </a:pPr>
+            <a:r>
+              <a:rPr lang="en-US" sz="1400" b="1" dirty="0">
+                <a:solidFill>
+                  <a:srgbClr val="595959"/>
+                </a:solidFill>
+                <a:latin typeface="メイリオ" pitchFamily="34" charset="0"/>
+                <a:ea typeface="メイリオ" pitchFamily="34" charset="-122"/>
+                <a:cs typeface="メイリオ" pitchFamily="34" charset="-120"/>
+              </a:rPr>
+              <a:t>　・小学部の教員が中学部を、中学部の教員が小学部を見る</a:t>
+            </a:r>
+            <a:endParaRPr lang="en-US" sz="1400" dirty="0"/>
+          </a:p>
+          <a:p>
+            <a:pPr algn="l" indent="0" marL="0">
+              <a:lnSpc>
+                <a:spcPct val="130000"/>
+              </a:lnSpc>
+              <a:buNone/>
+            </a:pPr>
+            <a:r>
+              <a:rPr lang="en-US" sz="1400" b="1" dirty="0">
+                <a:solidFill>
+                  <a:srgbClr val="595959"/>
+                </a:solidFill>
+                <a:latin typeface="メイリオ" pitchFamily="34" charset="0"/>
+                <a:ea typeface="メイリオ" pitchFamily="34" charset="-122"/>
+                <a:cs typeface="メイリオ" pitchFamily="34" charset="-120"/>
+              </a:rPr>
+              <a:t>　・９年後の子どもの姿と、９年前の子どもの姿を、同じ校舎で見られる</a:t>
+            </a:r>
+            <a:endParaRPr lang="en-US" sz="1400" dirty="0"/>
+          </a:p>
+          <a:p>
+            <a:pPr algn="l" indent="0" marL="0">
+              <a:lnSpc>
+                <a:spcPct val="130000"/>
+              </a:lnSpc>
+              <a:buNone/>
+            </a:pPr>
+            <a:r>
+              <a:rPr lang="en-US" sz="1400" b="1" dirty="0">
+                <a:solidFill>
+                  <a:srgbClr val="595959"/>
+                </a:solidFill>
+                <a:latin typeface="メイリオ" pitchFamily="34" charset="0"/>
+                <a:ea typeface="メイリオ" pitchFamily="34" charset="-122"/>
+                <a:cs typeface="メイリオ" pitchFamily="34" charset="-120"/>
+              </a:rPr>
+              <a:t>　・見る観点は、Ⅰ見通し／Ⅱ違いに応じる／Ⅲ対話　の３つでよい</a:t>
+            </a:r>
+            <a:endParaRPr lang="en-US" sz="1400" dirty="0"/>
+          </a:p>
+        </p:txBody>
+      </p:sp>
+      <p:sp>
+        <p:nvSpPr>
+          <p:cNvPr id="8" name="Text 6"/>
+          <p:cNvSpPr txBox="1"/>
+          <p:nvPr/>
+        </p:nvSpPr>
+        <p:spPr>
+          <a:xfrm>
+            <a:off x="475488" y="4334256"/>
+            <a:ext cx="8193024" cy="548640"/>
+          </a:xfrm>
+          <a:prstGeom prst="rect">
+            <a:avLst/>
+          </a:prstGeom>
+          <a:noFill/>
+          <a:ln/>
+        </p:spPr>
+        <p:txBody>
+          <a:bodyPr wrap="square" lIns="0" tIns="0" rIns="0" bIns="0" rtlCol="0" anchor="t"/>
+          <a:lstStyle/>
+          <a:p>
+            <a:pPr algn="l" indent="0" marL="0">
+              <a:lnSpc>
+                <a:spcPct val="120000"/>
+              </a:lnSpc>
+              <a:buNone/>
+            </a:pPr>
+            <a:r>
+              <a:rPr lang="en-US" sz="1600" b="1" dirty="0">
+                <a:solidFill>
+                  <a:srgbClr val="595959"/>
+                </a:solidFill>
+                <a:latin typeface="メイリオ" pitchFamily="34" charset="0"/>
+                <a:ea typeface="メイリオ" pitchFamily="34" charset="-122"/>
+                <a:cs typeface="メイリオ" pitchFamily="34" charset="-120"/>
+              </a:rPr>
+              <a:t>学校経営計画の</a:t>
+            </a:r>
+            <a:pPr algn="l" indent="0" marL="0">
+              <a:lnSpc>
+                <a:spcPct val="120000"/>
+              </a:lnSpc>
+              <a:buNone/>
+            </a:pPr>
+            <a:r>
+              <a:rPr lang="en-US" sz="1600" b="1" dirty="0">
                 <a:solidFill>
                   <a:srgbClr val="EE7B08"/>
                 </a:solidFill>
@@ -6033,33 +6281,8 @@
                 <a:ea typeface="メイリオ" pitchFamily="34" charset="-122"/>
                 <a:cs typeface="メイリオ" pitchFamily="34" charset="-120"/>
               </a:rPr>
-              <a:t>「指導に当たっての手立ては有効であったか」</a:t>
-            </a:r>
-            <a:endParaRPr lang="en-US" sz="2200" dirty="0"/>
-          </a:p>
-        </p:txBody>
-      </p:sp>
-      <p:sp>
-        <p:nvSpPr>
-          <p:cNvPr id="6" name="Text 4"/>
-          <p:cNvSpPr txBox="1"/>
-          <p:nvPr/>
-        </p:nvSpPr>
-        <p:spPr>
-          <a:xfrm>
-            <a:off x="475488" y="2670048"/>
-            <a:ext cx="8193024" cy="457200"/>
-          </a:xfrm>
-          <a:prstGeom prst="rect">
-            <a:avLst/>
-          </a:prstGeom>
-          <a:noFill/>
-          <a:ln/>
-        </p:spPr>
-        <p:txBody>
-          <a:bodyPr wrap="square" lIns="0" tIns="0" rIns="0" bIns="0" rtlCol="0" anchor="t"/>
-          <a:lstStyle/>
-          <a:p>
+              <a:t>「乗り入れ授業」「相互の実践に生かす」</a:t>
+            </a:r>
             <a:pPr algn="l" indent="0" marL="0">
               <a:lnSpc>
                 <a:spcPct val="120000"/>
@@ -6067,7 +6290,7 @@
               <a:buNone/>
             </a:pPr>
             <a:r>
-              <a:rPr lang="en-US" sz="1700" b="1" dirty="0">
+              <a:rPr lang="en-US" sz="1600" b="1" dirty="0">
                 <a:solidFill>
                   <a:srgbClr val="595959"/>
                 </a:solidFill>
@@ -6075,498 +6298,9 @@
                 <a:ea typeface="メイリオ" pitchFamily="34" charset="-122"/>
                 <a:cs typeface="メイリオ" pitchFamily="34" charset="-120"/>
               </a:rPr>
-              <a:t>子どもが学習を調整するように、教師も授業を調整する。</a:t>
-            </a:r>
-            <a:endParaRPr lang="en-US" sz="1700" dirty="0"/>
-          </a:p>
-        </p:txBody>
-      </p:sp>
-      <p:sp>
-        <p:nvSpPr>
-          <p:cNvPr id="7" name="Shape 5"/>
-          <p:cNvSpPr/>
-          <p:nvPr/>
-        </p:nvSpPr>
-        <p:spPr>
-          <a:xfrm>
-            <a:off x="320040" y="3182112"/>
-            <a:ext cx="2011680" cy="530352"/>
-          </a:xfrm>
-          <a:prstGeom prst="roundRect">
-            <a:avLst>
-              <a:gd name="adj" fmla="val 12069"/>
-            </a:avLst>
-          </a:prstGeom>
-          <a:solidFill>
-            <a:srgbClr val="E9F7F3"/>
-          </a:solidFill>
-          <a:ln w="12700">
-            <a:solidFill>
-              <a:srgbClr val="B9E5DA"/>
-            </a:solidFill>
-            <a:prstDash val="solid"/>
-          </a:ln>
-        </p:spPr>
-      </p:sp>
-      <p:sp>
-        <p:nvSpPr>
-          <p:cNvPr id="8" name="Text 6"/>
-          <p:cNvSpPr txBox="1"/>
-          <p:nvPr/>
-        </p:nvSpPr>
-        <p:spPr>
-          <a:xfrm>
-            <a:off x="320040" y="3182112"/>
-            <a:ext cx="2011680" cy="530352"/>
-          </a:xfrm>
-          <a:prstGeom prst="rect">
-            <a:avLst/>
-          </a:prstGeom>
-          <a:noFill/>
-          <a:ln/>
-        </p:spPr>
-        <p:txBody>
-          <a:bodyPr wrap="square" lIns="0" tIns="0" rIns="0" bIns="0" rtlCol="0" anchor="ctr"/>
-          <a:lstStyle/>
-          <a:p>
-            <a:pPr algn="ctr" indent="0" marL="0">
-              <a:lnSpc>
-                <a:spcPct val="115000"/>
-              </a:lnSpc>
-              <a:buNone/>
-            </a:pPr>
-            <a:r>
-              <a:rPr lang="en-US" sz="1300" b="1" dirty="0">
-                <a:solidFill>
-                  <a:srgbClr val="595959"/>
-                </a:solidFill>
-                <a:latin typeface="メイリオ" pitchFamily="34" charset="0"/>
-                <a:ea typeface="メイリオ" pitchFamily="34" charset="-122"/>
-                <a:cs typeface="メイリオ" pitchFamily="34" charset="-120"/>
-              </a:rPr>
-              <a:t>手だてを決める</a:t>
-            </a:r>
-            <a:endParaRPr lang="en-US" sz="1300" dirty="0"/>
-          </a:p>
-        </p:txBody>
-      </p:sp>
-      <p:sp>
-        <p:nvSpPr>
-          <p:cNvPr id="9" name="Text 7"/>
-          <p:cNvSpPr txBox="1"/>
-          <p:nvPr/>
-        </p:nvSpPr>
-        <p:spPr>
-          <a:xfrm>
-            <a:off x="2331720" y="3182112"/>
-            <a:ext cx="182880" cy="530352"/>
-          </a:xfrm>
-          <a:prstGeom prst="rect">
-            <a:avLst/>
-          </a:prstGeom>
-          <a:noFill/>
-          <a:ln/>
-        </p:spPr>
-        <p:txBody>
-          <a:bodyPr wrap="square" lIns="0" tIns="0" rIns="0" bIns="0" rtlCol="0" anchor="ctr"/>
-          <a:lstStyle/>
-          <a:p>
-            <a:pPr algn="ctr" indent="0" marL="0">
-              <a:buNone/>
-            </a:pPr>
-            <a:r>
-              <a:rPr lang="en-US" sz="1400" b="1" dirty="0">
-                <a:solidFill>
-                  <a:srgbClr val="808080"/>
-                </a:solidFill>
-                <a:latin typeface="メイリオ" pitchFamily="34" charset="0"/>
-                <a:ea typeface="メイリオ" pitchFamily="34" charset="-122"/>
-                <a:cs typeface="メイリオ" pitchFamily="34" charset="-120"/>
-              </a:rPr>
-              <a:t>→</a:t>
-            </a:r>
-            <a:endParaRPr lang="en-US" sz="1400" dirty="0"/>
-          </a:p>
-        </p:txBody>
-      </p:sp>
-      <p:sp>
-        <p:nvSpPr>
-          <p:cNvPr id="10" name="Shape 8"/>
-          <p:cNvSpPr/>
-          <p:nvPr/>
-        </p:nvSpPr>
-        <p:spPr>
-          <a:xfrm>
-            <a:off x="2514600" y="3182112"/>
-            <a:ext cx="2011680" cy="530352"/>
-          </a:xfrm>
-          <a:prstGeom prst="roundRect">
-            <a:avLst>
-              <a:gd name="adj" fmla="val 12069"/>
-            </a:avLst>
-          </a:prstGeom>
-          <a:solidFill>
-            <a:srgbClr val="E9F7F3"/>
-          </a:solidFill>
-          <a:ln w="12700">
-            <a:solidFill>
-              <a:srgbClr val="B9E5DA"/>
-            </a:solidFill>
-            <a:prstDash val="solid"/>
-          </a:ln>
-        </p:spPr>
-      </p:sp>
-      <p:sp>
-        <p:nvSpPr>
-          <p:cNvPr id="11" name="Text 9"/>
-          <p:cNvSpPr txBox="1"/>
-          <p:nvPr/>
-        </p:nvSpPr>
-        <p:spPr>
-          <a:xfrm>
-            <a:off x="2514600" y="3182112"/>
-            <a:ext cx="2011680" cy="530352"/>
-          </a:xfrm>
-          <a:prstGeom prst="rect">
-            <a:avLst/>
-          </a:prstGeom>
-          <a:noFill/>
-          <a:ln/>
-        </p:spPr>
-        <p:txBody>
-          <a:bodyPr wrap="square" lIns="0" tIns="0" rIns="0" bIns="0" rtlCol="0" anchor="ctr"/>
-          <a:lstStyle/>
-          <a:p>
-            <a:pPr algn="ctr" indent="0" marL="0">
-              <a:lnSpc>
-                <a:spcPct val="115000"/>
-              </a:lnSpc>
-              <a:buNone/>
-            </a:pPr>
-            <a:r>
-              <a:rPr lang="en-US" sz="1300" b="1" dirty="0">
-                <a:solidFill>
-                  <a:srgbClr val="595959"/>
-                </a:solidFill>
-                <a:latin typeface="メイリオ" pitchFamily="34" charset="0"/>
-                <a:ea typeface="メイリオ" pitchFamily="34" charset="-122"/>
-                <a:cs typeface="メイリオ" pitchFamily="34" charset="-120"/>
-              </a:rPr>
-              <a:t>授業で試す</a:t>
-            </a:r>
-            <a:endParaRPr lang="en-US" sz="1300" dirty="0"/>
-          </a:p>
-        </p:txBody>
-      </p:sp>
-      <p:sp>
-        <p:nvSpPr>
-          <p:cNvPr id="12" name="Text 10"/>
-          <p:cNvSpPr txBox="1"/>
-          <p:nvPr/>
-        </p:nvSpPr>
-        <p:spPr>
-          <a:xfrm>
-            <a:off x="4526280" y="3182112"/>
-            <a:ext cx="182880" cy="530352"/>
-          </a:xfrm>
-          <a:prstGeom prst="rect">
-            <a:avLst/>
-          </a:prstGeom>
-          <a:noFill/>
-          <a:ln/>
-        </p:spPr>
-        <p:txBody>
-          <a:bodyPr wrap="square" lIns="0" tIns="0" rIns="0" bIns="0" rtlCol="0" anchor="ctr"/>
-          <a:lstStyle/>
-          <a:p>
-            <a:pPr algn="ctr" indent="0" marL="0">
-              <a:buNone/>
-            </a:pPr>
-            <a:r>
-              <a:rPr lang="en-US" sz="1400" b="1" dirty="0">
-                <a:solidFill>
-                  <a:srgbClr val="808080"/>
-                </a:solidFill>
-                <a:latin typeface="メイリオ" pitchFamily="34" charset="0"/>
-                <a:ea typeface="メイリオ" pitchFamily="34" charset="-122"/>
-                <a:cs typeface="メイリオ" pitchFamily="34" charset="-120"/>
-              </a:rPr>
-              <a:t>→</a:t>
-            </a:r>
-            <a:endParaRPr lang="en-US" sz="1400" dirty="0"/>
-          </a:p>
-        </p:txBody>
-      </p:sp>
-      <p:sp>
-        <p:nvSpPr>
-          <p:cNvPr id="13" name="Shape 11"/>
-          <p:cNvSpPr/>
-          <p:nvPr/>
-        </p:nvSpPr>
-        <p:spPr>
-          <a:xfrm>
-            <a:off x="4709160" y="3182112"/>
-            <a:ext cx="2011680" cy="530352"/>
-          </a:xfrm>
-          <a:prstGeom prst="roundRect">
-            <a:avLst>
-              <a:gd name="adj" fmla="val 12069"/>
-            </a:avLst>
-          </a:prstGeom>
-          <a:solidFill>
-            <a:srgbClr val="E9F7F3"/>
-          </a:solidFill>
-          <a:ln w="12700">
-            <a:solidFill>
-              <a:srgbClr val="B9E5DA"/>
-            </a:solidFill>
-            <a:prstDash val="solid"/>
-          </a:ln>
-        </p:spPr>
-      </p:sp>
-      <p:sp>
-        <p:nvSpPr>
-          <p:cNvPr id="14" name="Text 12"/>
-          <p:cNvSpPr txBox="1"/>
-          <p:nvPr/>
-        </p:nvSpPr>
-        <p:spPr>
-          <a:xfrm>
-            <a:off x="4709160" y="3182112"/>
-            <a:ext cx="2011680" cy="530352"/>
-          </a:xfrm>
-          <a:prstGeom prst="rect">
-            <a:avLst/>
-          </a:prstGeom>
-          <a:noFill/>
-          <a:ln/>
-        </p:spPr>
-        <p:txBody>
-          <a:bodyPr wrap="square" lIns="0" tIns="0" rIns="0" bIns="0" rtlCol="0" anchor="ctr"/>
-          <a:lstStyle/>
-          <a:p>
-            <a:pPr algn="ctr" indent="0" marL="0">
-              <a:lnSpc>
-                <a:spcPct val="115000"/>
-              </a:lnSpc>
-              <a:buNone/>
-            </a:pPr>
-            <a:r>
-              <a:rPr lang="en-US" sz="1300" b="1" dirty="0">
-                <a:solidFill>
-                  <a:srgbClr val="595959"/>
-                </a:solidFill>
-                <a:latin typeface="メイリオ" pitchFamily="34" charset="0"/>
-                <a:ea typeface="メイリオ" pitchFamily="34" charset="-122"/>
-                <a:cs typeface="メイリオ" pitchFamily="34" charset="-120"/>
-              </a:rPr>
-              <a:t>子どもの姿を見る</a:t>
-            </a:r>
-            <a:endParaRPr lang="en-US" sz="1300" dirty="0"/>
-          </a:p>
-        </p:txBody>
-      </p:sp>
-      <p:sp>
-        <p:nvSpPr>
-          <p:cNvPr id="15" name="Text 13"/>
-          <p:cNvSpPr txBox="1"/>
-          <p:nvPr/>
-        </p:nvSpPr>
-        <p:spPr>
-          <a:xfrm>
-            <a:off x="6720840" y="3182112"/>
-            <a:ext cx="182880" cy="530352"/>
-          </a:xfrm>
-          <a:prstGeom prst="rect">
-            <a:avLst/>
-          </a:prstGeom>
-          <a:noFill/>
-          <a:ln/>
-        </p:spPr>
-        <p:txBody>
-          <a:bodyPr wrap="square" lIns="0" tIns="0" rIns="0" bIns="0" rtlCol="0" anchor="ctr"/>
-          <a:lstStyle/>
-          <a:p>
-            <a:pPr algn="ctr" indent="0" marL="0">
-              <a:buNone/>
-            </a:pPr>
-            <a:r>
-              <a:rPr lang="en-US" sz="1400" b="1" dirty="0">
-                <a:solidFill>
-                  <a:srgbClr val="808080"/>
-                </a:solidFill>
-                <a:latin typeface="メイリオ" pitchFamily="34" charset="0"/>
-                <a:ea typeface="メイリオ" pitchFamily="34" charset="-122"/>
-                <a:cs typeface="メイリオ" pitchFamily="34" charset="-120"/>
-              </a:rPr>
-              <a:t>→</a:t>
-            </a:r>
-            <a:endParaRPr lang="en-US" sz="1400" dirty="0"/>
-          </a:p>
-        </p:txBody>
-      </p:sp>
-      <p:sp>
-        <p:nvSpPr>
-          <p:cNvPr id="16" name="Shape 14"/>
-          <p:cNvSpPr/>
-          <p:nvPr/>
-        </p:nvSpPr>
-        <p:spPr>
-          <a:xfrm>
-            <a:off x="6903720" y="3182112"/>
-            <a:ext cx="2011680" cy="530352"/>
-          </a:xfrm>
-          <a:prstGeom prst="roundRect">
-            <a:avLst>
-              <a:gd name="adj" fmla="val 12069"/>
-            </a:avLst>
-          </a:prstGeom>
-          <a:solidFill>
-            <a:srgbClr val="E9F7F3"/>
-          </a:solidFill>
-          <a:ln w="12700">
-            <a:solidFill>
-              <a:srgbClr val="B9E5DA"/>
-            </a:solidFill>
-            <a:prstDash val="solid"/>
-          </a:ln>
-        </p:spPr>
-      </p:sp>
-      <p:sp>
-        <p:nvSpPr>
-          <p:cNvPr id="17" name="Text 15"/>
-          <p:cNvSpPr txBox="1"/>
-          <p:nvPr/>
-        </p:nvSpPr>
-        <p:spPr>
-          <a:xfrm>
-            <a:off x="6903720" y="3182112"/>
-            <a:ext cx="2011680" cy="530352"/>
-          </a:xfrm>
-          <a:prstGeom prst="rect">
-            <a:avLst/>
-          </a:prstGeom>
-          <a:noFill/>
-          <a:ln/>
-        </p:spPr>
-        <p:txBody>
-          <a:bodyPr wrap="square" lIns="0" tIns="0" rIns="0" bIns="0" rtlCol="0" anchor="ctr"/>
-          <a:lstStyle/>
-          <a:p>
-            <a:pPr algn="ctr" indent="0" marL="0">
-              <a:lnSpc>
-                <a:spcPct val="115000"/>
-              </a:lnSpc>
-              <a:buNone/>
-            </a:pPr>
-            <a:r>
-              <a:rPr lang="en-US" sz="1300" b="1" dirty="0">
-                <a:solidFill>
-                  <a:srgbClr val="595959"/>
-                </a:solidFill>
-                <a:latin typeface="メイリオ" pitchFamily="34" charset="0"/>
-                <a:ea typeface="メイリオ" pitchFamily="34" charset="-122"/>
-                <a:cs typeface="メイリオ" pitchFamily="34" charset="-120"/>
-              </a:rPr>
-              <a:t>次の授業に生かす</a:t>
-            </a:r>
-            <a:endParaRPr lang="en-US" sz="1300" dirty="0"/>
-          </a:p>
-        </p:txBody>
-      </p:sp>
-      <p:sp>
-        <p:nvSpPr>
-          <p:cNvPr id="18" name="Text 16"/>
-          <p:cNvSpPr txBox="1"/>
-          <p:nvPr/>
-        </p:nvSpPr>
-        <p:spPr>
-          <a:xfrm>
-            <a:off x="475488" y="3950208"/>
-            <a:ext cx="8193024" cy="822960"/>
-          </a:xfrm>
-          <a:prstGeom prst="rect">
-            <a:avLst/>
-          </a:prstGeom>
-          <a:noFill/>
-          <a:ln/>
-        </p:spPr>
-        <p:txBody>
-          <a:bodyPr wrap="square" lIns="0" tIns="0" rIns="0" bIns="0" rtlCol="0" anchor="t"/>
-          <a:lstStyle/>
-          <a:p>
-            <a:pPr algn="l" indent="0" marL="0">
-              <a:lnSpc>
-                <a:spcPct val="120000"/>
-              </a:lnSpc>
-              <a:buNone/>
-            </a:pPr>
-            <a:r>
-              <a:rPr lang="en-US" sz="1700" b="1" dirty="0">
-                <a:solidFill>
-                  <a:srgbClr val="595959"/>
-                </a:solidFill>
-                <a:latin typeface="メイリオ" pitchFamily="34" charset="0"/>
-                <a:ea typeface="メイリオ" pitchFamily="34" charset="-122"/>
-                <a:cs typeface="メイリオ" pitchFamily="34" charset="-120"/>
-              </a:rPr>
-              <a:t>子どもの自己調整と、教師の授業改善。</a:t>
-            </a:r>
-            <a:endParaRPr lang="en-US" sz="1700" dirty="0"/>
-          </a:p>
-          <a:p>
-            <a:pPr algn="l" indent="0" marL="0">
-              <a:lnSpc>
-                <a:spcPct val="120000"/>
-              </a:lnSpc>
-              <a:buNone/>
-            </a:pPr>
-            <a:r>
-              <a:rPr lang="en-US" sz="1700" b="1" dirty="0">
-                <a:solidFill>
-                  <a:srgbClr val="595959"/>
-                </a:solidFill>
-                <a:latin typeface="メイリオ" pitchFamily="34" charset="0"/>
-                <a:ea typeface="メイリオ" pitchFamily="34" charset="-122"/>
-                <a:cs typeface="メイリオ" pitchFamily="34" charset="-120"/>
-              </a:rPr>
-              <a:t>この</a:t>
-            </a:r>
-            <a:pPr algn="l" indent="0" marL="0">
-              <a:lnSpc>
-                <a:spcPct val="120000"/>
-              </a:lnSpc>
-              <a:buNone/>
-            </a:pPr>
-            <a:r>
-              <a:rPr lang="en-US" sz="1700" b="1" dirty="0">
-                <a:solidFill>
-                  <a:srgbClr val="EE7B08"/>
-                </a:solidFill>
-                <a:latin typeface="メイリオ" pitchFamily="34" charset="0"/>
-                <a:ea typeface="メイリオ" pitchFamily="34" charset="-122"/>
-                <a:cs typeface="メイリオ" pitchFamily="34" charset="-120"/>
-              </a:rPr>
-              <a:t>往還</a:t>
-            </a:r>
-            <a:pPr algn="l" indent="0" marL="0">
-              <a:lnSpc>
-                <a:spcPct val="120000"/>
-              </a:lnSpc>
-              <a:buNone/>
-            </a:pPr>
-            <a:r>
-              <a:rPr lang="en-US" sz="1700" b="1" dirty="0">
-                <a:solidFill>
-                  <a:srgbClr val="595959"/>
-                </a:solidFill>
-                <a:latin typeface="メイリオ" pitchFamily="34" charset="0"/>
-                <a:ea typeface="メイリオ" pitchFamily="34" charset="-122"/>
-                <a:cs typeface="メイリオ" pitchFamily="34" charset="-120"/>
-              </a:rPr>
-              <a:t>が、９年間の学びを支えていく。</a:t>
-            </a:r>
-            <a:endParaRPr lang="en-US" sz="1700" dirty="0"/>
+              <a:t>を、この３つで動かしたい。</a:t>
+            </a:r>
+            <a:endParaRPr lang="en-US" sz="1600" dirty="0"/>
           </a:p>
         </p:txBody>
       </p:sp>

--- a/指導課訪問_みらい青空学園/指導課訪問_５校時指導助言資料_みらい青空学園_プランB.pptx
+++ b/指導課訪問_みらい青空学園/指導課訪問_５校時指導助言資料_みらい青空学園_プランB.pptx
@@ -883,7 +883,7 @@
               <a:rPr lang="en-US" dirty="0"/>
               <a:t>今後に向けてです。本日見えた３つの視点は、学年や教科を越えて使えます。
 学校経営計画に掲げられた「主体的・対話的で深い学びの実現に向けた授業改善」「個に応じたきめ細やかな指導・支援の充実」とも重なります。
-この３つを、９年間の共通の言葉にしていただきたい。小竹小学校との校区別協議会でも、「目指す１５歳の姿」として共有できるはずです。</a:t>
+この３つを、９年間の共通の言葉にしていただきたい。学年ごと、教科ごとに閉じない。同じ言葉で語れることが、９年間をつなぎます。</a:t>
             </a:r>
             <a:endParaRPr lang="en-US" dirty="0"/>
           </a:p>
@@ -5479,12 +5479,12 @@
         </p:nvSpPr>
         <p:spPr>
           <a:xfrm>
-            <a:off x="475488" y="2029968"/>
-            <a:ext cx="2468880" cy="566928"/>
+            <a:off x="475488" y="2066544"/>
+            <a:ext cx="2468880" cy="603504"/>
           </a:xfrm>
           <a:prstGeom prst="roundRect">
             <a:avLst>
-              <a:gd name="adj" fmla="val 11290"/>
+              <a:gd name="adj" fmla="val 10606"/>
             </a:avLst>
           </a:prstGeom>
           <a:solidFill>
@@ -5501,8 +5501,8 @@
         </p:nvSpPr>
         <p:spPr>
           <a:xfrm>
-            <a:off x="475488" y="2029968"/>
-            <a:ext cx="2468880" cy="566928"/>
+            <a:off x="475488" y="2066544"/>
+            <a:ext cx="2468880" cy="603504"/>
           </a:xfrm>
           <a:prstGeom prst="rect">
             <a:avLst/>
@@ -5543,12 +5543,12 @@
         </p:nvSpPr>
         <p:spPr>
           <a:xfrm>
-            <a:off x="3218688" y="2029968"/>
-            <a:ext cx="2468880" cy="566928"/>
+            <a:off x="3218688" y="2066544"/>
+            <a:ext cx="2468880" cy="603504"/>
           </a:xfrm>
           <a:prstGeom prst="roundRect">
             <a:avLst>
-              <a:gd name="adj" fmla="val 11290"/>
+              <a:gd name="adj" fmla="val 10606"/>
             </a:avLst>
           </a:prstGeom>
           <a:solidFill>
@@ -5565,8 +5565,8 @@
         </p:nvSpPr>
         <p:spPr>
           <a:xfrm>
-            <a:off x="3218688" y="2029968"/>
-            <a:ext cx="2468880" cy="566928"/>
+            <a:off x="3218688" y="2066544"/>
+            <a:ext cx="2468880" cy="603504"/>
           </a:xfrm>
           <a:prstGeom prst="rect">
             <a:avLst/>
@@ -5607,12 +5607,12 @@
         </p:nvSpPr>
         <p:spPr>
           <a:xfrm>
-            <a:off x="5961888" y="2029968"/>
-            <a:ext cx="2468880" cy="566928"/>
+            <a:off x="5961888" y="2066544"/>
+            <a:ext cx="2468880" cy="603504"/>
           </a:xfrm>
           <a:prstGeom prst="roundRect">
             <a:avLst>
-              <a:gd name="adj" fmla="val 11290"/>
+              <a:gd name="adj" fmla="val 10606"/>
             </a:avLst>
           </a:prstGeom>
           <a:solidFill>
@@ -5629,8 +5629,8 @@
         </p:nvSpPr>
         <p:spPr>
           <a:xfrm>
-            <a:off x="5961888" y="2029968"/>
-            <a:ext cx="2468880" cy="566928"/>
+            <a:off x="5961888" y="2066544"/>
+            <a:ext cx="2468880" cy="603504"/>
           </a:xfrm>
           <a:prstGeom prst="rect">
             <a:avLst/>
@@ -5671,12 +5671,12 @@
         </p:nvSpPr>
         <p:spPr>
           <a:xfrm>
-            <a:off x="475488" y="2798064"/>
-            <a:ext cx="8193024" cy="1188720"/>
+            <a:off x="475488" y="2907792"/>
+            <a:ext cx="8193024" cy="1207008"/>
           </a:xfrm>
           <a:prstGeom prst="roundRect">
             <a:avLst>
-              <a:gd name="adj" fmla="val 4615"/>
+              <a:gd name="adj" fmla="val 4545"/>
             </a:avLst>
           </a:prstGeom>
           <a:solidFill>
@@ -5698,7 +5698,7 @@
         </p:nvSpPr>
         <p:spPr>
           <a:xfrm>
-            <a:off x="731520" y="2907792"/>
+            <a:off x="731520" y="3035808"/>
             <a:ext cx="7680960" cy="1005840"/>
           </a:xfrm>
           <a:prstGeom prst="rect">
@@ -5780,7 +5780,7 @@
         </p:nvSpPr>
         <p:spPr>
           <a:xfrm>
-            <a:off x="475488" y="4114800"/>
+            <a:off x="475488" y="4261104"/>
             <a:ext cx="8193024" cy="548640"/>
           </a:xfrm>
           <a:prstGeom prst="rect">
@@ -5808,7 +5808,7 @@
                 <a:ea typeface="メイリオ" pitchFamily="34" charset="-122"/>
                 <a:cs typeface="メイリオ" pitchFamily="34" charset="-120"/>
               </a:rPr>
-              <a:t>小竹小学校との校区別協議会で、</a:t>
+              <a:t>学年ごと、教科ごとに閉じない。</a:t>
             </a:r>
             <a:pPr algn="l" indent="0" marL="0">
               <a:lnSpc>
@@ -5825,7 +5825,7 @@
                 <a:ea typeface="メイリオ" pitchFamily="34" charset="-122"/>
                 <a:cs typeface="メイリオ" pitchFamily="34" charset="-120"/>
               </a:rPr>
-              <a:t>「目指す１５歳の姿」</a:t>
+              <a:t>同じ言葉で語れること</a:t>
             </a:r>
             <a:pPr algn="l" indent="0" marL="0">
               <a:lnSpc>
@@ -5842,7 +5842,7 @@
                 <a:ea typeface="メイリオ" pitchFamily="34" charset="-122"/>
                 <a:cs typeface="メイリオ" pitchFamily="34" charset="-120"/>
               </a:rPr>
-              <a:t>として共有したい。</a:t>
+              <a:t>が、９年間をつなぐ。</a:t>
             </a:r>
             <a:endParaRPr lang="en-US" sz="1700" dirty="0"/>
           </a:p>

--- a/指導課訪問_みらい青空学園/指導課訪問_５校時指導助言資料_みらい青空学園_プランB.pptx
+++ b/指導課訪問_みらい青空学園/指導課訪問_５校時指導助言資料_みらい青空学園_プランB.pptx
@@ -516,8 +516,8 @@
           <a:p>
             <a:r>
               <a:rPr lang="en-US" dirty="0"/>
-              <a:t>本日は、貴重な授業を参観させていただき、誠にありがとうございました。練馬区教育委員会指導課の紺多と申します。
-１０分間、お時間をいただきます。本日申し上げたいことは、この一文に尽きます。「違い」を生かす授業が、９年間の学びをつなぐ。</a:t>
+              <a:t>（挨拶・自己紹介・御礼は、資料に入る前に１〜２分で行う）
+それでは、始めます。本日申し上げたいことは、この一文に尽きます。「違い」を生かす授業が、９年間の学びをつなぐ。</a:t>
             </a:r>
             <a:endParaRPr lang="en-US" dirty="0"/>
           </a:p>
